--- a/Project Presentation.pptx
+++ b/Project Presentation.pptx
@@ -2,7 +2,7 @@
 <file path=ppt/presentation.xml><?xml version="1.0" encoding="utf-8"?>
 <p:presentation xmlns:a="http://schemas.openxmlformats.org/drawingml/2006/main" xmlns:r="http://schemas.openxmlformats.org/officeDocument/2006/relationships" xmlns:p="http://schemas.openxmlformats.org/presentationml/2006/main" saveSubsetFonts="1">
   <p:sldMasterIdLst>
-    <p:sldMasterId id="2147483660" r:id="rId1"/>
+    <p:sldMasterId id="2147483774" r:id="rId1"/>
   </p:sldMasterIdLst>
   <p:sldIdLst>
     <p:sldId id="256" r:id="rId2"/>
@@ -10,10 +10,9 @@
     <p:sldId id="257" r:id="rId4"/>
     <p:sldId id="258" r:id="rId5"/>
     <p:sldId id="266" r:id="rId6"/>
-    <p:sldId id="262" r:id="rId7"/>
-    <p:sldId id="264" r:id="rId8"/>
-    <p:sldId id="265" r:id="rId9"/>
-    <p:sldId id="267" r:id="rId10"/>
+    <p:sldId id="268" r:id="rId7"/>
+    <p:sldId id="265" r:id="rId8"/>
+    <p:sldId id="267" r:id="rId9"/>
   </p:sldIdLst>
   <p:sldSz cx="12192000" cy="6858000"/>
   <p:notesSz cx="6858000" cy="9144000"/>
@@ -139,6 +138,44 @@
       </p:grpSpPr>
       <p:sp>
         <p:nvSpPr>
+          <p:cNvPr id="8" name="Rectangle 7"/>
+          <p:cNvSpPr/>
+          <p:nvPr/>
+        </p:nvSpPr>
+        <p:spPr>
+          <a:xfrm>
+            <a:off x="11292840" y="0"/>
+            <a:ext cx="914400" cy="6858000"/>
+          </a:xfrm>
+          <a:prstGeom prst="rect">
+            <a:avLst/>
+          </a:prstGeom>
+          <a:solidFill>
+            <a:srgbClr val="303030"/>
+          </a:solidFill>
+          <a:ln>
+            <a:noFill/>
+          </a:ln>
+        </p:spPr>
+        <p:style>
+          <a:lnRef idx="2">
+            <a:schemeClr val="accent1">
+              <a:shade val="50000"/>
+            </a:schemeClr>
+          </a:lnRef>
+          <a:fillRef idx="1">
+            <a:schemeClr val="accent1"/>
+          </a:fillRef>
+          <a:effectRef idx="0">
+            <a:schemeClr val="accent1"/>
+          </a:effectRef>
+          <a:fontRef idx="minor">
+            <a:schemeClr val="lt1"/>
+          </a:fontRef>
+        </p:style>
+      </p:sp>
+      <p:sp>
+        <p:nvSpPr>
           <p:cNvPr id="2" name="Title 1"/>
           <p:cNvSpPr>
             <a:spLocks noGrp="1"/>
@@ -149,8 +186,8 @@
         </p:nvSpPr>
         <p:spPr>
           <a:xfrm>
-            <a:off x="684212" y="685799"/>
-            <a:ext cx="8001000" cy="2971801"/>
+            <a:off x="1261872" y="758952"/>
+            <a:ext cx="9418320" cy="4041648"/>
           </a:xfrm>
         </p:spPr>
         <p:txBody>
@@ -159,8 +196,13 @@
           </a:bodyPr>
           <a:lstStyle>
             <a:lvl1pPr algn="l">
-              <a:defRPr sz="4800">
-                <a:effectLst/>
+              <a:lnSpc>
+                <a:spcPct val="85000"/>
+              </a:lnSpc>
+              <a:defRPr sz="7200" baseline="0">
+                <a:solidFill>
+                  <a:schemeClr val="tx1"/>
+                </a:solidFill>
               </a:defRPr>
             </a:lvl1pPr>
           </a:lstStyle>
@@ -185,104 +227,56 @@
         </p:nvSpPr>
         <p:spPr>
           <a:xfrm>
-            <a:off x="684212" y="3843867"/>
-            <a:ext cx="6400800" cy="1947333"/>
+            <a:off x="1261872" y="4800600"/>
+            <a:ext cx="9418320" cy="1691640"/>
           </a:xfrm>
         </p:spPr>
         <p:txBody>
-          <a:bodyPr anchor="t">
+          <a:bodyPr>
             <a:normAutofit/>
           </a:bodyPr>
           <a:lstStyle>
             <a:lvl1pPr marL="0" indent="0" algn="l">
               <a:buNone/>
-              <a:defRPr sz="2100">
+              <a:defRPr sz="2200" baseline="0">
                 <a:solidFill>
-                  <a:schemeClr val="bg2">
-                    <a:lumMod val="75000"/>
+                  <a:schemeClr val="tx1">
+                    <a:lumMod val="65000"/>
                   </a:schemeClr>
                 </a:solidFill>
               </a:defRPr>
             </a:lvl1pPr>
             <a:lvl2pPr marL="457200" indent="0" algn="ctr">
               <a:buNone/>
-              <a:defRPr>
-                <a:solidFill>
-                  <a:schemeClr val="tx1">
-                    <a:tint val="75000"/>
-                  </a:schemeClr>
-                </a:solidFill>
-              </a:defRPr>
+              <a:defRPr sz="2200"/>
             </a:lvl2pPr>
             <a:lvl3pPr marL="914400" indent="0" algn="ctr">
               <a:buNone/>
-              <a:defRPr>
-                <a:solidFill>
-                  <a:schemeClr val="tx1">
-                    <a:tint val="75000"/>
-                  </a:schemeClr>
-                </a:solidFill>
-              </a:defRPr>
+              <a:defRPr sz="2200"/>
             </a:lvl3pPr>
             <a:lvl4pPr marL="1371600" indent="0" algn="ctr">
               <a:buNone/>
-              <a:defRPr>
-                <a:solidFill>
-                  <a:schemeClr val="tx1">
-                    <a:tint val="75000"/>
-                  </a:schemeClr>
-                </a:solidFill>
-              </a:defRPr>
+              <a:defRPr sz="2000"/>
             </a:lvl4pPr>
             <a:lvl5pPr marL="1828800" indent="0" algn="ctr">
               <a:buNone/>
-              <a:defRPr>
-                <a:solidFill>
-                  <a:schemeClr val="tx1">
-                    <a:tint val="75000"/>
-                  </a:schemeClr>
-                </a:solidFill>
-              </a:defRPr>
+              <a:defRPr sz="2000"/>
             </a:lvl5pPr>
             <a:lvl6pPr marL="2286000" indent="0" algn="ctr">
               <a:buNone/>
-              <a:defRPr>
-                <a:solidFill>
-                  <a:schemeClr val="tx1">
-                    <a:tint val="75000"/>
-                  </a:schemeClr>
-                </a:solidFill>
-              </a:defRPr>
+              <a:defRPr sz="2000"/>
             </a:lvl6pPr>
             <a:lvl7pPr marL="2743200" indent="0" algn="ctr">
               <a:buNone/>
-              <a:defRPr>
-                <a:solidFill>
-                  <a:schemeClr val="tx1">
-                    <a:tint val="75000"/>
-                  </a:schemeClr>
-                </a:solidFill>
-              </a:defRPr>
+              <a:defRPr sz="2000"/>
             </a:lvl7pPr>
             <a:lvl8pPr marL="3200400" indent="0" algn="ctr">
               <a:buNone/>
-              <a:defRPr>
-                <a:solidFill>
-                  <a:schemeClr val="tx1">
-                    <a:tint val="75000"/>
-                  </a:schemeClr>
-                </a:solidFill>
-              </a:defRPr>
+              <a:defRPr sz="2000"/>
             </a:lvl8pPr>
             <a:lvl9pPr marL="3657600" indent="0" algn="ctr">
               <a:buNone/>
-              <a:defRPr>
-                <a:solidFill>
-                  <a:schemeClr val="tx1">
-                    <a:tint val="75000"/>
-                  </a:schemeClr>
-                </a:solidFill>
-              </a:defRPr>
+              <a:defRPr sz="2000"/>
             </a:lvl9pPr>
           </a:lstStyle>
           <a:p>
@@ -307,11 +301,21 @@
         <p:spPr/>
         <p:txBody>
           <a:bodyPr/>
-          <a:lstStyle/>
+          <a:lstStyle>
+            <a:lvl1pPr>
+              <a:defRPr>
+                <a:solidFill>
+                  <a:schemeClr val="tx1">
+                    <a:lumMod val="50000"/>
+                  </a:schemeClr>
+                </a:solidFill>
+              </a:defRPr>
+            </a:lvl1pPr>
+          </a:lstStyle>
           <a:p>
             <a:fld id="{3BAFBFA7-D99C-48B3-949C-321455B324FB}" type="datetimeFigureOut">
               <a:rPr lang="en-IN" smtClean="0"/>
-              <a:t>19-11-2025</a:t>
+              <a:t>04-12-2025</a:t>
             </a:fld>
             <a:endParaRPr lang="en-IN"/>
           </a:p>
@@ -330,7 +334,17 @@
         <p:spPr/>
         <p:txBody>
           <a:bodyPr/>
-          <a:lstStyle/>
+          <a:lstStyle>
+            <a:lvl1pPr>
+              <a:defRPr>
+                <a:solidFill>
+                  <a:schemeClr val="tx1">
+                    <a:lumMod val="65000"/>
+                  </a:schemeClr>
+                </a:solidFill>
+              </a:defRPr>
+            </a:lvl1pPr>
+          </a:lstStyle>
           <a:p>
             <a:endParaRPr lang="en-IN"/>
           </a:p>
@@ -348,8 +362,14 @@
         </p:nvSpPr>
         <p:spPr/>
         <p:txBody>
-          <a:bodyPr/>
-          <a:lstStyle/>
+          <a:bodyPr vert="horz" lIns="45720" tIns="45720" rIns="45720" bIns="45720" rtlCol="0" anchor="ctr">
+            <a:normAutofit/>
+          </a:bodyPr>
+          <a:lstStyle>
+            <a:lvl1pPr>
+              <a:defRPr lang="en-US"/>
+            </a:lvl1pPr>
+          </a:lstStyle>
           <a:p>
             <a:fld id="{BEDDDFB6-EDB5-402D-8012-908B98D768F7}" type="slidenum">
               <a:rPr lang="en-IN" smtClean="0"/>
@@ -359,185 +379,48 @@
           </a:p>
         </p:txBody>
       </p:sp>
-      <p:cxnSp>
-        <p:nvCxnSpPr>
-          <p:cNvPr id="16" name="Straight Connector 15"/>
-          <p:cNvCxnSpPr/>
+      <p:sp>
+        <p:nvSpPr>
+          <p:cNvPr id="7" name="Rectangle 6"/>
+          <p:cNvSpPr/>
           <p:nvPr/>
-        </p:nvCxnSpPr>
+        </p:nvSpPr>
         <p:spPr>
-          <a:xfrm flipH="1">
-            <a:off x="8228012" y="8467"/>
-            <a:ext cx="3810000" cy="3810000"/>
+          <a:xfrm>
+            <a:off x="0" y="0"/>
+            <a:ext cx="457200" cy="6858000"/>
           </a:xfrm>
-          <a:prstGeom prst="line">
+          <a:prstGeom prst="rect">
             <a:avLst/>
           </a:prstGeom>
-          <a:ln w="12700">
-            <a:solidFill>
-              <a:schemeClr val="tx1"/>
-            </a:solidFill>
+          <a:solidFill>
+            <a:srgbClr val="303030"/>
+          </a:solidFill>
+          <a:ln>
+            <a:noFill/>
           </a:ln>
         </p:spPr>
         <p:style>
           <a:lnRef idx="2">
-            <a:schemeClr val="accent1"/>
+            <a:schemeClr val="accent1">
+              <a:shade val="50000"/>
+            </a:schemeClr>
           </a:lnRef>
-          <a:fillRef idx="0">
+          <a:fillRef idx="1">
             <a:schemeClr val="accent1"/>
           </a:fillRef>
-          <a:effectRef idx="1">
+          <a:effectRef idx="0">
             <a:schemeClr val="accent1"/>
           </a:effectRef>
           <a:fontRef idx="minor">
-            <a:schemeClr val="tx1"/>
+            <a:schemeClr val="lt1"/>
           </a:fontRef>
         </p:style>
-      </p:cxnSp>
-      <p:cxnSp>
-        <p:nvCxnSpPr>
-          <p:cNvPr id="17" name="Straight Connector 16"/>
-          <p:cNvCxnSpPr/>
-          <p:nvPr/>
-        </p:nvCxnSpPr>
-        <p:spPr>
-          <a:xfrm flipH="1">
-            <a:off x="6108170" y="91545"/>
-            <a:ext cx="6080655" cy="6080655"/>
-          </a:xfrm>
-          <a:prstGeom prst="line">
-            <a:avLst/>
-          </a:prstGeom>
-          <a:ln w="12700">
-            <a:solidFill>
-              <a:schemeClr val="tx1"/>
-            </a:solidFill>
-          </a:ln>
-        </p:spPr>
-        <p:style>
-          <a:lnRef idx="2">
-            <a:schemeClr val="accent1"/>
-          </a:lnRef>
-          <a:fillRef idx="0">
-            <a:schemeClr val="accent1"/>
-          </a:fillRef>
-          <a:effectRef idx="1">
-            <a:schemeClr val="accent1"/>
-          </a:effectRef>
-          <a:fontRef idx="minor">
-            <a:schemeClr val="tx1"/>
-          </a:fontRef>
-        </p:style>
-      </p:cxnSp>
-      <p:cxnSp>
-        <p:nvCxnSpPr>
-          <p:cNvPr id="19" name="Straight Connector 18"/>
-          <p:cNvCxnSpPr/>
-          <p:nvPr/>
-        </p:nvCxnSpPr>
-        <p:spPr>
-          <a:xfrm flipH="1">
-            <a:off x="7235825" y="228600"/>
-            <a:ext cx="4953000" cy="4953000"/>
-          </a:xfrm>
-          <a:prstGeom prst="line">
-            <a:avLst/>
-          </a:prstGeom>
-          <a:ln w="12700">
-            <a:solidFill>
-              <a:schemeClr val="tx1"/>
-            </a:solidFill>
-          </a:ln>
-        </p:spPr>
-        <p:style>
-          <a:lnRef idx="2">
-            <a:schemeClr val="accent1"/>
-          </a:lnRef>
-          <a:fillRef idx="0">
-            <a:schemeClr val="accent1"/>
-          </a:fillRef>
-          <a:effectRef idx="1">
-            <a:schemeClr val="accent1"/>
-          </a:effectRef>
-          <a:fontRef idx="minor">
-            <a:schemeClr val="tx1"/>
-          </a:fontRef>
-        </p:style>
-      </p:cxnSp>
-      <p:cxnSp>
-        <p:nvCxnSpPr>
-          <p:cNvPr id="21" name="Straight Connector 20"/>
-          <p:cNvCxnSpPr/>
-          <p:nvPr/>
-        </p:nvCxnSpPr>
-        <p:spPr>
-          <a:xfrm flipH="1">
-            <a:off x="7335837" y="32278"/>
-            <a:ext cx="4852989" cy="4852989"/>
-          </a:xfrm>
-          <a:prstGeom prst="line">
-            <a:avLst/>
-          </a:prstGeom>
-          <a:ln w="31750">
-            <a:solidFill>
-              <a:schemeClr val="tx1"/>
-            </a:solidFill>
-          </a:ln>
-        </p:spPr>
-        <p:style>
-          <a:lnRef idx="2">
-            <a:schemeClr val="accent1"/>
-          </a:lnRef>
-          <a:fillRef idx="0">
-            <a:schemeClr val="accent1"/>
-          </a:fillRef>
-          <a:effectRef idx="1">
-            <a:schemeClr val="accent1"/>
-          </a:effectRef>
-          <a:fontRef idx="minor">
-            <a:schemeClr val="tx1"/>
-          </a:fontRef>
-        </p:style>
-      </p:cxnSp>
-      <p:cxnSp>
-        <p:nvCxnSpPr>
-          <p:cNvPr id="23" name="Straight Connector 22"/>
-          <p:cNvCxnSpPr/>
-          <p:nvPr/>
-        </p:nvCxnSpPr>
-        <p:spPr>
-          <a:xfrm flipH="1">
-            <a:off x="7845426" y="609601"/>
-            <a:ext cx="4343399" cy="4343399"/>
-          </a:xfrm>
-          <a:prstGeom prst="line">
-            <a:avLst/>
-          </a:prstGeom>
-          <a:ln w="31750">
-            <a:solidFill>
-              <a:schemeClr val="tx1"/>
-            </a:solidFill>
-          </a:ln>
-        </p:spPr>
-        <p:style>
-          <a:lnRef idx="2">
-            <a:schemeClr val="accent1"/>
-          </a:lnRef>
-          <a:fillRef idx="0">
-            <a:schemeClr val="accent1"/>
-          </a:fillRef>
-          <a:effectRef idx="1">
-            <a:schemeClr val="accent1"/>
-          </a:effectRef>
-          <a:fontRef idx="minor">
-            <a:schemeClr val="tx1"/>
-          </a:fontRef>
-        </p:style>
-      </p:cxnSp>
+      </p:sp>
     </p:spTree>
     <p:extLst>
       <p:ext uri="{BB962C8B-B14F-4D97-AF65-F5344CB8AC3E}">
-        <p14:creationId xmlns:p14="http://schemas.microsoft.com/office/powerpoint/2010/main" val="1705394363"/>
+        <p14:creationId xmlns:p14="http://schemas.microsoft.com/office/powerpoint/2010/main" val="135506438"/>
       </p:ext>
     </p:extLst>
   </p:cSld>
@@ -548,8 +431,8 @@
 </file>
 
 <file path=ppt/slideLayouts/slideLayout10.xml><?xml version="1.0" encoding="utf-8"?>
-<p:sldLayout xmlns:a="http://schemas.openxmlformats.org/drawingml/2006/main" xmlns:r="http://schemas.openxmlformats.org/officeDocument/2006/relationships" xmlns:p="http://schemas.openxmlformats.org/presentationml/2006/main" preserve="1">
-  <p:cSld name="Panoramic Picture with Caption">
+<p:sldLayout xmlns:a="http://schemas.openxmlformats.org/drawingml/2006/main" xmlns:r="http://schemas.openxmlformats.org/officeDocument/2006/relationships" xmlns:p="http://schemas.openxmlformats.org/presentationml/2006/main" type="vertTx" preserve="1">
+  <p:cSld name="Title and Vertical Text">
     <p:spTree>
       <p:nvGrpSpPr>
         <p:cNvPr id="1" name=""/>
@@ -589,86 +472,51 @@
       </p:sp>
       <p:sp>
         <p:nvSpPr>
-          <p:cNvPr id="17" name="Picture Placeholder 2"/>
+          <p:cNvPr id="3" name="Vertical Text Placeholder 2"/>
           <p:cNvSpPr>
-            <a:spLocks noGrp="1" noChangeAspect="1"/>
+            <a:spLocks noGrp="1"/>
           </p:cNvSpPr>
           <p:nvPr>
-            <p:ph type="pic" idx="13"/>
+            <p:ph type="body" orient="vert" idx="1"/>
           </p:nvPr>
         </p:nvSpPr>
-        <p:spPr>
-          <a:xfrm>
-            <a:off x="685800" y="533400"/>
-            <a:ext cx="10818812" cy="3124200"/>
-          </a:xfrm>
-          <a:prstGeom prst="snip2DiagRect">
-            <a:avLst>
-              <a:gd name="adj1" fmla="val 10815"/>
-              <a:gd name="adj2" fmla="val 0"/>
-            </a:avLst>
-          </a:prstGeom>
-          <a:ln w="15875">
-            <a:solidFill>
-              <a:schemeClr val="tx1">
-                <a:alpha val="40000"/>
-              </a:schemeClr>
-            </a:solidFill>
-          </a:ln>
-          <a:effectLst>
-            <a:innerShdw blurRad="57150" dist="38100" dir="14460000">
-              <a:srgbClr val="000000">
-                <a:alpha val="70000"/>
-              </a:srgbClr>
-            </a:innerShdw>
-          </a:effectLst>
-        </p:spPr>
+        <p:spPr/>
         <p:txBody>
-          <a:bodyPr anchor="t">
-            <a:normAutofit/>
-          </a:bodyPr>
-          <a:lstStyle>
-            <a:lvl1pPr marL="0" indent="0" algn="ctr">
-              <a:buNone/>
-              <a:defRPr sz="1600"/>
-            </a:lvl1pPr>
-            <a:lvl2pPr marL="457200" indent="0">
-              <a:buNone/>
-              <a:defRPr sz="1600"/>
-            </a:lvl2pPr>
-            <a:lvl3pPr marL="914400" indent="0">
-              <a:buNone/>
-              <a:defRPr sz="1600"/>
-            </a:lvl3pPr>
-            <a:lvl4pPr marL="1371600" indent="0">
-              <a:buNone/>
-              <a:defRPr sz="1600"/>
-            </a:lvl4pPr>
-            <a:lvl5pPr marL="1828800" indent="0">
-              <a:buNone/>
-              <a:defRPr sz="1600"/>
-            </a:lvl5pPr>
-            <a:lvl6pPr marL="2286000" indent="0">
-              <a:buNone/>
-              <a:defRPr sz="1600"/>
-            </a:lvl6pPr>
-            <a:lvl7pPr marL="2743200" indent="0">
-              <a:buNone/>
-              <a:defRPr sz="1600"/>
-            </a:lvl7pPr>
-            <a:lvl8pPr marL="3200400" indent="0">
-              <a:buNone/>
-              <a:defRPr sz="1600"/>
-            </a:lvl8pPr>
-            <a:lvl9pPr marL="3657600" indent="0">
-              <a:buNone/>
-              <a:defRPr sz="1600"/>
-            </a:lvl9pPr>
-          </a:lstStyle>
-          <a:p>
+          <a:bodyPr vert="eaVert"/>
+          <a:lstStyle/>
+          <a:p>
+            <a:pPr lvl="0"/>
             <a:r>
               <a:rPr lang="en-US" smtClean="0"/>
-              <a:t>Click icon to add picture</a:t>
+              <a:t>Edit Master text styles</a:t>
+            </a:r>
+          </a:p>
+          <a:p>
+            <a:pPr lvl="1"/>
+            <a:r>
+              <a:rPr lang="en-US" smtClean="0"/>
+              <a:t>Second level</a:t>
+            </a:r>
+          </a:p>
+          <a:p>
+            <a:pPr lvl="2"/>
+            <a:r>
+              <a:rPr lang="en-US" smtClean="0"/>
+              <a:t>Third level</a:t>
+            </a:r>
+          </a:p>
+          <a:p>
+            <a:pPr lvl="3"/>
+            <a:r>
+              <a:rPr lang="en-US" smtClean="0"/>
+              <a:t>Fourth level</a:t>
+            </a:r>
+          </a:p>
+          <a:p>
+            <a:pPr lvl="4"/>
+            <a:r>
+              <a:rPr lang="en-US" smtClean="0"/>
+              <a:t>Fifth level</a:t>
             </a:r>
             <a:endParaRPr lang="en-US" dirty="0"/>
           </a:p>
@@ -676,63 +524,7 @@
       </p:sp>
       <p:sp>
         <p:nvSpPr>
-          <p:cNvPr id="16" name="Text Placeholder 9"/>
-          <p:cNvSpPr>
-            <a:spLocks noGrp="1"/>
-          </p:cNvSpPr>
-          <p:nvPr>
-            <p:ph type="body" sz="quarter" idx="14"/>
-          </p:nvPr>
-        </p:nvSpPr>
-        <p:spPr>
-          <a:xfrm>
-            <a:off x="914402" y="3843867"/>
-            <a:ext cx="8304210" cy="457200"/>
-          </a:xfrm>
-        </p:spPr>
-        <p:txBody>
-          <a:bodyPr anchor="t">
-            <a:normAutofit/>
-          </a:bodyPr>
-          <a:lstStyle>
-            <a:lvl1pPr marL="0" indent="0">
-              <a:buFontTx/>
-              <a:buNone/>
-              <a:defRPr sz="1600"/>
-            </a:lvl1pPr>
-            <a:lvl2pPr marL="457200" indent="0">
-              <a:buFontTx/>
-              <a:buNone/>
-              <a:defRPr/>
-            </a:lvl2pPr>
-            <a:lvl3pPr marL="914400" indent="0">
-              <a:buFontTx/>
-              <a:buNone/>
-              <a:defRPr/>
-            </a:lvl3pPr>
-            <a:lvl4pPr marL="1371600" indent="0">
-              <a:buFontTx/>
-              <a:buNone/>
-              <a:defRPr/>
-            </a:lvl4pPr>
-            <a:lvl5pPr marL="1828800" indent="0">
-              <a:buFontTx/>
-              <a:buNone/>
-              <a:defRPr/>
-            </a:lvl5pPr>
-          </a:lstStyle>
-          <a:p>
-            <a:pPr lvl="0"/>
-            <a:r>
-              <a:rPr lang="en-US" smtClean="0"/>
-              <a:t>Edit Master text styles</a:t>
-            </a:r>
-          </a:p>
-        </p:txBody>
-      </p:sp>
-      <p:sp>
-        <p:nvSpPr>
-          <p:cNvPr id="3" name="Date Placeholder 2"/>
+          <p:cNvPr id="4" name="Date Placeholder 3"/>
           <p:cNvSpPr>
             <a:spLocks noGrp="1"/>
           </p:cNvSpPr>
@@ -747,7 +539,7 @@
           <a:p>
             <a:fld id="{3BAFBFA7-D99C-48B3-949C-321455B324FB}" type="datetimeFigureOut">
               <a:rPr lang="en-IN" smtClean="0"/>
-              <a:t>19-11-2025</a:t>
+              <a:t>04-12-2025</a:t>
             </a:fld>
             <a:endParaRPr lang="en-IN"/>
           </a:p>
@@ -755,7 +547,7 @@
       </p:sp>
       <p:sp>
         <p:nvSpPr>
-          <p:cNvPr id="4" name="Footer Placeholder 3"/>
+          <p:cNvPr id="5" name="Footer Placeholder 4"/>
           <p:cNvSpPr>
             <a:spLocks noGrp="1"/>
           </p:cNvSpPr>
@@ -774,7 +566,7 @@
       </p:sp>
       <p:sp>
         <p:nvSpPr>
-          <p:cNvPr id="5" name="Slide Number Placeholder 4"/>
+          <p:cNvPr id="6" name="Slide Number Placeholder 5"/>
           <p:cNvSpPr>
             <a:spLocks noGrp="1"/>
           </p:cNvSpPr>
@@ -798,7 +590,7 @@
     </p:spTree>
     <p:extLst>
       <p:ext uri="{BB962C8B-B14F-4D97-AF65-F5344CB8AC3E}">
-        <p14:creationId xmlns:p14="http://schemas.microsoft.com/office/powerpoint/2010/main" val="2507728694"/>
+        <p14:creationId xmlns:p14="http://schemas.microsoft.com/office/powerpoint/2010/main" val="2820820364"/>
       </p:ext>
     </p:extLst>
   </p:cSld>
@@ -809,8 +601,188 @@
 </file>
 
 <file path=ppt/slideLayouts/slideLayout11.xml><?xml version="1.0" encoding="utf-8"?>
-<p:sldLayout xmlns:a="http://schemas.openxmlformats.org/drawingml/2006/main" xmlns:r="http://schemas.openxmlformats.org/officeDocument/2006/relationships" xmlns:p="http://schemas.openxmlformats.org/presentationml/2006/main" preserve="1">
-  <p:cSld name="Title and Caption">
+<p:sldLayout xmlns:a="http://schemas.openxmlformats.org/drawingml/2006/main" xmlns:r="http://schemas.openxmlformats.org/officeDocument/2006/relationships" xmlns:p="http://schemas.openxmlformats.org/presentationml/2006/main" type="vertTitleAndTx" preserve="1">
+  <p:cSld name="Vertical Title and Text">
+    <p:spTree>
+      <p:nvGrpSpPr>
+        <p:cNvPr id="1" name=""/>
+        <p:cNvGrpSpPr/>
+        <p:nvPr/>
+      </p:nvGrpSpPr>
+      <p:grpSpPr>
+        <a:xfrm>
+          <a:off x="0" y="0"/>
+          <a:ext cx="0" cy="0"/>
+          <a:chOff x="0" y="0"/>
+          <a:chExt cx="0" cy="0"/>
+        </a:xfrm>
+      </p:grpSpPr>
+      <p:sp>
+        <p:nvSpPr>
+          <p:cNvPr id="2" name="Vertical Title 1"/>
+          <p:cNvSpPr>
+            <a:spLocks noGrp="1"/>
+          </p:cNvSpPr>
+          <p:nvPr>
+            <p:ph type="title" orient="vert"/>
+          </p:nvPr>
+        </p:nvSpPr>
+        <p:spPr>
+          <a:xfrm>
+            <a:off x="8648700" y="381000"/>
+            <a:ext cx="2476500" cy="5897562"/>
+          </a:xfrm>
+        </p:spPr>
+        <p:txBody>
+          <a:bodyPr vert="eaVert"/>
+          <a:lstStyle/>
+          <a:p>
+            <a:r>
+              <a:rPr lang="en-US" smtClean="0"/>
+              <a:t>Click to edit Master title style</a:t>
+            </a:r>
+            <a:endParaRPr lang="en-US" dirty="0"/>
+          </a:p>
+        </p:txBody>
+      </p:sp>
+      <p:sp>
+        <p:nvSpPr>
+          <p:cNvPr id="3" name="Vertical Text Placeholder 2"/>
+          <p:cNvSpPr>
+            <a:spLocks noGrp="1"/>
+          </p:cNvSpPr>
+          <p:nvPr>
+            <p:ph type="body" orient="vert" idx="1"/>
+          </p:nvPr>
+        </p:nvSpPr>
+        <p:spPr>
+          <a:xfrm>
+            <a:off x="762000" y="381000"/>
+            <a:ext cx="7734300" cy="5897562"/>
+          </a:xfrm>
+        </p:spPr>
+        <p:txBody>
+          <a:bodyPr vert="eaVert"/>
+          <a:lstStyle/>
+          <a:p>
+            <a:pPr lvl="0"/>
+            <a:r>
+              <a:rPr lang="en-US" smtClean="0"/>
+              <a:t>Edit Master text styles</a:t>
+            </a:r>
+          </a:p>
+          <a:p>
+            <a:pPr lvl="1"/>
+            <a:r>
+              <a:rPr lang="en-US" smtClean="0"/>
+              <a:t>Second level</a:t>
+            </a:r>
+          </a:p>
+          <a:p>
+            <a:pPr lvl="2"/>
+            <a:r>
+              <a:rPr lang="en-US" smtClean="0"/>
+              <a:t>Third level</a:t>
+            </a:r>
+          </a:p>
+          <a:p>
+            <a:pPr lvl="3"/>
+            <a:r>
+              <a:rPr lang="en-US" smtClean="0"/>
+              <a:t>Fourth level</a:t>
+            </a:r>
+          </a:p>
+          <a:p>
+            <a:pPr lvl="4"/>
+            <a:r>
+              <a:rPr lang="en-US" smtClean="0"/>
+              <a:t>Fifth level</a:t>
+            </a:r>
+            <a:endParaRPr lang="en-US" dirty="0"/>
+          </a:p>
+        </p:txBody>
+      </p:sp>
+      <p:sp>
+        <p:nvSpPr>
+          <p:cNvPr id="4" name="Date Placeholder 3"/>
+          <p:cNvSpPr>
+            <a:spLocks noGrp="1"/>
+          </p:cNvSpPr>
+          <p:nvPr>
+            <p:ph type="dt" sz="half" idx="10"/>
+          </p:nvPr>
+        </p:nvSpPr>
+        <p:spPr/>
+        <p:txBody>
+          <a:bodyPr/>
+          <a:lstStyle/>
+          <a:p>
+            <a:fld id="{3BAFBFA7-D99C-48B3-949C-321455B324FB}" type="datetimeFigureOut">
+              <a:rPr lang="en-IN" smtClean="0"/>
+              <a:t>04-12-2025</a:t>
+            </a:fld>
+            <a:endParaRPr lang="en-IN"/>
+          </a:p>
+        </p:txBody>
+      </p:sp>
+      <p:sp>
+        <p:nvSpPr>
+          <p:cNvPr id="5" name="Footer Placeholder 4"/>
+          <p:cNvSpPr>
+            <a:spLocks noGrp="1"/>
+          </p:cNvSpPr>
+          <p:nvPr>
+            <p:ph type="ftr" sz="quarter" idx="11"/>
+          </p:nvPr>
+        </p:nvSpPr>
+        <p:spPr/>
+        <p:txBody>
+          <a:bodyPr/>
+          <a:lstStyle/>
+          <a:p>
+            <a:endParaRPr lang="en-IN"/>
+          </a:p>
+        </p:txBody>
+      </p:sp>
+      <p:sp>
+        <p:nvSpPr>
+          <p:cNvPr id="6" name="Slide Number Placeholder 5"/>
+          <p:cNvSpPr>
+            <a:spLocks noGrp="1"/>
+          </p:cNvSpPr>
+          <p:nvPr>
+            <p:ph type="sldNum" sz="quarter" idx="12"/>
+          </p:nvPr>
+        </p:nvSpPr>
+        <p:spPr/>
+        <p:txBody>
+          <a:bodyPr/>
+          <a:lstStyle/>
+          <a:p>
+            <a:fld id="{BEDDDFB6-EDB5-402D-8012-908B98D768F7}" type="slidenum">
+              <a:rPr lang="en-IN" smtClean="0"/>
+              <a:t>‹#›</a:t>
+            </a:fld>
+            <a:endParaRPr lang="en-IN"/>
+          </a:p>
+        </p:txBody>
+      </p:sp>
+    </p:spTree>
+    <p:extLst>
+      <p:ext uri="{BB962C8B-B14F-4D97-AF65-F5344CB8AC3E}">
+        <p14:creationId xmlns:p14="http://schemas.microsoft.com/office/powerpoint/2010/main" val="2793640421"/>
+      </p:ext>
+    </p:extLst>
+  </p:cSld>
+  <p:clrMapOvr>
+    <a:masterClrMapping/>
+  </p:clrMapOvr>
+</p:sldLayout>
+</file>
+
+<file path=ppt/slideLayouts/slideLayout2.xml><?xml version="1.0" encoding="utf-8"?>
+<p:sldLayout xmlns:a="http://schemas.openxmlformats.org/drawingml/2006/main" xmlns:r="http://schemas.openxmlformats.org/officeDocument/2006/relationships" xmlns:p="http://schemas.openxmlformats.org/presentationml/2006/main" type="obj" preserve="1">
+  <p:cSld name="Title and Content">
     <p:spTree>
       <p:nvGrpSpPr>
         <p:cNvPr id="1" name=""/>
@@ -835,19 +807,230 @@
             <p:ph type="title"/>
           </p:nvPr>
         </p:nvSpPr>
+        <p:spPr/>
+        <p:txBody>
+          <a:bodyPr/>
+          <a:lstStyle/>
+          <a:p>
+            <a:r>
+              <a:rPr lang="en-US" smtClean="0"/>
+              <a:t>Click to edit Master title style</a:t>
+            </a:r>
+            <a:endParaRPr lang="en-US" dirty="0"/>
+          </a:p>
+        </p:txBody>
+      </p:sp>
+      <p:sp>
+        <p:nvSpPr>
+          <p:cNvPr id="3" name="Content Placeholder 2"/>
+          <p:cNvSpPr>
+            <a:spLocks noGrp="1"/>
+          </p:cNvSpPr>
+          <p:nvPr>
+            <p:ph idx="1"/>
+          </p:nvPr>
+        </p:nvSpPr>
+        <p:spPr/>
+        <p:txBody>
+          <a:bodyPr/>
+          <a:lstStyle/>
+          <a:p>
+            <a:pPr lvl="0"/>
+            <a:r>
+              <a:rPr lang="en-US" smtClean="0"/>
+              <a:t>Edit Master text styles</a:t>
+            </a:r>
+          </a:p>
+          <a:p>
+            <a:pPr lvl="1"/>
+            <a:r>
+              <a:rPr lang="en-US" smtClean="0"/>
+              <a:t>Second level</a:t>
+            </a:r>
+          </a:p>
+          <a:p>
+            <a:pPr lvl="2"/>
+            <a:r>
+              <a:rPr lang="en-US" smtClean="0"/>
+              <a:t>Third level</a:t>
+            </a:r>
+          </a:p>
+          <a:p>
+            <a:pPr lvl="3"/>
+            <a:r>
+              <a:rPr lang="en-US" smtClean="0"/>
+              <a:t>Fourth level</a:t>
+            </a:r>
+          </a:p>
+          <a:p>
+            <a:pPr lvl="4"/>
+            <a:r>
+              <a:rPr lang="en-US" smtClean="0"/>
+              <a:t>Fifth level</a:t>
+            </a:r>
+            <a:endParaRPr lang="en-US" dirty="0"/>
+          </a:p>
+        </p:txBody>
+      </p:sp>
+      <p:sp>
+        <p:nvSpPr>
+          <p:cNvPr id="4" name="Date Placeholder 3"/>
+          <p:cNvSpPr>
+            <a:spLocks noGrp="1"/>
+          </p:cNvSpPr>
+          <p:nvPr>
+            <p:ph type="dt" sz="half" idx="10"/>
+          </p:nvPr>
+        </p:nvSpPr>
+        <p:spPr/>
+        <p:txBody>
+          <a:bodyPr/>
+          <a:lstStyle/>
+          <a:p>
+            <a:fld id="{3BAFBFA7-D99C-48B3-949C-321455B324FB}" type="datetimeFigureOut">
+              <a:rPr lang="en-IN" smtClean="0"/>
+              <a:t>04-12-2025</a:t>
+            </a:fld>
+            <a:endParaRPr lang="en-IN"/>
+          </a:p>
+        </p:txBody>
+      </p:sp>
+      <p:sp>
+        <p:nvSpPr>
+          <p:cNvPr id="5" name="Footer Placeholder 4"/>
+          <p:cNvSpPr>
+            <a:spLocks noGrp="1"/>
+          </p:cNvSpPr>
+          <p:nvPr>
+            <p:ph type="ftr" sz="quarter" idx="11"/>
+          </p:nvPr>
+        </p:nvSpPr>
+        <p:spPr/>
+        <p:txBody>
+          <a:bodyPr/>
+          <a:lstStyle/>
+          <a:p>
+            <a:endParaRPr lang="en-IN"/>
+          </a:p>
+        </p:txBody>
+      </p:sp>
+      <p:sp>
+        <p:nvSpPr>
+          <p:cNvPr id="6" name="Slide Number Placeholder 5"/>
+          <p:cNvSpPr>
+            <a:spLocks noGrp="1"/>
+          </p:cNvSpPr>
+          <p:nvPr>
+            <p:ph type="sldNum" sz="quarter" idx="12"/>
+          </p:nvPr>
+        </p:nvSpPr>
+        <p:spPr/>
+        <p:txBody>
+          <a:bodyPr/>
+          <a:lstStyle/>
+          <a:p>
+            <a:fld id="{BEDDDFB6-EDB5-402D-8012-908B98D768F7}" type="slidenum">
+              <a:rPr lang="en-IN" smtClean="0"/>
+              <a:t>‹#›</a:t>
+            </a:fld>
+            <a:endParaRPr lang="en-IN"/>
+          </a:p>
+        </p:txBody>
+      </p:sp>
+    </p:spTree>
+    <p:extLst>
+      <p:ext uri="{BB962C8B-B14F-4D97-AF65-F5344CB8AC3E}">
+        <p14:creationId xmlns:p14="http://schemas.microsoft.com/office/powerpoint/2010/main" val="132663151"/>
+      </p:ext>
+    </p:extLst>
+  </p:cSld>
+  <p:clrMapOvr>
+    <a:masterClrMapping/>
+  </p:clrMapOvr>
+</p:sldLayout>
+</file>
+
+<file path=ppt/slideLayouts/slideLayout3.xml><?xml version="1.0" encoding="utf-8"?>
+<p:sldLayout xmlns:a="http://schemas.openxmlformats.org/drawingml/2006/main" xmlns:r="http://schemas.openxmlformats.org/officeDocument/2006/relationships" xmlns:p="http://schemas.openxmlformats.org/presentationml/2006/main" showMasterSp="0" type="secHead" preserve="1">
+  <p:cSld name="Section Header">
+    <p:spTree>
+      <p:nvGrpSpPr>
+        <p:cNvPr id="1" name=""/>
+        <p:cNvGrpSpPr/>
+        <p:nvPr/>
+      </p:nvGrpSpPr>
+      <p:grpSpPr>
+        <a:xfrm>
+          <a:off x="0" y="0"/>
+          <a:ext cx="0" cy="0"/>
+          <a:chOff x="0" y="0"/>
+          <a:chExt cx="0" cy="0"/>
+        </a:xfrm>
+      </p:grpSpPr>
+      <p:sp>
+        <p:nvSpPr>
+          <p:cNvPr id="8" name="Rectangle 7"/>
+          <p:cNvSpPr/>
+          <p:nvPr/>
+        </p:nvSpPr>
         <p:spPr>
           <a:xfrm>
-            <a:off x="684213" y="685800"/>
-            <a:ext cx="10058400" cy="2743200"/>
+            <a:off x="11292840" y="0"/>
+            <a:ext cx="914400" cy="6858000"/>
+          </a:xfrm>
+          <a:prstGeom prst="rect">
+            <a:avLst/>
+          </a:prstGeom>
+          <a:solidFill>
+            <a:srgbClr val="303030"/>
+          </a:solidFill>
+          <a:ln>
+            <a:noFill/>
+          </a:ln>
+        </p:spPr>
+        <p:style>
+          <a:lnRef idx="2">
+            <a:schemeClr val="accent1">
+              <a:shade val="50000"/>
+            </a:schemeClr>
+          </a:lnRef>
+          <a:fillRef idx="1">
+            <a:schemeClr val="accent1"/>
+          </a:fillRef>
+          <a:effectRef idx="0">
+            <a:schemeClr val="accent1"/>
+          </a:effectRef>
+          <a:fontRef idx="minor">
+            <a:schemeClr val="lt1"/>
+          </a:fontRef>
+        </p:style>
+      </p:sp>
+      <p:sp>
+        <p:nvSpPr>
+          <p:cNvPr id="2" name="Title 1"/>
+          <p:cNvSpPr>
+            <a:spLocks noGrp="1"/>
+          </p:cNvSpPr>
+          <p:nvPr>
+            <p:ph type="title"/>
+          </p:nvPr>
+        </p:nvSpPr>
+        <p:spPr>
+          <a:xfrm>
+            <a:off x="1261872" y="758952"/>
+            <a:ext cx="9418320" cy="4041648"/>
           </a:xfrm>
         </p:spPr>
         <p:txBody>
-          <a:bodyPr anchor="ctr">
+          <a:bodyPr anchor="b">
             <a:normAutofit/>
           </a:bodyPr>
           <a:lstStyle>
-            <a:lvl1pPr algn="l">
-              <a:defRPr sz="3200" b="0" cap="all"/>
+            <a:lvl1pPr>
+              <a:lnSpc>
+                <a:spcPct val="85000"/>
+              </a:lnSpc>
+              <a:defRPr sz="7200" b="0"/>
             </a:lvl1pPr>
           </a:lstStyle>
           <a:p>
@@ -871,21 +1054,21 @@
         </p:nvSpPr>
         <p:spPr>
           <a:xfrm>
-            <a:off x="684212" y="4114800"/>
-            <a:ext cx="8535988" cy="1879600"/>
+            <a:off x="1261872" y="4800600"/>
+            <a:ext cx="9418320" cy="1691640"/>
           </a:xfrm>
         </p:spPr>
         <p:txBody>
-          <a:bodyPr anchor="ctr">
+          <a:bodyPr anchor="t">
             <a:normAutofit/>
           </a:bodyPr>
           <a:lstStyle>
-            <a:lvl1pPr marL="0" indent="0" algn="l">
+            <a:lvl1pPr marL="0" indent="0">
               <a:buNone/>
-              <a:defRPr sz="2000">
+              <a:defRPr sz="2200">
                 <a:solidFill>
-                  <a:schemeClr val="bg2">
-                    <a:lumMod val="75000"/>
+                  <a:schemeClr val="tx1">
+                    <a:lumMod val="65000"/>
                   </a:schemeClr>
                 </a:solidFill>
               </a:defRPr>
@@ -997,7 +1180,7 @@
           <a:p>
             <a:fld id="{3BAFBFA7-D99C-48B3-949C-321455B324FB}" type="datetimeFigureOut">
               <a:rPr lang="en-IN" smtClean="0"/>
-              <a:t>19-11-2025</a:t>
+              <a:t>04-12-2025</a:t>
             </a:fld>
             <a:endParaRPr lang="en-IN"/>
           </a:p>
@@ -1045,2079 +1228,48 @@
           </a:p>
         </p:txBody>
       </p:sp>
-    </p:spTree>
-    <p:extLst>
-      <p:ext uri="{BB962C8B-B14F-4D97-AF65-F5344CB8AC3E}">
-        <p14:creationId xmlns:p14="http://schemas.microsoft.com/office/powerpoint/2010/main" val="2526166135"/>
-      </p:ext>
-    </p:extLst>
-  </p:cSld>
-  <p:clrMapOvr>
-    <a:masterClrMapping/>
-  </p:clrMapOvr>
-</p:sldLayout>
-</file>
-
-<file path=ppt/slideLayouts/slideLayout12.xml><?xml version="1.0" encoding="utf-8"?>
-<p:sldLayout xmlns:a="http://schemas.openxmlformats.org/drawingml/2006/main" xmlns:r="http://schemas.openxmlformats.org/officeDocument/2006/relationships" xmlns:p="http://schemas.openxmlformats.org/presentationml/2006/main" preserve="1">
-  <p:cSld name="Quote with Caption">
-    <p:spTree>
-      <p:nvGrpSpPr>
-        <p:cNvPr id="1" name=""/>
-        <p:cNvGrpSpPr/>
-        <p:nvPr/>
-      </p:nvGrpSpPr>
-      <p:grpSpPr>
-        <a:xfrm>
-          <a:off x="0" y="0"/>
-          <a:ext cx="0" cy="0"/>
-          <a:chOff x="0" y="0"/>
-          <a:chExt cx="0" cy="0"/>
-        </a:xfrm>
-      </p:grpSpPr>
       <p:sp>
         <p:nvSpPr>
-          <p:cNvPr id="2" name="Title 1"/>
-          <p:cNvSpPr>
-            <a:spLocks noGrp="1"/>
-          </p:cNvSpPr>
-          <p:nvPr>
-            <p:ph type="title"/>
-          </p:nvPr>
-        </p:nvSpPr>
-        <p:spPr>
-          <a:xfrm>
-            <a:off x="1141411" y="685800"/>
-            <a:ext cx="9144001" cy="2743200"/>
-          </a:xfrm>
-        </p:spPr>
-        <p:txBody>
-          <a:bodyPr anchor="ctr">
-            <a:normAutofit/>
-          </a:bodyPr>
-          <a:lstStyle>
-            <a:lvl1pPr algn="l">
-              <a:defRPr sz="3200" b="0" cap="all">
-                <a:solidFill>
-                  <a:schemeClr val="tx1"/>
-                </a:solidFill>
-              </a:defRPr>
-            </a:lvl1pPr>
-          </a:lstStyle>
-          <a:p>
-            <a:r>
-              <a:rPr lang="en-US" smtClean="0"/>
-              <a:t>Click to edit Master title style</a:t>
-            </a:r>
-            <a:endParaRPr lang="en-US" dirty="0"/>
-          </a:p>
-        </p:txBody>
-      </p:sp>
-      <p:sp>
-        <p:nvSpPr>
-          <p:cNvPr id="10" name="Text Placeholder 9"/>
-          <p:cNvSpPr>
-            <a:spLocks noGrp="1"/>
-          </p:cNvSpPr>
-          <p:nvPr>
-            <p:ph type="body" sz="quarter" idx="13"/>
-          </p:nvPr>
-        </p:nvSpPr>
-        <p:spPr>
-          <a:xfrm>
-            <a:off x="1446212" y="3429000"/>
-            <a:ext cx="8534400" cy="381000"/>
-          </a:xfrm>
-        </p:spPr>
-        <p:txBody>
-          <a:bodyPr anchor="ctr"/>
-          <a:lstStyle>
-            <a:lvl1pPr marL="0" indent="0">
-              <a:buFontTx/>
-              <a:buNone/>
-              <a:defRPr/>
-            </a:lvl1pPr>
-            <a:lvl2pPr marL="457200" indent="0">
-              <a:buFontTx/>
-              <a:buNone/>
-              <a:defRPr/>
-            </a:lvl2pPr>
-            <a:lvl3pPr marL="914400" indent="0">
-              <a:buFontTx/>
-              <a:buNone/>
-              <a:defRPr/>
-            </a:lvl3pPr>
-            <a:lvl4pPr marL="1371600" indent="0">
-              <a:buFontTx/>
-              <a:buNone/>
-              <a:defRPr/>
-            </a:lvl4pPr>
-            <a:lvl5pPr marL="1828800" indent="0">
-              <a:buFontTx/>
-              <a:buNone/>
-              <a:defRPr/>
-            </a:lvl5pPr>
-          </a:lstStyle>
-          <a:p>
-            <a:pPr lvl="0"/>
-            <a:r>
-              <a:rPr lang="en-US" smtClean="0"/>
-              <a:t>Edit Master text styles</a:t>
-            </a:r>
-          </a:p>
-        </p:txBody>
-      </p:sp>
-      <p:sp>
-        <p:nvSpPr>
-          <p:cNvPr id="3" name="Text Placeholder 2"/>
-          <p:cNvSpPr>
-            <a:spLocks noGrp="1"/>
-          </p:cNvSpPr>
-          <p:nvPr>
-            <p:ph type="body" idx="1"/>
-          </p:nvPr>
-        </p:nvSpPr>
-        <p:spPr>
-          <a:xfrm>
-            <a:off x="684213" y="4301067"/>
-            <a:ext cx="8534400" cy="1684865"/>
-          </a:xfrm>
-        </p:spPr>
-        <p:txBody>
-          <a:bodyPr anchor="ctr">
-            <a:normAutofit/>
-          </a:bodyPr>
-          <a:lstStyle>
-            <a:lvl1pPr marL="0" indent="0" algn="l">
-              <a:buNone/>
-              <a:defRPr sz="2000">
-                <a:solidFill>
-                  <a:schemeClr val="bg2">
-                    <a:lumMod val="75000"/>
-                  </a:schemeClr>
-                </a:solidFill>
-              </a:defRPr>
-            </a:lvl1pPr>
-            <a:lvl2pPr marL="457200" indent="0">
-              <a:buNone/>
-              <a:defRPr sz="1800">
-                <a:solidFill>
-                  <a:schemeClr val="tx1">
-                    <a:tint val="75000"/>
-                  </a:schemeClr>
-                </a:solidFill>
-              </a:defRPr>
-            </a:lvl2pPr>
-            <a:lvl3pPr marL="914400" indent="0">
-              <a:buNone/>
-              <a:defRPr sz="1600">
-                <a:solidFill>
-                  <a:schemeClr val="tx1">
-                    <a:tint val="75000"/>
-                  </a:schemeClr>
-                </a:solidFill>
-              </a:defRPr>
-            </a:lvl3pPr>
-            <a:lvl4pPr marL="1371600" indent="0">
-              <a:buNone/>
-              <a:defRPr sz="1400">
-                <a:solidFill>
-                  <a:schemeClr val="tx1">
-                    <a:tint val="75000"/>
-                  </a:schemeClr>
-                </a:solidFill>
-              </a:defRPr>
-            </a:lvl4pPr>
-            <a:lvl5pPr marL="1828800" indent="0">
-              <a:buNone/>
-              <a:defRPr sz="1400">
-                <a:solidFill>
-                  <a:schemeClr val="tx1">
-                    <a:tint val="75000"/>
-                  </a:schemeClr>
-                </a:solidFill>
-              </a:defRPr>
-            </a:lvl5pPr>
-            <a:lvl6pPr marL="2286000" indent="0">
-              <a:buNone/>
-              <a:defRPr sz="1400">
-                <a:solidFill>
-                  <a:schemeClr val="tx1">
-                    <a:tint val="75000"/>
-                  </a:schemeClr>
-                </a:solidFill>
-              </a:defRPr>
-            </a:lvl6pPr>
-            <a:lvl7pPr marL="2743200" indent="0">
-              <a:buNone/>
-              <a:defRPr sz="1400">
-                <a:solidFill>
-                  <a:schemeClr val="tx1">
-                    <a:tint val="75000"/>
-                  </a:schemeClr>
-                </a:solidFill>
-              </a:defRPr>
-            </a:lvl7pPr>
-            <a:lvl8pPr marL="3200400" indent="0">
-              <a:buNone/>
-              <a:defRPr sz="1400">
-                <a:solidFill>
-                  <a:schemeClr val="tx1">
-                    <a:tint val="75000"/>
-                  </a:schemeClr>
-                </a:solidFill>
-              </a:defRPr>
-            </a:lvl8pPr>
-            <a:lvl9pPr marL="3657600" indent="0">
-              <a:buNone/>
-              <a:defRPr sz="1400">
-                <a:solidFill>
-                  <a:schemeClr val="tx1">
-                    <a:tint val="75000"/>
-                  </a:schemeClr>
-                </a:solidFill>
-              </a:defRPr>
-            </a:lvl9pPr>
-          </a:lstStyle>
-          <a:p>
-            <a:pPr lvl="0"/>
-            <a:r>
-              <a:rPr lang="en-US" smtClean="0"/>
-              <a:t>Edit Master text styles</a:t>
-            </a:r>
-          </a:p>
-        </p:txBody>
-      </p:sp>
-      <p:sp>
-        <p:nvSpPr>
-          <p:cNvPr id="4" name="Date Placeholder 3"/>
-          <p:cNvSpPr>
-            <a:spLocks noGrp="1"/>
-          </p:cNvSpPr>
-          <p:nvPr>
-            <p:ph type="dt" sz="half" idx="10"/>
-          </p:nvPr>
-        </p:nvSpPr>
-        <p:spPr/>
-        <p:txBody>
-          <a:bodyPr/>
-          <a:lstStyle/>
-          <a:p>
-            <a:fld id="{3BAFBFA7-D99C-48B3-949C-321455B324FB}" type="datetimeFigureOut">
-              <a:rPr lang="en-IN" smtClean="0"/>
-              <a:t>19-11-2025</a:t>
-            </a:fld>
-            <a:endParaRPr lang="en-IN"/>
-          </a:p>
-        </p:txBody>
-      </p:sp>
-      <p:sp>
-        <p:nvSpPr>
-          <p:cNvPr id="5" name="Footer Placeholder 4"/>
-          <p:cNvSpPr>
-            <a:spLocks noGrp="1"/>
-          </p:cNvSpPr>
-          <p:nvPr>
-            <p:ph type="ftr" sz="quarter" idx="11"/>
-          </p:nvPr>
-        </p:nvSpPr>
-        <p:spPr/>
-        <p:txBody>
-          <a:bodyPr/>
-          <a:lstStyle/>
-          <a:p>
-            <a:endParaRPr lang="en-IN"/>
-          </a:p>
-        </p:txBody>
-      </p:sp>
-      <p:sp>
-        <p:nvSpPr>
-          <p:cNvPr id="6" name="Slide Number Placeholder 5"/>
-          <p:cNvSpPr>
-            <a:spLocks noGrp="1"/>
-          </p:cNvSpPr>
-          <p:nvPr>
-            <p:ph type="sldNum" sz="quarter" idx="12"/>
-          </p:nvPr>
-        </p:nvSpPr>
-        <p:spPr/>
-        <p:txBody>
-          <a:bodyPr/>
-          <a:lstStyle/>
-          <a:p>
-            <a:fld id="{BEDDDFB6-EDB5-402D-8012-908B98D768F7}" type="slidenum">
-              <a:rPr lang="en-IN" smtClean="0"/>
-              <a:t>‹#›</a:t>
-            </a:fld>
-            <a:endParaRPr lang="en-IN"/>
-          </a:p>
-        </p:txBody>
-      </p:sp>
-      <p:sp>
-        <p:nvSpPr>
-          <p:cNvPr id="14" name="TextBox 13"/>
-          <p:cNvSpPr txBox="1"/>
+          <p:cNvPr id="7" name="Rectangle 6"/>
+          <p:cNvSpPr/>
           <p:nvPr/>
         </p:nvSpPr>
         <p:spPr>
           <a:xfrm>
-            <a:off x="531812" y="812222"/>
-            <a:ext cx="609600" cy="584776"/>
+            <a:off x="0" y="0"/>
+            <a:ext cx="457200" cy="6858000"/>
           </a:xfrm>
           <a:prstGeom prst="rect">
             <a:avLst/>
           </a:prstGeom>
+          <a:solidFill>
+            <a:srgbClr val="303030"/>
+          </a:solidFill>
+          <a:ln>
+            <a:noFill/>
+          </a:ln>
         </p:spPr>
-        <p:txBody>
-          <a:bodyPr vert="horz" lIns="91440" tIns="45720" rIns="91440" bIns="45720" rtlCol="0" anchor="ctr">
-            <a:noAutofit/>
-          </a:bodyPr>
-          <a:lstStyle/>
-          <a:p>
-            <a:pPr lvl="0"/>
-            <a:r>
-              <a:rPr lang="en-US" sz="8000" dirty="0">
-                <a:solidFill>
-                  <a:schemeClr val="tx1"/>
-                </a:solidFill>
-                <a:effectLst/>
-              </a:rPr>
-              <a:t>“</a:t>
-            </a:r>
-          </a:p>
-        </p:txBody>
-      </p:sp>
-      <p:sp>
-        <p:nvSpPr>
-          <p:cNvPr id="15" name="TextBox 14"/>
-          <p:cNvSpPr txBox="1"/>
-          <p:nvPr/>
-        </p:nvSpPr>
-        <p:spPr>
-          <a:xfrm>
-            <a:off x="10285412" y="2768601"/>
-            <a:ext cx="609600" cy="584776"/>
-          </a:xfrm>
-          <a:prstGeom prst="rect">
-            <a:avLst/>
-          </a:prstGeom>
-        </p:spPr>
-        <p:txBody>
-          <a:bodyPr vert="horz" lIns="91440" tIns="45720" rIns="91440" bIns="45720" rtlCol="0" anchor="ctr">
-            <a:noAutofit/>
-          </a:bodyPr>
-          <a:lstStyle/>
-          <a:p>
-            <a:pPr lvl="0" algn="r"/>
-            <a:r>
-              <a:rPr lang="en-US" sz="8000" dirty="0">
-                <a:solidFill>
-                  <a:schemeClr val="tx1"/>
-                </a:solidFill>
-                <a:effectLst/>
-              </a:rPr>
-              <a:t>”</a:t>
-            </a:r>
-          </a:p>
-        </p:txBody>
+        <p:style>
+          <a:lnRef idx="2">
+            <a:schemeClr val="accent1">
+              <a:shade val="50000"/>
+            </a:schemeClr>
+          </a:lnRef>
+          <a:fillRef idx="1">
+            <a:schemeClr val="accent1"/>
+          </a:fillRef>
+          <a:effectRef idx="0">
+            <a:schemeClr val="accent1"/>
+          </a:effectRef>
+          <a:fontRef idx="minor">
+            <a:schemeClr val="lt1"/>
+          </a:fontRef>
+        </p:style>
       </p:sp>
     </p:spTree>
     <p:extLst>
       <p:ext uri="{BB962C8B-B14F-4D97-AF65-F5344CB8AC3E}">
-        <p14:creationId xmlns:p14="http://schemas.microsoft.com/office/powerpoint/2010/main" val="3862882005"/>
-      </p:ext>
-    </p:extLst>
-  </p:cSld>
-  <p:clrMapOvr>
-    <a:masterClrMapping/>
-  </p:clrMapOvr>
-</p:sldLayout>
-</file>
-
-<file path=ppt/slideLayouts/slideLayout13.xml><?xml version="1.0" encoding="utf-8"?>
-<p:sldLayout xmlns:a="http://schemas.openxmlformats.org/drawingml/2006/main" xmlns:r="http://schemas.openxmlformats.org/officeDocument/2006/relationships" xmlns:p="http://schemas.openxmlformats.org/presentationml/2006/main" preserve="1">
-  <p:cSld name="Name Card">
-    <p:spTree>
-      <p:nvGrpSpPr>
-        <p:cNvPr id="1" name=""/>
-        <p:cNvGrpSpPr/>
-        <p:nvPr/>
-      </p:nvGrpSpPr>
-      <p:grpSpPr>
-        <a:xfrm>
-          <a:off x="0" y="0"/>
-          <a:ext cx="0" cy="0"/>
-          <a:chOff x="0" y="0"/>
-          <a:chExt cx="0" cy="0"/>
-        </a:xfrm>
-      </p:grpSpPr>
-      <p:sp>
-        <p:nvSpPr>
-          <p:cNvPr id="2" name="Title 1"/>
-          <p:cNvSpPr>
-            <a:spLocks noGrp="1"/>
-          </p:cNvSpPr>
-          <p:nvPr>
-            <p:ph type="title"/>
-          </p:nvPr>
-        </p:nvSpPr>
-        <p:spPr>
-          <a:xfrm>
-            <a:off x="684212" y="3429000"/>
-            <a:ext cx="8534400" cy="1697400"/>
-          </a:xfrm>
-        </p:spPr>
-        <p:txBody>
-          <a:bodyPr anchor="b">
-            <a:normAutofit/>
-          </a:bodyPr>
-          <a:lstStyle>
-            <a:lvl1pPr algn="l">
-              <a:defRPr sz="3200" b="0" cap="all"/>
-            </a:lvl1pPr>
-          </a:lstStyle>
-          <a:p>
-            <a:r>
-              <a:rPr lang="en-US" smtClean="0"/>
-              <a:t>Click to edit Master title style</a:t>
-            </a:r>
-            <a:endParaRPr lang="en-US" dirty="0"/>
-          </a:p>
-        </p:txBody>
-      </p:sp>
-      <p:sp>
-        <p:nvSpPr>
-          <p:cNvPr id="3" name="Text Placeholder 2"/>
-          <p:cNvSpPr>
-            <a:spLocks noGrp="1"/>
-          </p:cNvSpPr>
-          <p:nvPr>
-            <p:ph type="body" idx="1"/>
-          </p:nvPr>
-        </p:nvSpPr>
-        <p:spPr>
-          <a:xfrm>
-            <a:off x="684211" y="5132981"/>
-            <a:ext cx="8535990" cy="860400"/>
-          </a:xfrm>
-        </p:spPr>
-        <p:txBody>
-          <a:bodyPr anchor="t">
-            <a:normAutofit/>
-          </a:bodyPr>
-          <a:lstStyle>
-            <a:lvl1pPr marL="0" indent="0" algn="l">
-              <a:buNone/>
-              <a:defRPr sz="2000">
-                <a:solidFill>
-                  <a:schemeClr val="bg2">
-                    <a:lumMod val="75000"/>
-                  </a:schemeClr>
-                </a:solidFill>
-              </a:defRPr>
-            </a:lvl1pPr>
-            <a:lvl2pPr marL="457200" indent="0">
-              <a:buNone/>
-              <a:defRPr sz="1800">
-                <a:solidFill>
-                  <a:schemeClr val="tx1">
-                    <a:tint val="75000"/>
-                  </a:schemeClr>
-                </a:solidFill>
-              </a:defRPr>
-            </a:lvl2pPr>
-            <a:lvl3pPr marL="914400" indent="0">
-              <a:buNone/>
-              <a:defRPr sz="1600">
-                <a:solidFill>
-                  <a:schemeClr val="tx1">
-                    <a:tint val="75000"/>
-                  </a:schemeClr>
-                </a:solidFill>
-              </a:defRPr>
-            </a:lvl3pPr>
-            <a:lvl4pPr marL="1371600" indent="0">
-              <a:buNone/>
-              <a:defRPr sz="1400">
-                <a:solidFill>
-                  <a:schemeClr val="tx1">
-                    <a:tint val="75000"/>
-                  </a:schemeClr>
-                </a:solidFill>
-              </a:defRPr>
-            </a:lvl4pPr>
-            <a:lvl5pPr marL="1828800" indent="0">
-              <a:buNone/>
-              <a:defRPr sz="1400">
-                <a:solidFill>
-                  <a:schemeClr val="tx1">
-                    <a:tint val="75000"/>
-                  </a:schemeClr>
-                </a:solidFill>
-              </a:defRPr>
-            </a:lvl5pPr>
-            <a:lvl6pPr marL="2286000" indent="0">
-              <a:buNone/>
-              <a:defRPr sz="1400">
-                <a:solidFill>
-                  <a:schemeClr val="tx1">
-                    <a:tint val="75000"/>
-                  </a:schemeClr>
-                </a:solidFill>
-              </a:defRPr>
-            </a:lvl6pPr>
-            <a:lvl7pPr marL="2743200" indent="0">
-              <a:buNone/>
-              <a:defRPr sz="1400">
-                <a:solidFill>
-                  <a:schemeClr val="tx1">
-                    <a:tint val="75000"/>
-                  </a:schemeClr>
-                </a:solidFill>
-              </a:defRPr>
-            </a:lvl7pPr>
-            <a:lvl8pPr marL="3200400" indent="0">
-              <a:buNone/>
-              <a:defRPr sz="1400">
-                <a:solidFill>
-                  <a:schemeClr val="tx1">
-                    <a:tint val="75000"/>
-                  </a:schemeClr>
-                </a:solidFill>
-              </a:defRPr>
-            </a:lvl8pPr>
-            <a:lvl9pPr marL="3657600" indent="0">
-              <a:buNone/>
-              <a:defRPr sz="1400">
-                <a:solidFill>
-                  <a:schemeClr val="tx1">
-                    <a:tint val="75000"/>
-                  </a:schemeClr>
-                </a:solidFill>
-              </a:defRPr>
-            </a:lvl9pPr>
-          </a:lstStyle>
-          <a:p>
-            <a:pPr lvl="0"/>
-            <a:r>
-              <a:rPr lang="en-US" smtClean="0"/>
-              <a:t>Edit Master text styles</a:t>
-            </a:r>
-          </a:p>
-        </p:txBody>
-      </p:sp>
-      <p:sp>
-        <p:nvSpPr>
-          <p:cNvPr id="4" name="Date Placeholder 3"/>
-          <p:cNvSpPr>
-            <a:spLocks noGrp="1"/>
-          </p:cNvSpPr>
-          <p:nvPr>
-            <p:ph type="dt" sz="half" idx="10"/>
-          </p:nvPr>
-        </p:nvSpPr>
-        <p:spPr/>
-        <p:txBody>
-          <a:bodyPr/>
-          <a:lstStyle/>
-          <a:p>
-            <a:fld id="{3BAFBFA7-D99C-48B3-949C-321455B324FB}" type="datetimeFigureOut">
-              <a:rPr lang="en-IN" smtClean="0"/>
-              <a:t>19-11-2025</a:t>
-            </a:fld>
-            <a:endParaRPr lang="en-IN"/>
-          </a:p>
-        </p:txBody>
-      </p:sp>
-      <p:sp>
-        <p:nvSpPr>
-          <p:cNvPr id="5" name="Footer Placeholder 4"/>
-          <p:cNvSpPr>
-            <a:spLocks noGrp="1"/>
-          </p:cNvSpPr>
-          <p:nvPr>
-            <p:ph type="ftr" sz="quarter" idx="11"/>
-          </p:nvPr>
-        </p:nvSpPr>
-        <p:spPr/>
-        <p:txBody>
-          <a:bodyPr/>
-          <a:lstStyle/>
-          <a:p>
-            <a:endParaRPr lang="en-IN"/>
-          </a:p>
-        </p:txBody>
-      </p:sp>
-      <p:sp>
-        <p:nvSpPr>
-          <p:cNvPr id="6" name="Slide Number Placeholder 5"/>
-          <p:cNvSpPr>
-            <a:spLocks noGrp="1"/>
-          </p:cNvSpPr>
-          <p:nvPr>
-            <p:ph type="sldNum" sz="quarter" idx="12"/>
-          </p:nvPr>
-        </p:nvSpPr>
-        <p:spPr/>
-        <p:txBody>
-          <a:bodyPr/>
-          <a:lstStyle/>
-          <a:p>
-            <a:fld id="{BEDDDFB6-EDB5-402D-8012-908B98D768F7}" type="slidenum">
-              <a:rPr lang="en-IN" smtClean="0"/>
-              <a:t>‹#›</a:t>
-            </a:fld>
-            <a:endParaRPr lang="en-IN"/>
-          </a:p>
-        </p:txBody>
-      </p:sp>
-    </p:spTree>
-    <p:extLst>
-      <p:ext uri="{BB962C8B-B14F-4D97-AF65-F5344CB8AC3E}">
-        <p14:creationId xmlns:p14="http://schemas.microsoft.com/office/powerpoint/2010/main" val="1100287115"/>
-      </p:ext>
-    </p:extLst>
-  </p:cSld>
-  <p:clrMapOvr>
-    <a:masterClrMapping/>
-  </p:clrMapOvr>
-</p:sldLayout>
-</file>
-
-<file path=ppt/slideLayouts/slideLayout14.xml><?xml version="1.0" encoding="utf-8"?>
-<p:sldLayout xmlns:a="http://schemas.openxmlformats.org/drawingml/2006/main" xmlns:r="http://schemas.openxmlformats.org/officeDocument/2006/relationships" xmlns:p="http://schemas.openxmlformats.org/presentationml/2006/main" preserve="1">
-  <p:cSld name="Quote Name Card">
-    <p:spTree>
-      <p:nvGrpSpPr>
-        <p:cNvPr id="1" name=""/>
-        <p:cNvGrpSpPr/>
-        <p:nvPr/>
-      </p:nvGrpSpPr>
-      <p:grpSpPr>
-        <a:xfrm>
-          <a:off x="0" y="0"/>
-          <a:ext cx="0" cy="0"/>
-          <a:chOff x="0" y="0"/>
-          <a:chExt cx="0" cy="0"/>
-        </a:xfrm>
-      </p:grpSpPr>
-      <p:sp>
-        <p:nvSpPr>
-          <p:cNvPr id="2" name="Title 1"/>
-          <p:cNvSpPr>
-            <a:spLocks noGrp="1"/>
-          </p:cNvSpPr>
-          <p:nvPr>
-            <p:ph type="title"/>
-          </p:nvPr>
-        </p:nvSpPr>
-        <p:spPr>
-          <a:xfrm>
-            <a:off x="1141413" y="685800"/>
-            <a:ext cx="9144000" cy="2743200"/>
-          </a:xfrm>
-        </p:spPr>
-        <p:txBody>
-          <a:bodyPr anchor="ctr">
-            <a:normAutofit/>
-          </a:bodyPr>
-          <a:lstStyle>
-            <a:lvl1pPr algn="l">
-              <a:defRPr sz="3200" b="0" cap="all">
-                <a:solidFill>
-                  <a:schemeClr val="tx1"/>
-                </a:solidFill>
-              </a:defRPr>
-            </a:lvl1pPr>
-          </a:lstStyle>
-          <a:p>
-            <a:r>
-              <a:rPr lang="en-US" smtClean="0"/>
-              <a:t>Click to edit Master title style</a:t>
-            </a:r>
-            <a:endParaRPr lang="en-US" dirty="0"/>
-          </a:p>
-        </p:txBody>
-      </p:sp>
-      <p:sp>
-        <p:nvSpPr>
-          <p:cNvPr id="10" name="Text Placeholder 9"/>
-          <p:cNvSpPr>
-            <a:spLocks noGrp="1"/>
-          </p:cNvSpPr>
-          <p:nvPr>
-            <p:ph type="body" sz="quarter" idx="13"/>
-          </p:nvPr>
-        </p:nvSpPr>
-        <p:spPr>
-          <a:xfrm>
-            <a:off x="684212" y="3928534"/>
-            <a:ext cx="8534401" cy="1049866"/>
-          </a:xfrm>
-        </p:spPr>
-        <p:txBody>
-          <a:bodyPr vert="horz" lIns="91440" tIns="45720" rIns="91440" bIns="45720" rtlCol="0" anchor="b">
-            <a:normAutofit/>
-          </a:bodyPr>
-          <a:lstStyle>
-            <a:lvl1pPr>
-              <a:buNone/>
-              <a:defRPr lang="en-US" sz="2400" b="0" cap="all" dirty="0">
-                <a:ln w="3175" cmpd="sng">
-                  <a:noFill/>
-                </a:ln>
-                <a:solidFill>
-                  <a:schemeClr val="tx1"/>
-                </a:solidFill>
-                <a:effectLst/>
-              </a:defRPr>
-            </a:lvl1pPr>
-          </a:lstStyle>
-          <a:p>
-            <a:pPr marL="0" lvl="0">
-              <a:spcBef>
-                <a:spcPct val="0"/>
-              </a:spcBef>
-              <a:buNone/>
-            </a:pPr>
-            <a:r>
-              <a:rPr lang="en-US" smtClean="0"/>
-              <a:t>Edit Master text styles</a:t>
-            </a:r>
-          </a:p>
-        </p:txBody>
-      </p:sp>
-      <p:sp>
-        <p:nvSpPr>
-          <p:cNvPr id="3" name="Text Placeholder 2"/>
-          <p:cNvSpPr>
-            <a:spLocks noGrp="1"/>
-          </p:cNvSpPr>
-          <p:nvPr>
-            <p:ph type="body" idx="1"/>
-          </p:nvPr>
-        </p:nvSpPr>
-        <p:spPr>
-          <a:xfrm>
-            <a:off x="684211" y="4978400"/>
-            <a:ext cx="8534401" cy="1016000"/>
-          </a:xfrm>
-        </p:spPr>
-        <p:txBody>
-          <a:bodyPr anchor="t">
-            <a:normAutofit/>
-          </a:bodyPr>
-          <a:lstStyle>
-            <a:lvl1pPr marL="0" indent="0" algn="l">
-              <a:buNone/>
-              <a:defRPr sz="1800">
-                <a:solidFill>
-                  <a:schemeClr val="bg2">
-                    <a:lumMod val="75000"/>
-                  </a:schemeClr>
-                </a:solidFill>
-              </a:defRPr>
-            </a:lvl1pPr>
-            <a:lvl2pPr marL="457200" indent="0">
-              <a:buNone/>
-              <a:defRPr sz="1800">
-                <a:solidFill>
-                  <a:schemeClr val="tx1">
-                    <a:tint val="75000"/>
-                  </a:schemeClr>
-                </a:solidFill>
-              </a:defRPr>
-            </a:lvl2pPr>
-            <a:lvl3pPr marL="914400" indent="0">
-              <a:buNone/>
-              <a:defRPr sz="1600">
-                <a:solidFill>
-                  <a:schemeClr val="tx1">
-                    <a:tint val="75000"/>
-                  </a:schemeClr>
-                </a:solidFill>
-              </a:defRPr>
-            </a:lvl3pPr>
-            <a:lvl4pPr marL="1371600" indent="0">
-              <a:buNone/>
-              <a:defRPr sz="1400">
-                <a:solidFill>
-                  <a:schemeClr val="tx1">
-                    <a:tint val="75000"/>
-                  </a:schemeClr>
-                </a:solidFill>
-              </a:defRPr>
-            </a:lvl4pPr>
-            <a:lvl5pPr marL="1828800" indent="0">
-              <a:buNone/>
-              <a:defRPr sz="1400">
-                <a:solidFill>
-                  <a:schemeClr val="tx1">
-                    <a:tint val="75000"/>
-                  </a:schemeClr>
-                </a:solidFill>
-              </a:defRPr>
-            </a:lvl5pPr>
-            <a:lvl6pPr marL="2286000" indent="0">
-              <a:buNone/>
-              <a:defRPr sz="1400">
-                <a:solidFill>
-                  <a:schemeClr val="tx1">
-                    <a:tint val="75000"/>
-                  </a:schemeClr>
-                </a:solidFill>
-              </a:defRPr>
-            </a:lvl6pPr>
-            <a:lvl7pPr marL="2743200" indent="0">
-              <a:buNone/>
-              <a:defRPr sz="1400">
-                <a:solidFill>
-                  <a:schemeClr val="tx1">
-                    <a:tint val="75000"/>
-                  </a:schemeClr>
-                </a:solidFill>
-              </a:defRPr>
-            </a:lvl7pPr>
-            <a:lvl8pPr marL="3200400" indent="0">
-              <a:buNone/>
-              <a:defRPr sz="1400">
-                <a:solidFill>
-                  <a:schemeClr val="tx1">
-                    <a:tint val="75000"/>
-                  </a:schemeClr>
-                </a:solidFill>
-              </a:defRPr>
-            </a:lvl8pPr>
-            <a:lvl9pPr marL="3657600" indent="0">
-              <a:buNone/>
-              <a:defRPr sz="1400">
-                <a:solidFill>
-                  <a:schemeClr val="tx1">
-                    <a:tint val="75000"/>
-                  </a:schemeClr>
-                </a:solidFill>
-              </a:defRPr>
-            </a:lvl9pPr>
-          </a:lstStyle>
-          <a:p>
-            <a:pPr lvl="0"/>
-            <a:r>
-              <a:rPr lang="en-US" smtClean="0"/>
-              <a:t>Edit Master text styles</a:t>
-            </a:r>
-          </a:p>
-        </p:txBody>
-      </p:sp>
-      <p:sp>
-        <p:nvSpPr>
-          <p:cNvPr id="4" name="Date Placeholder 3"/>
-          <p:cNvSpPr>
-            <a:spLocks noGrp="1"/>
-          </p:cNvSpPr>
-          <p:nvPr>
-            <p:ph type="dt" sz="half" idx="10"/>
-          </p:nvPr>
-        </p:nvSpPr>
-        <p:spPr/>
-        <p:txBody>
-          <a:bodyPr/>
-          <a:lstStyle/>
-          <a:p>
-            <a:fld id="{3BAFBFA7-D99C-48B3-949C-321455B324FB}" type="datetimeFigureOut">
-              <a:rPr lang="en-IN" smtClean="0"/>
-              <a:t>19-11-2025</a:t>
-            </a:fld>
-            <a:endParaRPr lang="en-IN"/>
-          </a:p>
-        </p:txBody>
-      </p:sp>
-      <p:sp>
-        <p:nvSpPr>
-          <p:cNvPr id="5" name="Footer Placeholder 4"/>
-          <p:cNvSpPr>
-            <a:spLocks noGrp="1"/>
-          </p:cNvSpPr>
-          <p:nvPr>
-            <p:ph type="ftr" sz="quarter" idx="11"/>
-          </p:nvPr>
-        </p:nvSpPr>
-        <p:spPr/>
-        <p:txBody>
-          <a:bodyPr/>
-          <a:lstStyle/>
-          <a:p>
-            <a:endParaRPr lang="en-IN"/>
-          </a:p>
-        </p:txBody>
-      </p:sp>
-      <p:sp>
-        <p:nvSpPr>
-          <p:cNvPr id="6" name="Slide Number Placeholder 5"/>
-          <p:cNvSpPr>
-            <a:spLocks noGrp="1"/>
-          </p:cNvSpPr>
-          <p:nvPr>
-            <p:ph type="sldNum" sz="quarter" idx="12"/>
-          </p:nvPr>
-        </p:nvSpPr>
-        <p:spPr/>
-        <p:txBody>
-          <a:bodyPr/>
-          <a:lstStyle/>
-          <a:p>
-            <a:fld id="{BEDDDFB6-EDB5-402D-8012-908B98D768F7}" type="slidenum">
-              <a:rPr lang="en-IN" smtClean="0"/>
-              <a:t>‹#›</a:t>
-            </a:fld>
-            <a:endParaRPr lang="en-IN"/>
-          </a:p>
-        </p:txBody>
-      </p:sp>
-      <p:sp>
-        <p:nvSpPr>
-          <p:cNvPr id="11" name="TextBox 10"/>
-          <p:cNvSpPr txBox="1"/>
-          <p:nvPr/>
-        </p:nvSpPr>
-        <p:spPr>
-          <a:xfrm>
-            <a:off x="531812" y="812222"/>
-            <a:ext cx="609600" cy="584776"/>
-          </a:xfrm>
-          <a:prstGeom prst="rect">
-            <a:avLst/>
-          </a:prstGeom>
-        </p:spPr>
-        <p:txBody>
-          <a:bodyPr vert="horz" lIns="91440" tIns="45720" rIns="91440" bIns="45720" rtlCol="0" anchor="ctr">
-            <a:noAutofit/>
-          </a:bodyPr>
-          <a:lstStyle/>
-          <a:p>
-            <a:pPr lvl="0"/>
-            <a:r>
-              <a:rPr lang="en-US" sz="8000" dirty="0">
-                <a:solidFill>
-                  <a:schemeClr val="tx1"/>
-                </a:solidFill>
-                <a:effectLst/>
-              </a:rPr>
-              <a:t>“</a:t>
-            </a:r>
-          </a:p>
-        </p:txBody>
-      </p:sp>
-      <p:sp>
-        <p:nvSpPr>
-          <p:cNvPr id="12" name="TextBox 11"/>
-          <p:cNvSpPr txBox="1"/>
-          <p:nvPr/>
-        </p:nvSpPr>
-        <p:spPr>
-          <a:xfrm>
-            <a:off x="10285412" y="2768601"/>
-            <a:ext cx="609600" cy="584776"/>
-          </a:xfrm>
-          <a:prstGeom prst="rect">
-            <a:avLst/>
-          </a:prstGeom>
-        </p:spPr>
-        <p:txBody>
-          <a:bodyPr vert="horz" lIns="91440" tIns="45720" rIns="91440" bIns="45720" rtlCol="0" anchor="ctr">
-            <a:noAutofit/>
-          </a:bodyPr>
-          <a:lstStyle/>
-          <a:p>
-            <a:pPr lvl="0" algn="r"/>
-            <a:r>
-              <a:rPr lang="en-US" sz="8000" dirty="0">
-                <a:solidFill>
-                  <a:schemeClr val="tx1"/>
-                </a:solidFill>
-                <a:effectLst/>
-              </a:rPr>
-              <a:t>”</a:t>
-            </a:r>
-          </a:p>
-        </p:txBody>
-      </p:sp>
-    </p:spTree>
-    <p:extLst>
-      <p:ext uri="{BB962C8B-B14F-4D97-AF65-F5344CB8AC3E}">
-        <p14:creationId xmlns:p14="http://schemas.microsoft.com/office/powerpoint/2010/main" val="284532313"/>
-      </p:ext>
-    </p:extLst>
-  </p:cSld>
-  <p:clrMapOvr>
-    <a:masterClrMapping/>
-  </p:clrMapOvr>
-</p:sldLayout>
-</file>
-
-<file path=ppt/slideLayouts/slideLayout15.xml><?xml version="1.0" encoding="utf-8"?>
-<p:sldLayout xmlns:a="http://schemas.openxmlformats.org/drawingml/2006/main" xmlns:r="http://schemas.openxmlformats.org/officeDocument/2006/relationships" xmlns:p="http://schemas.openxmlformats.org/presentationml/2006/main" preserve="1">
-  <p:cSld name="True or False">
-    <p:spTree>
-      <p:nvGrpSpPr>
-        <p:cNvPr id="1" name=""/>
-        <p:cNvGrpSpPr/>
-        <p:nvPr/>
-      </p:nvGrpSpPr>
-      <p:grpSpPr>
-        <a:xfrm>
-          <a:off x="0" y="0"/>
-          <a:ext cx="0" cy="0"/>
-          <a:chOff x="0" y="0"/>
-          <a:chExt cx="0" cy="0"/>
-        </a:xfrm>
-      </p:grpSpPr>
-      <p:sp>
-        <p:nvSpPr>
-          <p:cNvPr id="2" name="Title 1"/>
-          <p:cNvSpPr>
-            <a:spLocks noGrp="1"/>
-          </p:cNvSpPr>
-          <p:nvPr>
-            <p:ph type="title"/>
-          </p:nvPr>
-        </p:nvSpPr>
-        <p:spPr>
-          <a:xfrm>
-            <a:off x="684213" y="685800"/>
-            <a:ext cx="10058400" cy="2743200"/>
-          </a:xfrm>
-        </p:spPr>
-        <p:txBody>
-          <a:bodyPr vert="horz" lIns="91440" tIns="45720" rIns="91440" bIns="45720" rtlCol="0" anchor="ctr">
-            <a:normAutofit/>
-          </a:bodyPr>
-          <a:lstStyle>
-            <a:lvl1pPr>
-              <a:defRPr lang="en-US" b="0" dirty="0"/>
-            </a:lvl1pPr>
-          </a:lstStyle>
-          <a:p>
-            <a:pPr marL="0" lvl="0"/>
-            <a:r>
-              <a:rPr lang="en-US" smtClean="0"/>
-              <a:t>Click to edit Master title style</a:t>
-            </a:r>
-            <a:endParaRPr lang="en-US" dirty="0"/>
-          </a:p>
-        </p:txBody>
-      </p:sp>
-      <p:sp>
-        <p:nvSpPr>
-          <p:cNvPr id="10" name="Text Placeholder 9"/>
-          <p:cNvSpPr>
-            <a:spLocks noGrp="1"/>
-          </p:cNvSpPr>
-          <p:nvPr>
-            <p:ph type="body" sz="quarter" idx="13"/>
-          </p:nvPr>
-        </p:nvSpPr>
-        <p:spPr>
-          <a:xfrm>
-            <a:off x="684212" y="3928534"/>
-            <a:ext cx="8534400" cy="838200"/>
-          </a:xfrm>
-        </p:spPr>
-        <p:txBody>
-          <a:bodyPr vert="horz" lIns="91440" tIns="45720" rIns="91440" bIns="45720" rtlCol="0" anchor="b">
-            <a:normAutofit/>
-          </a:bodyPr>
-          <a:lstStyle>
-            <a:lvl1pPr>
-              <a:buNone/>
-              <a:defRPr lang="en-US" sz="2400" b="0" cap="all" dirty="0">
-                <a:ln w="3175" cmpd="sng">
-                  <a:noFill/>
-                </a:ln>
-                <a:solidFill>
-                  <a:schemeClr val="tx1"/>
-                </a:solidFill>
-                <a:effectLst/>
-              </a:defRPr>
-            </a:lvl1pPr>
-          </a:lstStyle>
-          <a:p>
-            <a:pPr marL="0" lvl="0">
-              <a:spcBef>
-                <a:spcPct val="0"/>
-              </a:spcBef>
-              <a:buNone/>
-            </a:pPr>
-            <a:r>
-              <a:rPr lang="en-US" smtClean="0"/>
-              <a:t>Edit Master text styles</a:t>
-            </a:r>
-          </a:p>
-        </p:txBody>
-      </p:sp>
-      <p:sp>
-        <p:nvSpPr>
-          <p:cNvPr id="3" name="Text Placeholder 2"/>
-          <p:cNvSpPr>
-            <a:spLocks noGrp="1"/>
-          </p:cNvSpPr>
-          <p:nvPr>
-            <p:ph type="body" idx="1"/>
-          </p:nvPr>
-        </p:nvSpPr>
-        <p:spPr>
-          <a:xfrm>
-            <a:off x="684211" y="4766732"/>
-            <a:ext cx="8534401" cy="1227667"/>
-          </a:xfrm>
-        </p:spPr>
-        <p:txBody>
-          <a:bodyPr anchor="t">
-            <a:normAutofit/>
-          </a:bodyPr>
-          <a:lstStyle>
-            <a:lvl1pPr marL="0" indent="0" algn="l">
-              <a:buNone/>
-              <a:defRPr sz="1800">
-                <a:solidFill>
-                  <a:schemeClr val="bg2">
-                    <a:lumMod val="75000"/>
-                  </a:schemeClr>
-                </a:solidFill>
-              </a:defRPr>
-            </a:lvl1pPr>
-            <a:lvl2pPr marL="457200" indent="0">
-              <a:buNone/>
-              <a:defRPr sz="1800">
-                <a:solidFill>
-                  <a:schemeClr val="tx1">
-                    <a:tint val="75000"/>
-                  </a:schemeClr>
-                </a:solidFill>
-              </a:defRPr>
-            </a:lvl2pPr>
-            <a:lvl3pPr marL="914400" indent="0">
-              <a:buNone/>
-              <a:defRPr sz="1600">
-                <a:solidFill>
-                  <a:schemeClr val="tx1">
-                    <a:tint val="75000"/>
-                  </a:schemeClr>
-                </a:solidFill>
-              </a:defRPr>
-            </a:lvl3pPr>
-            <a:lvl4pPr marL="1371600" indent="0">
-              <a:buNone/>
-              <a:defRPr sz="1400">
-                <a:solidFill>
-                  <a:schemeClr val="tx1">
-                    <a:tint val="75000"/>
-                  </a:schemeClr>
-                </a:solidFill>
-              </a:defRPr>
-            </a:lvl4pPr>
-            <a:lvl5pPr marL="1828800" indent="0">
-              <a:buNone/>
-              <a:defRPr sz="1400">
-                <a:solidFill>
-                  <a:schemeClr val="tx1">
-                    <a:tint val="75000"/>
-                  </a:schemeClr>
-                </a:solidFill>
-              </a:defRPr>
-            </a:lvl5pPr>
-            <a:lvl6pPr marL="2286000" indent="0">
-              <a:buNone/>
-              <a:defRPr sz="1400">
-                <a:solidFill>
-                  <a:schemeClr val="tx1">
-                    <a:tint val="75000"/>
-                  </a:schemeClr>
-                </a:solidFill>
-              </a:defRPr>
-            </a:lvl6pPr>
-            <a:lvl7pPr marL="2743200" indent="0">
-              <a:buNone/>
-              <a:defRPr sz="1400">
-                <a:solidFill>
-                  <a:schemeClr val="tx1">
-                    <a:tint val="75000"/>
-                  </a:schemeClr>
-                </a:solidFill>
-              </a:defRPr>
-            </a:lvl7pPr>
-            <a:lvl8pPr marL="3200400" indent="0">
-              <a:buNone/>
-              <a:defRPr sz="1400">
-                <a:solidFill>
-                  <a:schemeClr val="tx1">
-                    <a:tint val="75000"/>
-                  </a:schemeClr>
-                </a:solidFill>
-              </a:defRPr>
-            </a:lvl8pPr>
-            <a:lvl9pPr marL="3657600" indent="0">
-              <a:buNone/>
-              <a:defRPr sz="1400">
-                <a:solidFill>
-                  <a:schemeClr val="tx1">
-                    <a:tint val="75000"/>
-                  </a:schemeClr>
-                </a:solidFill>
-              </a:defRPr>
-            </a:lvl9pPr>
-          </a:lstStyle>
-          <a:p>
-            <a:pPr lvl="0"/>
-            <a:r>
-              <a:rPr lang="en-US" smtClean="0"/>
-              <a:t>Edit Master text styles</a:t>
-            </a:r>
-          </a:p>
-        </p:txBody>
-      </p:sp>
-      <p:sp>
-        <p:nvSpPr>
-          <p:cNvPr id="4" name="Date Placeholder 3"/>
-          <p:cNvSpPr>
-            <a:spLocks noGrp="1"/>
-          </p:cNvSpPr>
-          <p:nvPr>
-            <p:ph type="dt" sz="half" idx="10"/>
-          </p:nvPr>
-        </p:nvSpPr>
-        <p:spPr/>
-        <p:txBody>
-          <a:bodyPr/>
-          <a:lstStyle/>
-          <a:p>
-            <a:fld id="{3BAFBFA7-D99C-48B3-949C-321455B324FB}" type="datetimeFigureOut">
-              <a:rPr lang="en-IN" smtClean="0"/>
-              <a:t>19-11-2025</a:t>
-            </a:fld>
-            <a:endParaRPr lang="en-IN"/>
-          </a:p>
-        </p:txBody>
-      </p:sp>
-      <p:sp>
-        <p:nvSpPr>
-          <p:cNvPr id="5" name="Footer Placeholder 4"/>
-          <p:cNvSpPr>
-            <a:spLocks noGrp="1"/>
-          </p:cNvSpPr>
-          <p:nvPr>
-            <p:ph type="ftr" sz="quarter" idx="11"/>
-          </p:nvPr>
-        </p:nvSpPr>
-        <p:spPr/>
-        <p:txBody>
-          <a:bodyPr/>
-          <a:lstStyle/>
-          <a:p>
-            <a:endParaRPr lang="en-IN"/>
-          </a:p>
-        </p:txBody>
-      </p:sp>
-      <p:sp>
-        <p:nvSpPr>
-          <p:cNvPr id="6" name="Slide Number Placeholder 5"/>
-          <p:cNvSpPr>
-            <a:spLocks noGrp="1"/>
-          </p:cNvSpPr>
-          <p:nvPr>
-            <p:ph type="sldNum" sz="quarter" idx="12"/>
-          </p:nvPr>
-        </p:nvSpPr>
-        <p:spPr/>
-        <p:txBody>
-          <a:bodyPr/>
-          <a:lstStyle/>
-          <a:p>
-            <a:fld id="{BEDDDFB6-EDB5-402D-8012-908B98D768F7}" type="slidenum">
-              <a:rPr lang="en-IN" smtClean="0"/>
-              <a:t>‹#›</a:t>
-            </a:fld>
-            <a:endParaRPr lang="en-IN"/>
-          </a:p>
-        </p:txBody>
-      </p:sp>
-    </p:spTree>
-    <p:extLst>
-      <p:ext uri="{BB962C8B-B14F-4D97-AF65-F5344CB8AC3E}">
-        <p14:creationId xmlns:p14="http://schemas.microsoft.com/office/powerpoint/2010/main" val="728323045"/>
-      </p:ext>
-    </p:extLst>
-  </p:cSld>
-  <p:clrMapOvr>
-    <a:masterClrMapping/>
-  </p:clrMapOvr>
-</p:sldLayout>
-</file>
-
-<file path=ppt/slideLayouts/slideLayout16.xml><?xml version="1.0" encoding="utf-8"?>
-<p:sldLayout xmlns:a="http://schemas.openxmlformats.org/drawingml/2006/main" xmlns:r="http://schemas.openxmlformats.org/officeDocument/2006/relationships" xmlns:p="http://schemas.openxmlformats.org/presentationml/2006/main" type="vertTx" preserve="1">
-  <p:cSld name="Title and Vertical Text">
-    <p:spTree>
-      <p:nvGrpSpPr>
-        <p:cNvPr id="1" name=""/>
-        <p:cNvGrpSpPr/>
-        <p:nvPr/>
-      </p:nvGrpSpPr>
-      <p:grpSpPr>
-        <a:xfrm>
-          <a:off x="0" y="0"/>
-          <a:ext cx="0" cy="0"/>
-          <a:chOff x="0" y="0"/>
-          <a:chExt cx="0" cy="0"/>
-        </a:xfrm>
-      </p:grpSpPr>
-      <p:sp>
-        <p:nvSpPr>
-          <p:cNvPr id="2" name="Title 1"/>
-          <p:cNvSpPr>
-            <a:spLocks noGrp="1"/>
-          </p:cNvSpPr>
-          <p:nvPr>
-            <p:ph type="title"/>
-          </p:nvPr>
-        </p:nvSpPr>
-        <p:spPr/>
-        <p:txBody>
-          <a:bodyPr/>
-          <a:lstStyle>
-            <a:lvl1pPr algn="l">
-              <a:defRPr/>
-            </a:lvl1pPr>
-          </a:lstStyle>
-          <a:p>
-            <a:r>
-              <a:rPr lang="en-US" smtClean="0"/>
-              <a:t>Click to edit Master title style</a:t>
-            </a:r>
-            <a:endParaRPr lang="en-US" dirty="0"/>
-          </a:p>
-        </p:txBody>
-      </p:sp>
-      <p:sp>
-        <p:nvSpPr>
-          <p:cNvPr id="3" name="Vertical Text Placeholder 2"/>
-          <p:cNvSpPr>
-            <a:spLocks noGrp="1"/>
-          </p:cNvSpPr>
-          <p:nvPr>
-            <p:ph type="body" orient="vert" idx="1"/>
-          </p:nvPr>
-        </p:nvSpPr>
-        <p:spPr/>
-        <p:txBody>
-          <a:bodyPr vert="eaVert" anchor="t"/>
-          <a:lstStyle/>
-          <a:p>
-            <a:pPr lvl="0"/>
-            <a:r>
-              <a:rPr lang="en-US" smtClean="0"/>
-              <a:t>Edit Master text styles</a:t>
-            </a:r>
-          </a:p>
-          <a:p>
-            <a:pPr lvl="1"/>
-            <a:r>
-              <a:rPr lang="en-US" smtClean="0"/>
-              <a:t>Second level</a:t>
-            </a:r>
-          </a:p>
-          <a:p>
-            <a:pPr lvl="2"/>
-            <a:r>
-              <a:rPr lang="en-US" smtClean="0"/>
-              <a:t>Third level</a:t>
-            </a:r>
-          </a:p>
-          <a:p>
-            <a:pPr lvl="3"/>
-            <a:r>
-              <a:rPr lang="en-US" smtClean="0"/>
-              <a:t>Fourth level</a:t>
-            </a:r>
-          </a:p>
-          <a:p>
-            <a:pPr lvl="4"/>
-            <a:r>
-              <a:rPr lang="en-US" smtClean="0"/>
-              <a:t>Fifth level</a:t>
-            </a:r>
-            <a:endParaRPr lang="en-US" dirty="0"/>
-          </a:p>
-        </p:txBody>
-      </p:sp>
-      <p:sp>
-        <p:nvSpPr>
-          <p:cNvPr id="4" name="Date Placeholder 3"/>
-          <p:cNvSpPr>
-            <a:spLocks noGrp="1"/>
-          </p:cNvSpPr>
-          <p:nvPr>
-            <p:ph type="dt" sz="half" idx="10"/>
-          </p:nvPr>
-        </p:nvSpPr>
-        <p:spPr/>
-        <p:txBody>
-          <a:bodyPr/>
-          <a:lstStyle/>
-          <a:p>
-            <a:fld id="{3BAFBFA7-D99C-48B3-949C-321455B324FB}" type="datetimeFigureOut">
-              <a:rPr lang="en-IN" smtClean="0"/>
-              <a:t>19-11-2025</a:t>
-            </a:fld>
-            <a:endParaRPr lang="en-IN"/>
-          </a:p>
-        </p:txBody>
-      </p:sp>
-      <p:sp>
-        <p:nvSpPr>
-          <p:cNvPr id="5" name="Footer Placeholder 4"/>
-          <p:cNvSpPr>
-            <a:spLocks noGrp="1"/>
-          </p:cNvSpPr>
-          <p:nvPr>
-            <p:ph type="ftr" sz="quarter" idx="11"/>
-          </p:nvPr>
-        </p:nvSpPr>
-        <p:spPr/>
-        <p:txBody>
-          <a:bodyPr/>
-          <a:lstStyle/>
-          <a:p>
-            <a:endParaRPr lang="en-IN"/>
-          </a:p>
-        </p:txBody>
-      </p:sp>
-      <p:sp>
-        <p:nvSpPr>
-          <p:cNvPr id="6" name="Slide Number Placeholder 5"/>
-          <p:cNvSpPr>
-            <a:spLocks noGrp="1"/>
-          </p:cNvSpPr>
-          <p:nvPr>
-            <p:ph type="sldNum" sz="quarter" idx="12"/>
-          </p:nvPr>
-        </p:nvSpPr>
-        <p:spPr/>
-        <p:txBody>
-          <a:bodyPr/>
-          <a:lstStyle/>
-          <a:p>
-            <a:fld id="{BEDDDFB6-EDB5-402D-8012-908B98D768F7}" type="slidenum">
-              <a:rPr lang="en-IN" smtClean="0"/>
-              <a:t>‹#›</a:t>
-            </a:fld>
-            <a:endParaRPr lang="en-IN"/>
-          </a:p>
-        </p:txBody>
-      </p:sp>
-    </p:spTree>
-    <p:extLst>
-      <p:ext uri="{BB962C8B-B14F-4D97-AF65-F5344CB8AC3E}">
-        <p14:creationId xmlns:p14="http://schemas.microsoft.com/office/powerpoint/2010/main" val="1973163265"/>
-      </p:ext>
-    </p:extLst>
-  </p:cSld>
-  <p:clrMapOvr>
-    <a:masterClrMapping/>
-  </p:clrMapOvr>
-</p:sldLayout>
-</file>
-
-<file path=ppt/slideLayouts/slideLayout17.xml><?xml version="1.0" encoding="utf-8"?>
-<p:sldLayout xmlns:a="http://schemas.openxmlformats.org/drawingml/2006/main" xmlns:r="http://schemas.openxmlformats.org/officeDocument/2006/relationships" xmlns:p="http://schemas.openxmlformats.org/presentationml/2006/main" type="vertTitleAndTx" preserve="1">
-  <p:cSld name="Vertical Title and Text">
-    <p:spTree>
-      <p:nvGrpSpPr>
-        <p:cNvPr id="1" name=""/>
-        <p:cNvGrpSpPr/>
-        <p:nvPr/>
-      </p:nvGrpSpPr>
-      <p:grpSpPr>
-        <a:xfrm>
-          <a:off x="0" y="0"/>
-          <a:ext cx="0" cy="0"/>
-          <a:chOff x="0" y="0"/>
-          <a:chExt cx="0" cy="0"/>
-        </a:xfrm>
-      </p:grpSpPr>
-      <p:sp>
-        <p:nvSpPr>
-          <p:cNvPr id="2" name="Vertical Title 1"/>
-          <p:cNvSpPr>
-            <a:spLocks noGrp="1"/>
-          </p:cNvSpPr>
-          <p:nvPr>
-            <p:ph type="title" orient="vert"/>
-          </p:nvPr>
-        </p:nvSpPr>
-        <p:spPr>
-          <a:xfrm>
-            <a:off x="8685212" y="685800"/>
-            <a:ext cx="2057400" cy="4572000"/>
-          </a:xfrm>
-        </p:spPr>
-        <p:txBody>
-          <a:bodyPr vert="eaVert"/>
-          <a:lstStyle/>
-          <a:p>
-            <a:r>
-              <a:rPr lang="en-US" smtClean="0"/>
-              <a:t>Click to edit Master title style</a:t>
-            </a:r>
-            <a:endParaRPr lang="en-US" dirty="0"/>
-          </a:p>
-        </p:txBody>
-      </p:sp>
-      <p:sp>
-        <p:nvSpPr>
-          <p:cNvPr id="3" name="Vertical Text Placeholder 2"/>
-          <p:cNvSpPr>
-            <a:spLocks noGrp="1"/>
-          </p:cNvSpPr>
-          <p:nvPr>
-            <p:ph type="body" orient="vert" idx="1"/>
-          </p:nvPr>
-        </p:nvSpPr>
-        <p:spPr>
-          <a:xfrm>
-            <a:off x="685800" y="685800"/>
-            <a:ext cx="7823200" cy="5308600"/>
-          </a:xfrm>
-        </p:spPr>
-        <p:txBody>
-          <a:bodyPr vert="eaVert" anchor="t"/>
-          <a:lstStyle/>
-          <a:p>
-            <a:pPr lvl="0"/>
-            <a:r>
-              <a:rPr lang="en-US" smtClean="0"/>
-              <a:t>Edit Master text styles</a:t>
-            </a:r>
-          </a:p>
-          <a:p>
-            <a:pPr lvl="1"/>
-            <a:r>
-              <a:rPr lang="en-US" smtClean="0"/>
-              <a:t>Second level</a:t>
-            </a:r>
-          </a:p>
-          <a:p>
-            <a:pPr lvl="2"/>
-            <a:r>
-              <a:rPr lang="en-US" smtClean="0"/>
-              <a:t>Third level</a:t>
-            </a:r>
-          </a:p>
-          <a:p>
-            <a:pPr lvl="3"/>
-            <a:r>
-              <a:rPr lang="en-US" smtClean="0"/>
-              <a:t>Fourth level</a:t>
-            </a:r>
-          </a:p>
-          <a:p>
-            <a:pPr lvl="4"/>
-            <a:r>
-              <a:rPr lang="en-US" smtClean="0"/>
-              <a:t>Fifth level</a:t>
-            </a:r>
-            <a:endParaRPr lang="en-US" dirty="0"/>
-          </a:p>
-        </p:txBody>
-      </p:sp>
-      <p:sp>
-        <p:nvSpPr>
-          <p:cNvPr id="4" name="Date Placeholder 3"/>
-          <p:cNvSpPr>
-            <a:spLocks noGrp="1"/>
-          </p:cNvSpPr>
-          <p:nvPr>
-            <p:ph type="dt" sz="half" idx="10"/>
-          </p:nvPr>
-        </p:nvSpPr>
-        <p:spPr/>
-        <p:txBody>
-          <a:bodyPr/>
-          <a:lstStyle/>
-          <a:p>
-            <a:fld id="{3BAFBFA7-D99C-48B3-949C-321455B324FB}" type="datetimeFigureOut">
-              <a:rPr lang="en-IN" smtClean="0"/>
-              <a:t>19-11-2025</a:t>
-            </a:fld>
-            <a:endParaRPr lang="en-IN"/>
-          </a:p>
-        </p:txBody>
-      </p:sp>
-      <p:sp>
-        <p:nvSpPr>
-          <p:cNvPr id="5" name="Footer Placeholder 4"/>
-          <p:cNvSpPr>
-            <a:spLocks noGrp="1"/>
-          </p:cNvSpPr>
-          <p:nvPr>
-            <p:ph type="ftr" sz="quarter" idx="11"/>
-          </p:nvPr>
-        </p:nvSpPr>
-        <p:spPr/>
-        <p:txBody>
-          <a:bodyPr/>
-          <a:lstStyle/>
-          <a:p>
-            <a:endParaRPr lang="en-IN"/>
-          </a:p>
-        </p:txBody>
-      </p:sp>
-      <p:sp>
-        <p:nvSpPr>
-          <p:cNvPr id="6" name="Slide Number Placeholder 5"/>
-          <p:cNvSpPr>
-            <a:spLocks noGrp="1"/>
-          </p:cNvSpPr>
-          <p:nvPr>
-            <p:ph type="sldNum" sz="quarter" idx="12"/>
-          </p:nvPr>
-        </p:nvSpPr>
-        <p:spPr/>
-        <p:txBody>
-          <a:bodyPr/>
-          <a:lstStyle/>
-          <a:p>
-            <a:fld id="{BEDDDFB6-EDB5-402D-8012-908B98D768F7}" type="slidenum">
-              <a:rPr lang="en-IN" smtClean="0"/>
-              <a:t>‹#›</a:t>
-            </a:fld>
-            <a:endParaRPr lang="en-IN"/>
-          </a:p>
-        </p:txBody>
-      </p:sp>
-    </p:spTree>
-    <p:extLst>
-      <p:ext uri="{BB962C8B-B14F-4D97-AF65-F5344CB8AC3E}">
-        <p14:creationId xmlns:p14="http://schemas.microsoft.com/office/powerpoint/2010/main" val="1432480165"/>
-      </p:ext>
-    </p:extLst>
-  </p:cSld>
-  <p:clrMapOvr>
-    <a:masterClrMapping/>
-  </p:clrMapOvr>
-</p:sldLayout>
-</file>
-
-<file path=ppt/slideLayouts/slideLayout2.xml><?xml version="1.0" encoding="utf-8"?>
-<p:sldLayout xmlns:a="http://schemas.openxmlformats.org/drawingml/2006/main" xmlns:r="http://schemas.openxmlformats.org/officeDocument/2006/relationships" xmlns:p="http://schemas.openxmlformats.org/presentationml/2006/main" type="obj" preserve="1">
-  <p:cSld name="Title and Content">
-    <p:spTree>
-      <p:nvGrpSpPr>
-        <p:cNvPr id="1" name=""/>
-        <p:cNvGrpSpPr/>
-        <p:nvPr/>
-      </p:nvGrpSpPr>
-      <p:grpSpPr>
-        <a:xfrm>
-          <a:off x="0" y="0"/>
-          <a:ext cx="0" cy="0"/>
-          <a:chOff x="0" y="0"/>
-          <a:chExt cx="0" cy="0"/>
-        </a:xfrm>
-      </p:grpSpPr>
-      <p:sp>
-        <p:nvSpPr>
-          <p:cNvPr id="2" name="Title 1"/>
-          <p:cNvSpPr>
-            <a:spLocks noGrp="1"/>
-          </p:cNvSpPr>
-          <p:nvPr>
-            <p:ph type="title"/>
-          </p:nvPr>
-        </p:nvSpPr>
-        <p:spPr/>
-        <p:txBody>
-          <a:bodyPr/>
-          <a:lstStyle/>
-          <a:p>
-            <a:r>
-              <a:rPr lang="en-US" smtClean="0"/>
-              <a:t>Click to edit Master title style</a:t>
-            </a:r>
-            <a:endParaRPr lang="en-US" dirty="0"/>
-          </a:p>
-        </p:txBody>
-      </p:sp>
-      <p:sp>
-        <p:nvSpPr>
-          <p:cNvPr id="3" name="Content Placeholder 2"/>
-          <p:cNvSpPr>
-            <a:spLocks noGrp="1"/>
-          </p:cNvSpPr>
-          <p:nvPr>
-            <p:ph idx="1"/>
-          </p:nvPr>
-        </p:nvSpPr>
-        <p:spPr/>
-        <p:txBody>
-          <a:bodyPr anchor="ctr"/>
-          <a:lstStyle/>
-          <a:p>
-            <a:pPr lvl="0"/>
-            <a:r>
-              <a:rPr lang="en-US" smtClean="0"/>
-              <a:t>Edit Master text styles</a:t>
-            </a:r>
-          </a:p>
-          <a:p>
-            <a:pPr lvl="1"/>
-            <a:r>
-              <a:rPr lang="en-US" smtClean="0"/>
-              <a:t>Second level</a:t>
-            </a:r>
-          </a:p>
-          <a:p>
-            <a:pPr lvl="2"/>
-            <a:r>
-              <a:rPr lang="en-US" smtClean="0"/>
-              <a:t>Third level</a:t>
-            </a:r>
-          </a:p>
-          <a:p>
-            <a:pPr lvl="3"/>
-            <a:r>
-              <a:rPr lang="en-US" smtClean="0"/>
-              <a:t>Fourth level</a:t>
-            </a:r>
-          </a:p>
-          <a:p>
-            <a:pPr lvl="4"/>
-            <a:r>
-              <a:rPr lang="en-US" smtClean="0"/>
-              <a:t>Fifth level</a:t>
-            </a:r>
-            <a:endParaRPr lang="en-US" dirty="0"/>
-          </a:p>
-        </p:txBody>
-      </p:sp>
-      <p:sp>
-        <p:nvSpPr>
-          <p:cNvPr id="4" name="Date Placeholder 3"/>
-          <p:cNvSpPr>
-            <a:spLocks noGrp="1"/>
-          </p:cNvSpPr>
-          <p:nvPr>
-            <p:ph type="dt" sz="half" idx="10"/>
-          </p:nvPr>
-        </p:nvSpPr>
-        <p:spPr/>
-        <p:txBody>
-          <a:bodyPr/>
-          <a:lstStyle/>
-          <a:p>
-            <a:fld id="{3BAFBFA7-D99C-48B3-949C-321455B324FB}" type="datetimeFigureOut">
-              <a:rPr lang="en-IN" smtClean="0"/>
-              <a:t>19-11-2025</a:t>
-            </a:fld>
-            <a:endParaRPr lang="en-IN"/>
-          </a:p>
-        </p:txBody>
-      </p:sp>
-      <p:sp>
-        <p:nvSpPr>
-          <p:cNvPr id="5" name="Footer Placeholder 4"/>
-          <p:cNvSpPr>
-            <a:spLocks noGrp="1"/>
-          </p:cNvSpPr>
-          <p:nvPr>
-            <p:ph type="ftr" sz="quarter" idx="11"/>
-          </p:nvPr>
-        </p:nvSpPr>
-        <p:spPr/>
-        <p:txBody>
-          <a:bodyPr/>
-          <a:lstStyle/>
-          <a:p>
-            <a:endParaRPr lang="en-IN"/>
-          </a:p>
-        </p:txBody>
-      </p:sp>
-      <p:sp>
-        <p:nvSpPr>
-          <p:cNvPr id="6" name="Slide Number Placeholder 5"/>
-          <p:cNvSpPr>
-            <a:spLocks noGrp="1"/>
-          </p:cNvSpPr>
-          <p:nvPr>
-            <p:ph type="sldNum" sz="quarter" idx="12"/>
-          </p:nvPr>
-        </p:nvSpPr>
-        <p:spPr/>
-        <p:txBody>
-          <a:bodyPr/>
-          <a:lstStyle/>
-          <a:p>
-            <a:fld id="{BEDDDFB6-EDB5-402D-8012-908B98D768F7}" type="slidenum">
-              <a:rPr lang="en-IN" smtClean="0"/>
-              <a:t>‹#›</a:t>
-            </a:fld>
-            <a:endParaRPr lang="en-IN"/>
-          </a:p>
-        </p:txBody>
-      </p:sp>
-    </p:spTree>
-    <p:extLst>
-      <p:ext uri="{BB962C8B-B14F-4D97-AF65-F5344CB8AC3E}">
-        <p14:creationId xmlns:p14="http://schemas.microsoft.com/office/powerpoint/2010/main" val="3799306459"/>
-      </p:ext>
-    </p:extLst>
-  </p:cSld>
-  <p:clrMapOvr>
-    <a:masterClrMapping/>
-  </p:clrMapOvr>
-</p:sldLayout>
-</file>
-
-<file path=ppt/slideLayouts/slideLayout3.xml><?xml version="1.0" encoding="utf-8"?>
-<p:sldLayout xmlns:a="http://schemas.openxmlformats.org/drawingml/2006/main" xmlns:r="http://schemas.openxmlformats.org/officeDocument/2006/relationships" xmlns:p="http://schemas.openxmlformats.org/presentationml/2006/main" type="secHead" preserve="1">
-  <p:cSld name="Section Header">
-    <p:spTree>
-      <p:nvGrpSpPr>
-        <p:cNvPr id="1" name=""/>
-        <p:cNvGrpSpPr/>
-        <p:nvPr/>
-      </p:nvGrpSpPr>
-      <p:grpSpPr>
-        <a:xfrm>
-          <a:off x="0" y="0"/>
-          <a:ext cx="0" cy="0"/>
-          <a:chOff x="0" y="0"/>
-          <a:chExt cx="0" cy="0"/>
-        </a:xfrm>
-      </p:grpSpPr>
-      <p:sp>
-        <p:nvSpPr>
-          <p:cNvPr id="2" name="Title 1"/>
-          <p:cNvSpPr>
-            <a:spLocks noGrp="1"/>
-          </p:cNvSpPr>
-          <p:nvPr>
-            <p:ph type="title"/>
-          </p:nvPr>
-        </p:nvSpPr>
-        <p:spPr>
-          <a:xfrm>
-            <a:off x="684211" y="2006600"/>
-            <a:ext cx="8534401" cy="2281600"/>
-          </a:xfrm>
-        </p:spPr>
-        <p:txBody>
-          <a:bodyPr anchor="b">
-            <a:normAutofit/>
-          </a:bodyPr>
-          <a:lstStyle>
-            <a:lvl1pPr algn="l">
-              <a:defRPr sz="3600" b="0" cap="all"/>
-            </a:lvl1pPr>
-          </a:lstStyle>
-          <a:p>
-            <a:r>
-              <a:rPr lang="en-US" smtClean="0"/>
-              <a:t>Click to edit Master title style</a:t>
-            </a:r>
-            <a:endParaRPr lang="en-US" dirty="0"/>
-          </a:p>
-        </p:txBody>
-      </p:sp>
-      <p:sp>
-        <p:nvSpPr>
-          <p:cNvPr id="3" name="Text Placeholder 2"/>
-          <p:cNvSpPr>
-            <a:spLocks noGrp="1"/>
-          </p:cNvSpPr>
-          <p:nvPr>
-            <p:ph type="body" idx="1"/>
-          </p:nvPr>
-        </p:nvSpPr>
-        <p:spPr>
-          <a:xfrm>
-            <a:off x="684213" y="4495800"/>
-            <a:ext cx="8534400" cy="1498600"/>
-          </a:xfrm>
-        </p:spPr>
-        <p:txBody>
-          <a:bodyPr anchor="t">
-            <a:normAutofit/>
-          </a:bodyPr>
-          <a:lstStyle>
-            <a:lvl1pPr marL="0" indent="0" algn="l">
-              <a:buNone/>
-              <a:defRPr sz="1800">
-                <a:solidFill>
-                  <a:schemeClr val="bg2">
-                    <a:lumMod val="75000"/>
-                  </a:schemeClr>
-                </a:solidFill>
-              </a:defRPr>
-            </a:lvl1pPr>
-            <a:lvl2pPr marL="457200" indent="0">
-              <a:buNone/>
-              <a:defRPr sz="1800">
-                <a:solidFill>
-                  <a:schemeClr val="tx1">
-                    <a:tint val="75000"/>
-                  </a:schemeClr>
-                </a:solidFill>
-              </a:defRPr>
-            </a:lvl2pPr>
-            <a:lvl3pPr marL="914400" indent="0">
-              <a:buNone/>
-              <a:defRPr sz="1600">
-                <a:solidFill>
-                  <a:schemeClr val="tx1">
-                    <a:tint val="75000"/>
-                  </a:schemeClr>
-                </a:solidFill>
-              </a:defRPr>
-            </a:lvl3pPr>
-            <a:lvl4pPr marL="1371600" indent="0">
-              <a:buNone/>
-              <a:defRPr sz="1400">
-                <a:solidFill>
-                  <a:schemeClr val="tx1">
-                    <a:tint val="75000"/>
-                  </a:schemeClr>
-                </a:solidFill>
-              </a:defRPr>
-            </a:lvl4pPr>
-            <a:lvl5pPr marL="1828800" indent="0">
-              <a:buNone/>
-              <a:defRPr sz="1400">
-                <a:solidFill>
-                  <a:schemeClr val="tx1">
-                    <a:tint val="75000"/>
-                  </a:schemeClr>
-                </a:solidFill>
-              </a:defRPr>
-            </a:lvl5pPr>
-            <a:lvl6pPr marL="2286000" indent="0">
-              <a:buNone/>
-              <a:defRPr sz="1400">
-                <a:solidFill>
-                  <a:schemeClr val="tx1">
-                    <a:tint val="75000"/>
-                  </a:schemeClr>
-                </a:solidFill>
-              </a:defRPr>
-            </a:lvl6pPr>
-            <a:lvl7pPr marL="2743200" indent="0">
-              <a:buNone/>
-              <a:defRPr sz="1400">
-                <a:solidFill>
-                  <a:schemeClr val="tx1">
-                    <a:tint val="75000"/>
-                  </a:schemeClr>
-                </a:solidFill>
-              </a:defRPr>
-            </a:lvl7pPr>
-            <a:lvl8pPr marL="3200400" indent="0">
-              <a:buNone/>
-              <a:defRPr sz="1400">
-                <a:solidFill>
-                  <a:schemeClr val="tx1">
-                    <a:tint val="75000"/>
-                  </a:schemeClr>
-                </a:solidFill>
-              </a:defRPr>
-            </a:lvl8pPr>
-            <a:lvl9pPr marL="3657600" indent="0">
-              <a:buNone/>
-              <a:defRPr sz="1400">
-                <a:solidFill>
-                  <a:schemeClr val="tx1">
-                    <a:tint val="75000"/>
-                  </a:schemeClr>
-                </a:solidFill>
-              </a:defRPr>
-            </a:lvl9pPr>
-          </a:lstStyle>
-          <a:p>
-            <a:pPr lvl="0"/>
-            <a:r>
-              <a:rPr lang="en-US" smtClean="0"/>
-              <a:t>Edit Master text styles</a:t>
-            </a:r>
-          </a:p>
-        </p:txBody>
-      </p:sp>
-      <p:sp>
-        <p:nvSpPr>
-          <p:cNvPr id="4" name="Date Placeholder 3"/>
-          <p:cNvSpPr>
-            <a:spLocks noGrp="1"/>
-          </p:cNvSpPr>
-          <p:nvPr>
-            <p:ph type="dt" sz="half" idx="10"/>
-          </p:nvPr>
-        </p:nvSpPr>
-        <p:spPr/>
-        <p:txBody>
-          <a:bodyPr/>
-          <a:lstStyle/>
-          <a:p>
-            <a:fld id="{3BAFBFA7-D99C-48B3-949C-321455B324FB}" type="datetimeFigureOut">
-              <a:rPr lang="en-IN" smtClean="0"/>
-              <a:t>19-11-2025</a:t>
-            </a:fld>
-            <a:endParaRPr lang="en-IN"/>
-          </a:p>
-        </p:txBody>
-      </p:sp>
-      <p:sp>
-        <p:nvSpPr>
-          <p:cNvPr id="5" name="Footer Placeholder 4"/>
-          <p:cNvSpPr>
-            <a:spLocks noGrp="1"/>
-          </p:cNvSpPr>
-          <p:nvPr>
-            <p:ph type="ftr" sz="quarter" idx="11"/>
-          </p:nvPr>
-        </p:nvSpPr>
-        <p:spPr/>
-        <p:txBody>
-          <a:bodyPr/>
-          <a:lstStyle/>
-          <a:p>
-            <a:endParaRPr lang="en-IN"/>
-          </a:p>
-        </p:txBody>
-      </p:sp>
-      <p:sp>
-        <p:nvSpPr>
-          <p:cNvPr id="6" name="Slide Number Placeholder 5"/>
-          <p:cNvSpPr>
-            <a:spLocks noGrp="1"/>
-          </p:cNvSpPr>
-          <p:nvPr>
-            <p:ph type="sldNum" sz="quarter" idx="12"/>
-          </p:nvPr>
-        </p:nvSpPr>
-        <p:spPr/>
-        <p:txBody>
-          <a:bodyPr/>
-          <a:lstStyle/>
-          <a:p>
-            <a:fld id="{BEDDDFB6-EDB5-402D-8012-908B98D768F7}" type="slidenum">
-              <a:rPr lang="en-IN" smtClean="0"/>
-              <a:t>‹#›</a:t>
-            </a:fld>
-            <a:endParaRPr lang="en-IN"/>
-          </a:p>
-        </p:txBody>
-      </p:sp>
-    </p:spTree>
-    <p:extLst>
-      <p:ext uri="{BB962C8B-B14F-4D97-AF65-F5344CB8AC3E}">
-        <p14:creationId xmlns:p14="http://schemas.microsoft.com/office/powerpoint/2010/main" val="2439245302"/>
+        <p14:creationId xmlns:p14="http://schemas.microsoft.com/office/powerpoint/2010/main" val="2510734166"/>
       </p:ext>
     </p:extLst>
   </p:cSld>
@@ -3179,15 +1331,41 @@
         </p:nvSpPr>
         <p:spPr>
           <a:xfrm>
-            <a:off x="684211" y="685800"/>
-            <a:ext cx="4937655" cy="3615267"/>
+            <a:off x="1261872" y="1828800"/>
+            <a:ext cx="4480560" cy="4351337"/>
           </a:xfrm>
         </p:spPr>
         <p:txBody>
-          <a:bodyPr>
-            <a:normAutofit/>
-          </a:bodyPr>
-          <a:lstStyle/>
+          <a:bodyPr/>
+          <a:lstStyle>
+            <a:lvl1pPr>
+              <a:defRPr sz="1800"/>
+            </a:lvl1pPr>
+            <a:lvl2pPr>
+              <a:defRPr sz="1600"/>
+            </a:lvl2pPr>
+            <a:lvl3pPr>
+              <a:defRPr sz="1400"/>
+            </a:lvl3pPr>
+            <a:lvl4pPr>
+              <a:defRPr sz="1400"/>
+            </a:lvl4pPr>
+            <a:lvl5pPr>
+              <a:defRPr sz="1400"/>
+            </a:lvl5pPr>
+            <a:lvl6pPr>
+              <a:defRPr sz="1400"/>
+            </a:lvl6pPr>
+            <a:lvl7pPr>
+              <a:defRPr sz="1400"/>
+            </a:lvl7pPr>
+            <a:lvl8pPr>
+              <a:defRPr sz="1400"/>
+            </a:lvl8pPr>
+            <a:lvl9pPr>
+              <a:defRPr sz="1400"/>
+            </a:lvl9pPr>
+          </a:lstStyle>
           <a:p>
             <a:pPr lvl="0"/>
             <a:r>
@@ -3238,15 +1416,41 @@
         </p:nvSpPr>
         <p:spPr>
           <a:xfrm>
-            <a:off x="5808133" y="685801"/>
-            <a:ext cx="4934479" cy="3615266"/>
+            <a:off x="6126480" y="1828800"/>
+            <a:ext cx="4480560" cy="4351337"/>
           </a:xfrm>
         </p:spPr>
         <p:txBody>
-          <a:bodyPr>
-            <a:normAutofit/>
-          </a:bodyPr>
-          <a:lstStyle/>
+          <a:bodyPr/>
+          <a:lstStyle>
+            <a:lvl1pPr>
+              <a:defRPr sz="1800"/>
+            </a:lvl1pPr>
+            <a:lvl2pPr>
+              <a:defRPr sz="1600"/>
+            </a:lvl2pPr>
+            <a:lvl3pPr>
+              <a:defRPr sz="1400"/>
+            </a:lvl3pPr>
+            <a:lvl4pPr>
+              <a:defRPr sz="1400"/>
+            </a:lvl4pPr>
+            <a:lvl5pPr>
+              <a:defRPr sz="1400"/>
+            </a:lvl5pPr>
+            <a:lvl6pPr>
+              <a:defRPr sz="1400"/>
+            </a:lvl6pPr>
+            <a:lvl7pPr>
+              <a:defRPr sz="1400"/>
+            </a:lvl7pPr>
+            <a:lvl8pPr>
+              <a:defRPr sz="1400"/>
+            </a:lvl8pPr>
+            <a:lvl9pPr>
+              <a:defRPr sz="1400"/>
+            </a:lvl9pPr>
+          </a:lstStyle>
           <a:p>
             <a:pPr lvl="0"/>
             <a:r>
@@ -3302,7 +1506,7 @@
           <a:p>
             <a:fld id="{3BAFBFA7-D99C-48B3-949C-321455B324FB}" type="datetimeFigureOut">
               <a:rPr lang="en-IN" smtClean="0"/>
-              <a:t>19-11-2025</a:t>
+              <a:t>04-12-2025</a:t>
             </a:fld>
             <a:endParaRPr lang="en-IN"/>
           </a:p>
@@ -3353,7 +1557,7 @@
     </p:spTree>
     <p:extLst>
       <p:ext uri="{BB962C8B-B14F-4D97-AF65-F5344CB8AC3E}">
-        <p14:creationId xmlns:p14="http://schemas.microsoft.com/office/powerpoint/2010/main" val="3216146864"/>
+        <p14:creationId xmlns:p14="http://schemas.microsoft.com/office/powerpoint/2010/main" val="3628174292"/>
       </p:ext>
     </p:extLst>
   </p:cSld>
@@ -3382,7 +1586,7 @@
       </p:grpSpPr>
       <p:sp>
         <p:nvSpPr>
-          <p:cNvPr id="2" name="Title 1"/>
+          <p:cNvPr id="10" name="Title 9"/>
           <p:cNvSpPr>
             <a:spLocks noGrp="1"/>
           </p:cNvSpPr>
@@ -3393,11 +1597,7 @@
         <p:spPr/>
         <p:txBody>
           <a:bodyPr/>
-          <a:lstStyle>
-            <a:lvl1pPr>
-              <a:defRPr/>
-            </a:lvl1pPr>
-          </a:lstStyle>
+          <a:lstStyle/>
           <a:p>
             <a:r>
               <a:rPr lang="en-US" smtClean="0"/>
@@ -3419,20 +1619,25 @@
         </p:nvSpPr>
         <p:spPr>
           <a:xfrm>
-            <a:off x="972080" y="685800"/>
-            <a:ext cx="4649787" cy="576262"/>
+            <a:off x="1261872" y="1717879"/>
+            <a:ext cx="4480560" cy="731520"/>
           </a:xfrm>
         </p:spPr>
         <p:txBody>
           <a:bodyPr anchor="b">
-            <a:noAutofit/>
+            <a:normAutofit/>
           </a:bodyPr>
           <a:lstStyle>
             <a:lvl1pPr marL="0" indent="0">
+              <a:spcBef>
+                <a:spcPts val="0"/>
+              </a:spcBef>
               <a:buNone/>
-              <a:defRPr sz="2800" b="0">
+              <a:defRPr sz="2000" b="0">
                 <a:solidFill>
-                  <a:schemeClr val="tx1"/>
+                  <a:schemeClr val="tx1">
+                    <a:lumMod val="65000"/>
+                  </a:schemeClr>
                 </a:solidFill>
               </a:defRPr>
             </a:lvl1pPr>
@@ -3490,15 +1695,41 @@
         </p:nvSpPr>
         <p:spPr>
           <a:xfrm>
-            <a:off x="684211" y="1270529"/>
-            <a:ext cx="4937655" cy="3030538"/>
+            <a:off x="1261872" y="2507550"/>
+            <a:ext cx="4480560" cy="3664650"/>
           </a:xfrm>
         </p:spPr>
         <p:txBody>
-          <a:bodyPr anchor="t">
-            <a:normAutofit/>
-          </a:bodyPr>
-          <a:lstStyle/>
+          <a:bodyPr/>
+          <a:lstStyle>
+            <a:lvl1pPr>
+              <a:defRPr sz="1800"/>
+            </a:lvl1pPr>
+            <a:lvl2pPr>
+              <a:defRPr sz="1600"/>
+            </a:lvl2pPr>
+            <a:lvl3pPr>
+              <a:defRPr sz="1400"/>
+            </a:lvl3pPr>
+            <a:lvl4pPr>
+              <a:defRPr sz="1400"/>
+            </a:lvl4pPr>
+            <a:lvl5pPr>
+              <a:defRPr sz="1400"/>
+            </a:lvl5pPr>
+            <a:lvl6pPr>
+              <a:defRPr sz="1400"/>
+            </a:lvl6pPr>
+            <a:lvl7pPr>
+              <a:defRPr sz="1400"/>
+            </a:lvl7pPr>
+            <a:lvl8pPr>
+              <a:defRPr sz="1400"/>
+            </a:lvl8pPr>
+            <a:lvl9pPr>
+              <a:defRPr sz="1400"/>
+            </a:lvl9pPr>
+          </a:lstStyle>
           <a:p>
             <a:pPr lvl="0"/>
             <a:r>
@@ -3544,60 +1775,37 @@
             <a:spLocks noGrp="1"/>
           </p:cNvSpPr>
           <p:nvPr>
-            <p:ph type="body" sz="quarter" idx="3"/>
+            <p:ph type="body" sz="quarter" idx="13"/>
           </p:nvPr>
         </p:nvSpPr>
         <p:spPr>
           <a:xfrm>
-            <a:off x="6079066" y="685800"/>
-            <a:ext cx="4665134" cy="576262"/>
+            <a:off x="6126480" y="1717879"/>
+            <a:ext cx="4480560" cy="731520"/>
           </a:xfrm>
         </p:spPr>
         <p:txBody>
           <a:bodyPr anchor="b">
-            <a:noAutofit/>
+            <a:normAutofit/>
           </a:bodyPr>
           <a:lstStyle>
             <a:lvl1pPr marL="0" indent="0">
+              <a:spcBef>
+                <a:spcPts val="0"/>
+              </a:spcBef>
+              <a:buFontTx/>
               <a:buNone/>
-              <a:defRPr sz="2800" b="0">
+              <a:defRPr lang="en-US" sz="2000" b="0" kern="1200" spc="10" baseline="0" dirty="0">
                 <a:solidFill>
-                  <a:schemeClr val="tx1"/>
+                  <a:schemeClr val="tx1">
+                    <a:lumMod val="65000"/>
+                  </a:schemeClr>
                 </a:solidFill>
+                <a:latin typeface="+mn-lt"/>
+                <a:ea typeface="+mn-ea"/>
+                <a:cs typeface="+mn-cs"/>
               </a:defRPr>
             </a:lvl1pPr>
-            <a:lvl2pPr marL="457200" indent="0">
-              <a:buNone/>
-              <a:defRPr sz="2000" b="1"/>
-            </a:lvl2pPr>
-            <a:lvl3pPr marL="914400" indent="0">
-              <a:buNone/>
-              <a:defRPr sz="1800" b="1"/>
-            </a:lvl3pPr>
-            <a:lvl4pPr marL="1371600" indent="0">
-              <a:buNone/>
-              <a:defRPr sz="1600" b="1"/>
-            </a:lvl4pPr>
-            <a:lvl5pPr marL="1828800" indent="0">
-              <a:buNone/>
-              <a:defRPr sz="1600" b="1"/>
-            </a:lvl5pPr>
-            <a:lvl6pPr marL="2286000" indent="0">
-              <a:buNone/>
-              <a:defRPr sz="1600" b="1"/>
-            </a:lvl6pPr>
-            <a:lvl7pPr marL="2743200" indent="0">
-              <a:buNone/>
-              <a:defRPr sz="1600" b="1"/>
-            </a:lvl7pPr>
-            <a:lvl8pPr marL="3200400" indent="0">
-              <a:buNone/>
-              <a:defRPr sz="1600" b="1"/>
-            </a:lvl8pPr>
-            <a:lvl9pPr marL="3657600" indent="0">
-              <a:buNone/>
-              <a:defRPr sz="1600" b="1"/>
-            </a:lvl9pPr>
           </a:lstStyle>
           <a:p>
             <a:pPr lvl="0"/>
@@ -3620,15 +1828,41 @@
         </p:nvSpPr>
         <p:spPr>
           <a:xfrm>
-            <a:off x="5806545" y="1262062"/>
-            <a:ext cx="4929188" cy="3030538"/>
+            <a:off x="6126480" y="2507550"/>
+            <a:ext cx="4480560" cy="3664650"/>
           </a:xfrm>
         </p:spPr>
         <p:txBody>
-          <a:bodyPr anchor="t">
-            <a:normAutofit/>
-          </a:bodyPr>
-          <a:lstStyle/>
+          <a:bodyPr/>
+          <a:lstStyle>
+            <a:lvl1pPr>
+              <a:defRPr sz="1800"/>
+            </a:lvl1pPr>
+            <a:lvl2pPr>
+              <a:defRPr sz="1600"/>
+            </a:lvl2pPr>
+            <a:lvl3pPr>
+              <a:defRPr sz="1400"/>
+            </a:lvl3pPr>
+            <a:lvl4pPr>
+              <a:defRPr sz="1400"/>
+            </a:lvl4pPr>
+            <a:lvl5pPr>
+              <a:defRPr sz="1400"/>
+            </a:lvl5pPr>
+            <a:lvl6pPr>
+              <a:defRPr sz="1400"/>
+            </a:lvl6pPr>
+            <a:lvl7pPr>
+              <a:defRPr sz="1400"/>
+            </a:lvl7pPr>
+            <a:lvl8pPr>
+              <a:defRPr sz="1400"/>
+            </a:lvl8pPr>
+            <a:lvl9pPr>
+              <a:defRPr sz="1400"/>
+            </a:lvl9pPr>
+          </a:lstStyle>
           <a:p>
             <a:pPr lvl="0"/>
             <a:r>
@@ -3684,7 +1918,7 @@
           <a:p>
             <a:fld id="{3BAFBFA7-D99C-48B3-949C-321455B324FB}" type="datetimeFigureOut">
               <a:rPr lang="en-IN" smtClean="0"/>
-              <a:t>19-11-2025</a:t>
+              <a:t>04-12-2025</a:t>
             </a:fld>
             <a:endParaRPr lang="en-IN"/>
           </a:p>
@@ -3735,7 +1969,7 @@
     </p:spTree>
     <p:extLst>
       <p:ext uri="{BB962C8B-B14F-4D97-AF65-F5344CB8AC3E}">
-        <p14:creationId xmlns:p14="http://schemas.microsoft.com/office/powerpoint/2010/main" val="647421993"/>
+        <p14:creationId xmlns:p14="http://schemas.microsoft.com/office/powerpoint/2010/main" val="2810109675"/>
       </p:ext>
     </p:extLst>
   </p:cSld>
@@ -3764,7 +1998,7 @@
       </p:grpSpPr>
       <p:sp>
         <p:nvSpPr>
-          <p:cNvPr id="2" name="Title 1"/>
+          <p:cNvPr id="6" name="Title 5"/>
           <p:cNvSpPr>
             <a:spLocks noGrp="1"/>
           </p:cNvSpPr>
@@ -3802,7 +2036,7 @@
           <a:p>
             <a:fld id="{3BAFBFA7-D99C-48B3-949C-321455B324FB}" type="datetimeFigureOut">
               <a:rPr lang="en-IN" smtClean="0"/>
-              <a:t>19-11-2025</a:t>
+              <a:t>04-12-2025</a:t>
             </a:fld>
             <a:endParaRPr lang="en-IN"/>
           </a:p>
@@ -3853,7 +2087,7 @@
     </p:spTree>
     <p:extLst>
       <p:ext uri="{BB962C8B-B14F-4D97-AF65-F5344CB8AC3E}">
-        <p14:creationId xmlns:p14="http://schemas.microsoft.com/office/powerpoint/2010/main" val="258871731"/>
+        <p14:creationId xmlns:p14="http://schemas.microsoft.com/office/powerpoint/2010/main" val="499699574"/>
       </p:ext>
     </p:extLst>
   </p:cSld>
@@ -3897,7 +2131,7 @@
           <a:p>
             <a:fld id="{3BAFBFA7-D99C-48B3-949C-321455B324FB}" type="datetimeFigureOut">
               <a:rPr lang="en-IN" smtClean="0"/>
-              <a:t>19-11-2025</a:t>
+              <a:t>04-12-2025</a:t>
             </a:fld>
             <a:endParaRPr lang="en-IN"/>
           </a:p>
@@ -3948,7 +2182,7 @@
     </p:spTree>
     <p:extLst>
       <p:ext uri="{BB962C8B-B14F-4D97-AF65-F5344CB8AC3E}">
-        <p14:creationId xmlns:p14="http://schemas.microsoft.com/office/powerpoint/2010/main" val="591596982"/>
+        <p14:creationId xmlns:p14="http://schemas.microsoft.com/office/powerpoint/2010/main" val="4023359036"/>
       </p:ext>
     </p:extLst>
   </p:cSld>
@@ -3987,8 +2221,8 @@
         </p:nvSpPr>
         <p:spPr>
           <a:xfrm>
-            <a:off x="7085012" y="685800"/>
-            <a:ext cx="3657600" cy="1371600"/>
+            <a:off x="841248" y="457200"/>
+            <a:ext cx="3200400" cy="1600197"/>
           </a:xfrm>
         </p:spPr>
         <p:txBody>
@@ -3996,8 +2230,8 @@
             <a:normAutofit/>
           </a:bodyPr>
           <a:lstStyle>
-            <a:lvl1pPr algn="l">
-              <a:defRPr sz="2400" b="0"/>
+            <a:lvl1pPr>
+              <a:defRPr sz="3200" b="0" baseline="0"/>
             </a:lvl1pPr>
           </a:lstStyle>
           <a:p>
@@ -4021,15 +2255,41 @@
         </p:nvSpPr>
         <p:spPr>
           <a:xfrm>
-            <a:off x="684212" y="685800"/>
-            <a:ext cx="5943601" cy="5308600"/>
+            <a:off x="4504267" y="685800"/>
+            <a:ext cx="6079066" cy="5486400"/>
           </a:xfrm>
         </p:spPr>
         <p:txBody>
-          <a:bodyPr anchor="ctr">
-            <a:normAutofit/>
-          </a:bodyPr>
-          <a:lstStyle/>
+          <a:bodyPr/>
+          <a:lstStyle>
+            <a:lvl1pPr>
+              <a:defRPr sz="2000"/>
+            </a:lvl1pPr>
+            <a:lvl2pPr>
+              <a:defRPr sz="1800"/>
+            </a:lvl2pPr>
+            <a:lvl3pPr>
+              <a:defRPr sz="1600"/>
+            </a:lvl3pPr>
+            <a:lvl4pPr>
+              <a:defRPr sz="1400"/>
+            </a:lvl4pPr>
+            <a:lvl5pPr>
+              <a:defRPr sz="1400"/>
+            </a:lvl5pPr>
+            <a:lvl6pPr>
+              <a:defRPr sz="1400"/>
+            </a:lvl6pPr>
+            <a:lvl7pPr>
+              <a:defRPr sz="1400"/>
+            </a:lvl7pPr>
+            <a:lvl8pPr>
+              <a:defRPr sz="1400"/>
+            </a:lvl8pPr>
+            <a:lvl9pPr>
+              <a:defRPr sz="1400"/>
+            </a:lvl9pPr>
+          </a:lstStyle>
           <a:p>
             <a:pPr lvl="0"/>
             <a:r>
@@ -4080,18 +2340,24 @@
         </p:nvSpPr>
         <p:spPr>
           <a:xfrm>
-            <a:off x="7085012" y="2209799"/>
-            <a:ext cx="3657600" cy="2091267"/>
+            <a:off x="841248" y="2099734"/>
+            <a:ext cx="3200400" cy="3810001"/>
           </a:xfrm>
         </p:spPr>
         <p:txBody>
-          <a:bodyPr anchor="t">
+          <a:bodyPr>
             <a:normAutofit/>
           </a:bodyPr>
           <a:lstStyle>
             <a:lvl1pPr marL="0" indent="0">
+              <a:lnSpc>
+                <a:spcPct val="114000"/>
+              </a:lnSpc>
+              <a:spcBef>
+                <a:spcPts val="800"/>
+              </a:spcBef>
               <a:buNone/>
-              <a:defRPr sz="1600"/>
+              <a:defRPr sz="1300"/>
             </a:lvl1pPr>
             <a:lvl2pPr marL="457200" indent="0">
               <a:buNone/>
@@ -4152,7 +2418,7 @@
           <a:p>
             <a:fld id="{3BAFBFA7-D99C-48B3-949C-321455B324FB}" type="datetimeFigureOut">
               <a:rPr lang="en-IN" smtClean="0"/>
-              <a:t>19-11-2025</a:t>
+              <a:t>04-12-2025</a:t>
             </a:fld>
             <a:endParaRPr lang="en-IN"/>
           </a:p>
@@ -4203,7 +2469,7 @@
     </p:spTree>
     <p:extLst>
       <p:ext uri="{BB962C8B-B14F-4D97-AF65-F5344CB8AC3E}">
-        <p14:creationId xmlns:p14="http://schemas.microsoft.com/office/powerpoint/2010/main" val="956073774"/>
+        <p14:creationId xmlns:p14="http://schemas.microsoft.com/office/powerpoint/2010/main" val="2077234353"/>
       </p:ext>
     </p:extLst>
   </p:cSld>
@@ -4242,8 +2508,8 @@
         </p:nvSpPr>
         <p:spPr>
           <a:xfrm>
-            <a:off x="4722812" y="1447800"/>
-            <a:ext cx="6019800" cy="1143000"/>
+            <a:off x="914400" y="5257800"/>
+            <a:ext cx="9982200" cy="914400"/>
           </a:xfrm>
         </p:spPr>
         <p:txBody>
@@ -4251,8 +2517,12 @@
             <a:normAutofit/>
           </a:bodyPr>
           <a:lstStyle>
-            <a:lvl1pPr algn="l">
-              <a:defRPr sz="2800" b="0"/>
+            <a:lvl1pPr>
+              <a:defRPr sz="2800" b="0">
+                <a:solidFill>
+                  <a:schemeClr val="tx1"/>
+                </a:solidFill>
+              </a:defRPr>
             </a:lvl1pPr>
           </a:lstStyle>
           <a:p>
@@ -4266,7 +2536,7 @@
       </p:sp>
       <p:sp>
         <p:nvSpPr>
-          <p:cNvPr id="14" name="Picture Placeholder 2"/>
+          <p:cNvPr id="3" name="Picture Placeholder 2"/>
           <p:cNvSpPr>
             <a:spLocks noGrp="1" noChangeAspect="1"/>
           </p:cNvSpPr>
@@ -4276,70 +2546,48 @@
         </p:nvSpPr>
         <p:spPr>
           <a:xfrm>
-            <a:off x="989012" y="914400"/>
-            <a:ext cx="3280974" cy="4572000"/>
+            <a:off x="0" y="0"/>
+            <a:ext cx="11292840" cy="5128923"/>
           </a:xfrm>
-          <a:prstGeom prst="snip2DiagRect">
-            <a:avLst>
-              <a:gd name="adj1" fmla="val 10815"/>
-              <a:gd name="adj2" fmla="val 0"/>
-            </a:avLst>
-          </a:prstGeom>
-          <a:ln w="15875">
-            <a:solidFill>
-              <a:schemeClr val="tx1">
-                <a:alpha val="40000"/>
-              </a:schemeClr>
-            </a:solidFill>
-          </a:ln>
-          <a:effectLst>
-            <a:innerShdw blurRad="57150" dist="38100" dir="14460000">
-              <a:srgbClr val="000000">
-                <a:alpha val="70000"/>
-              </a:srgbClr>
-            </a:innerShdw>
-          </a:effectLst>
         </p:spPr>
         <p:txBody>
-          <a:bodyPr anchor="t">
-            <a:normAutofit/>
-          </a:bodyPr>
+          <a:bodyPr anchor="t"/>
           <a:lstStyle>
-            <a:lvl1pPr marL="0" indent="0" algn="ctr">
+            <a:lvl1pPr marL="0" indent="0">
               <a:buNone/>
-              <a:defRPr sz="1600"/>
+              <a:defRPr sz="3200"/>
             </a:lvl1pPr>
             <a:lvl2pPr marL="457200" indent="0">
               <a:buNone/>
-              <a:defRPr sz="1600"/>
+              <a:defRPr sz="2800"/>
             </a:lvl2pPr>
             <a:lvl3pPr marL="914400" indent="0">
               <a:buNone/>
-              <a:defRPr sz="1600"/>
+              <a:defRPr sz="2400"/>
             </a:lvl3pPr>
             <a:lvl4pPr marL="1371600" indent="0">
               <a:buNone/>
-              <a:defRPr sz="1600"/>
+              <a:defRPr sz="2000"/>
             </a:lvl4pPr>
             <a:lvl5pPr marL="1828800" indent="0">
               <a:buNone/>
-              <a:defRPr sz="1600"/>
+              <a:defRPr sz="2000"/>
             </a:lvl5pPr>
             <a:lvl6pPr marL="2286000" indent="0">
               <a:buNone/>
-              <a:defRPr sz="1600"/>
+              <a:defRPr sz="2000"/>
             </a:lvl6pPr>
             <a:lvl7pPr marL="2743200" indent="0">
               <a:buNone/>
-              <a:defRPr sz="1600"/>
+              <a:defRPr sz="2000"/>
             </a:lvl7pPr>
             <a:lvl8pPr marL="3200400" indent="0">
               <a:buNone/>
-              <a:defRPr sz="1600"/>
+              <a:defRPr sz="2000"/>
             </a:lvl8pPr>
             <a:lvl9pPr marL="3657600" indent="0">
               <a:buNone/>
-              <a:defRPr sz="1600"/>
+              <a:defRPr sz="2000"/>
             </a:lvl9pPr>
           </a:lstStyle>
           <a:p>
@@ -4363,18 +2611,30 @@
         </p:nvSpPr>
         <p:spPr>
           <a:xfrm>
-            <a:off x="4722812" y="2777066"/>
-            <a:ext cx="6021388" cy="2048933"/>
+            <a:off x="914400" y="6108589"/>
+            <a:ext cx="9982200" cy="597011"/>
           </a:xfrm>
         </p:spPr>
         <p:txBody>
-          <a:bodyPr anchor="t">
+          <a:bodyPr>
             <a:normAutofit/>
           </a:bodyPr>
           <a:lstStyle>
             <a:lvl1pPr marL="0" indent="0">
+              <a:lnSpc>
+                <a:spcPct val="100000"/>
+              </a:lnSpc>
+              <a:spcBef>
+                <a:spcPts val="800"/>
+              </a:spcBef>
               <a:buNone/>
-              <a:defRPr sz="1800"/>
+              <a:defRPr sz="1300">
+                <a:solidFill>
+                  <a:schemeClr val="tx1">
+                    <a:lumMod val="75000"/>
+                  </a:schemeClr>
+                </a:solidFill>
+              </a:defRPr>
             </a:lvl1pPr>
             <a:lvl2pPr marL="457200" indent="0">
               <a:buNone/>
@@ -4435,7 +2695,7 @@
           <a:p>
             <a:fld id="{3BAFBFA7-D99C-48B3-949C-321455B324FB}" type="datetimeFigureOut">
               <a:rPr lang="en-IN" smtClean="0"/>
-              <a:t>19-11-2025</a:t>
+              <a:t>04-12-2025</a:t>
             </a:fld>
             <a:endParaRPr lang="en-IN"/>
           </a:p>
@@ -4486,7 +2746,7 @@
     </p:spTree>
     <p:extLst>
       <p:ext uri="{BB962C8B-B14F-4D97-AF65-F5344CB8AC3E}">
-        <p14:creationId xmlns:p14="http://schemas.microsoft.com/office/powerpoint/2010/main" val="2984505073"/>
+        <p14:creationId xmlns:p14="http://schemas.microsoft.com/office/powerpoint/2010/main" val="913914676"/>
       </p:ext>
     </p:extLst>
   </p:cSld>
@@ -4500,8 +2760,8 @@
 <p:sldMaster xmlns:a="http://schemas.openxmlformats.org/drawingml/2006/main" xmlns:r="http://schemas.openxmlformats.org/officeDocument/2006/relationships" xmlns:p="http://schemas.openxmlformats.org/presentationml/2006/main">
   <p:cSld>
     <p:bg>
-      <p:bgRef idx="1002">
-        <a:schemeClr val="bg2"/>
+      <p:bgRef idx="1001">
+        <a:schemeClr val="bg1"/>
       </p:bgRef>
     </p:bg>
     <p:spTree>
@@ -4518,196 +2778,44 @@
           <a:chExt cx="0" cy="0"/>
         </a:xfrm>
       </p:grpSpPr>
-      <p:grpSp>
-        <p:nvGrpSpPr>
-          <p:cNvPr id="7" name="Group 6"/>
-          <p:cNvGrpSpPr/>
+      <p:sp>
+        <p:nvSpPr>
+          <p:cNvPr id="7" name="Rectangle 6"/>
+          <p:cNvSpPr/>
           <p:nvPr/>
-        </p:nvGrpSpPr>
-        <p:grpSpPr>
+        </p:nvSpPr>
+        <p:spPr>
           <a:xfrm>
-            <a:off x="9206969" y="2963333"/>
-            <a:ext cx="2981858" cy="3208867"/>
-            <a:chOff x="9206969" y="2963333"/>
-            <a:chExt cx="2981858" cy="3208867"/>
+            <a:off x="11292840" y="0"/>
+            <a:ext cx="914400" cy="6858000"/>
           </a:xfrm>
-        </p:grpSpPr>
-        <p:cxnSp>
-          <p:nvCxnSpPr>
-            <p:cNvPr id="8" name="Straight Connector 7"/>
-            <p:cNvCxnSpPr/>
-            <p:nvPr/>
-          </p:nvCxnSpPr>
-          <p:spPr>
-            <a:xfrm flipH="1">
-              <a:off x="11276012" y="2963333"/>
-              <a:ext cx="912814" cy="912812"/>
-            </a:xfrm>
-            <a:prstGeom prst="line">
-              <a:avLst/>
-            </a:prstGeom>
-            <a:ln w="9525">
-              <a:solidFill>
-                <a:schemeClr val="tx1"/>
-              </a:solidFill>
-            </a:ln>
-          </p:spPr>
-          <p:style>
-            <a:lnRef idx="2">
-              <a:schemeClr val="accent1"/>
-            </a:lnRef>
-            <a:fillRef idx="0">
-              <a:schemeClr val="accent1"/>
-            </a:fillRef>
-            <a:effectRef idx="1">
-              <a:schemeClr val="accent1"/>
-            </a:effectRef>
-            <a:fontRef idx="minor">
-              <a:schemeClr val="tx1"/>
-            </a:fontRef>
-          </p:style>
-        </p:cxnSp>
-        <p:cxnSp>
-          <p:nvCxnSpPr>
-            <p:cNvPr id="9" name="Straight Connector 8"/>
-            <p:cNvCxnSpPr/>
-            <p:nvPr/>
-          </p:nvCxnSpPr>
-          <p:spPr>
-            <a:xfrm flipH="1">
-              <a:off x="9206969" y="3190344"/>
-              <a:ext cx="2981857" cy="2981856"/>
-            </a:xfrm>
-            <a:prstGeom prst="line">
-              <a:avLst/>
-            </a:prstGeom>
-            <a:ln w="9525">
-              <a:solidFill>
-                <a:schemeClr val="tx1"/>
-              </a:solidFill>
-            </a:ln>
-          </p:spPr>
-          <p:style>
-            <a:lnRef idx="2">
-              <a:schemeClr val="accent1"/>
-            </a:lnRef>
-            <a:fillRef idx="0">
-              <a:schemeClr val="accent1"/>
-            </a:fillRef>
-            <a:effectRef idx="1">
-              <a:schemeClr val="accent1"/>
-            </a:effectRef>
-            <a:fontRef idx="minor">
-              <a:schemeClr val="tx1"/>
-            </a:fontRef>
-          </p:style>
-        </p:cxnSp>
-        <p:cxnSp>
-          <p:nvCxnSpPr>
-            <p:cNvPr id="10" name="Straight Connector 9"/>
-            <p:cNvCxnSpPr/>
-            <p:nvPr/>
-          </p:nvCxnSpPr>
-          <p:spPr>
-            <a:xfrm flipH="1">
-              <a:off x="10292292" y="3285067"/>
-              <a:ext cx="1896534" cy="1896533"/>
-            </a:xfrm>
-            <a:prstGeom prst="line">
-              <a:avLst/>
-            </a:prstGeom>
-            <a:ln w="9525">
-              <a:solidFill>
-                <a:schemeClr val="tx1"/>
-              </a:solidFill>
-            </a:ln>
-          </p:spPr>
-          <p:style>
-            <a:lnRef idx="2">
-              <a:schemeClr val="accent1"/>
-            </a:lnRef>
-            <a:fillRef idx="0">
-              <a:schemeClr val="accent1"/>
-            </a:fillRef>
-            <a:effectRef idx="1">
-              <a:schemeClr val="accent1"/>
-            </a:effectRef>
-            <a:fontRef idx="minor">
-              <a:schemeClr val="tx1"/>
-            </a:fontRef>
-          </p:style>
-        </p:cxnSp>
-        <p:cxnSp>
-          <p:nvCxnSpPr>
-            <p:cNvPr id="11" name="Straight Connector 10"/>
-            <p:cNvCxnSpPr/>
-            <p:nvPr/>
-          </p:nvCxnSpPr>
-          <p:spPr>
-            <a:xfrm flipH="1">
-              <a:off x="10443103" y="3131080"/>
-              <a:ext cx="1745722" cy="1745720"/>
-            </a:xfrm>
-            <a:prstGeom prst="line">
-              <a:avLst/>
-            </a:prstGeom>
-            <a:ln w="28575">
-              <a:solidFill>
-                <a:schemeClr val="tx1"/>
-              </a:solidFill>
-            </a:ln>
-          </p:spPr>
-          <p:style>
-            <a:lnRef idx="2">
-              <a:schemeClr val="accent1"/>
-            </a:lnRef>
-            <a:fillRef idx="0">
-              <a:schemeClr val="accent1"/>
-            </a:fillRef>
-            <a:effectRef idx="1">
-              <a:schemeClr val="accent1"/>
-            </a:effectRef>
-            <a:fontRef idx="minor">
-              <a:schemeClr val="tx1"/>
-            </a:fontRef>
-          </p:style>
-        </p:cxnSp>
-        <p:cxnSp>
-          <p:nvCxnSpPr>
-            <p:cNvPr id="12" name="Straight Connector 11"/>
-            <p:cNvCxnSpPr/>
-            <p:nvPr/>
-          </p:nvCxnSpPr>
-          <p:spPr>
-            <a:xfrm flipH="1">
-              <a:off x="10918826" y="3683001"/>
-              <a:ext cx="1270001" cy="1269999"/>
-            </a:xfrm>
-            <a:prstGeom prst="line">
-              <a:avLst/>
-            </a:prstGeom>
-            <a:ln w="28575">
-              <a:solidFill>
-                <a:schemeClr val="tx1"/>
-              </a:solidFill>
-            </a:ln>
-          </p:spPr>
-          <p:style>
-            <a:lnRef idx="2">
-              <a:schemeClr val="accent1"/>
-            </a:lnRef>
-            <a:fillRef idx="0">
-              <a:schemeClr val="accent1"/>
-            </a:fillRef>
-            <a:effectRef idx="1">
-              <a:schemeClr val="accent1"/>
-            </a:effectRef>
-            <a:fontRef idx="minor">
-              <a:schemeClr val="tx1"/>
-            </a:fontRef>
-          </p:style>
-        </p:cxnSp>
-      </p:grpSp>
+          <a:prstGeom prst="rect">
+            <a:avLst/>
+          </a:prstGeom>
+          <a:solidFill>
+            <a:srgbClr val="303030"/>
+          </a:solidFill>
+          <a:ln>
+            <a:noFill/>
+          </a:ln>
+        </p:spPr>
+        <p:style>
+          <a:lnRef idx="2">
+            <a:schemeClr val="accent1">
+              <a:shade val="50000"/>
+            </a:schemeClr>
+          </a:lnRef>
+          <a:fillRef idx="1">
+            <a:schemeClr val="accent1"/>
+          </a:fillRef>
+          <a:effectRef idx="0">
+            <a:schemeClr val="accent1"/>
+          </a:effectRef>
+          <a:fontRef idx="minor">
+            <a:schemeClr val="lt1"/>
+          </a:fontRef>
+        </p:style>
+      </p:sp>
       <p:sp>
         <p:nvSpPr>
           <p:cNvPr id="2" name="Title Placeholder 1"/>
@@ -4720,16 +2828,15 @@
         </p:nvSpPr>
         <p:spPr>
           <a:xfrm>
-            <a:off x="684212" y="4487332"/>
-            <a:ext cx="8534400" cy="1507067"/>
+            <a:off x="1261872" y="365760"/>
+            <a:ext cx="9692640" cy="1325562"/>
           </a:xfrm>
           <a:prstGeom prst="rect">
             <a:avLst/>
           </a:prstGeom>
-          <a:effectLst/>
         </p:spPr>
         <p:txBody>
-          <a:bodyPr vert="horz" lIns="91440" tIns="45720" rIns="91440" bIns="45720" rtlCol="0" anchor="ctr">
+          <a:bodyPr vert="horz" lIns="91440" tIns="45720" rIns="91440" bIns="45720" rtlCol="0" anchor="b">
             <a:normAutofit/>
           </a:bodyPr>
           <a:lstStyle/>
@@ -4754,15 +2861,15 @@
         </p:nvSpPr>
         <p:spPr>
           <a:xfrm>
-            <a:off x="684212" y="685800"/>
-            <a:ext cx="8534400" cy="3615267"/>
+            <a:off x="1261872" y="1828800"/>
+            <a:ext cx="8595360" cy="4351337"/>
           </a:xfrm>
           <a:prstGeom prst="rect">
             <a:avLst/>
           </a:prstGeom>
         </p:spPr>
         <p:txBody>
-          <a:bodyPr vert="horz" lIns="91440" tIns="45720" rIns="91440" bIns="45720" rtlCol="0" anchor="ctr">
+          <a:bodyPr vert="horz" lIns="91440" tIns="45720" rIns="91440" bIns="45720" rtlCol="0">
             <a:normAutofit/>
           </a:bodyPr>
           <a:lstStyle/>
@@ -4815,33 +2922,31 @@
           </p:nvPr>
         </p:nvSpPr>
         <p:spPr>
-          <a:xfrm>
-            <a:off x="9904412" y="6172200"/>
-            <a:ext cx="1600200" cy="365125"/>
+          <a:xfrm rot="16200000">
+            <a:off x="10797542" y="998537"/>
+            <a:ext cx="1904999" cy="365125"/>
           </a:xfrm>
           <a:prstGeom prst="rect">
             <a:avLst/>
           </a:prstGeom>
         </p:spPr>
         <p:txBody>
-          <a:bodyPr vert="horz" lIns="91440" tIns="45720" rIns="91440" bIns="45720" rtlCol="0" anchor="t"/>
+          <a:bodyPr vert="horz" lIns="91440" tIns="45720" rIns="91440" bIns="45720" rtlCol="0" anchor="ctr"/>
           <a:lstStyle>
             <a:lvl1pPr algn="r">
-              <a:defRPr sz="1000" b="0" i="0">
+              <a:defRPr sz="1050" b="0">
                 <a:solidFill>
-                  <a:schemeClr val="bg2">
+                  <a:schemeClr val="tx1">
                     <a:lumMod val="50000"/>
                   </a:schemeClr>
                 </a:solidFill>
-                <a:effectLst/>
-                <a:latin typeface="+mn-lt"/>
               </a:defRPr>
             </a:lvl1pPr>
           </a:lstStyle>
           <a:p>
             <a:fld id="{3BAFBFA7-D99C-48B3-949C-321455B324FB}" type="datetimeFigureOut">
               <a:rPr lang="en-IN" smtClean="0"/>
-              <a:t>19-11-2025</a:t>
+              <a:t>04-12-2025</a:t>
             </a:fld>
             <a:endParaRPr lang="en-IN"/>
           </a:p>
@@ -4858,26 +2963,22 @@
           </p:nvPr>
         </p:nvSpPr>
         <p:spPr>
-          <a:xfrm>
-            <a:off x="684212" y="6172200"/>
-            <a:ext cx="7543800" cy="365125"/>
+          <a:xfrm rot="16200000">
+            <a:off x="9959341" y="4046537"/>
+            <a:ext cx="3581400" cy="365125"/>
           </a:xfrm>
           <a:prstGeom prst="rect">
             <a:avLst/>
           </a:prstGeom>
         </p:spPr>
         <p:txBody>
-          <a:bodyPr vert="horz" lIns="91440" tIns="45720" rIns="91440" bIns="45720" rtlCol="0" anchor="t"/>
+          <a:bodyPr vert="horz" lIns="91440" tIns="45720" rIns="91440" bIns="45720" rtlCol="0" anchor="ctr"/>
           <a:lstStyle>
             <a:lvl1pPr algn="l">
-              <a:defRPr sz="1000" b="0" i="0">
+              <a:defRPr sz="1050">
                 <a:solidFill>
-                  <a:schemeClr val="bg2">
-                    <a:lumMod val="50000"/>
-                  </a:schemeClr>
+                  <a:srgbClr val="969696"/>
                 </a:solidFill>
-                <a:effectLst/>
-                <a:latin typeface="+mn-lt"/>
               </a:defRPr>
             </a:lvl1pPr>
           </a:lstStyle>
@@ -4898,25 +2999,23 @@
         </p:nvSpPr>
         <p:spPr>
           <a:xfrm>
-            <a:off x="10363200" y="5578475"/>
-            <a:ext cx="1142245" cy="669925"/>
+            <a:off x="11292840" y="6172200"/>
+            <a:ext cx="914400" cy="593725"/>
           </a:xfrm>
           <a:prstGeom prst="rect">
             <a:avLst/>
           </a:prstGeom>
         </p:spPr>
         <p:txBody>
-          <a:bodyPr vert="horz" lIns="91440" tIns="45720" rIns="91440" bIns="45720" rtlCol="0" anchor="b"/>
+          <a:bodyPr vert="horz" lIns="45720" tIns="45720" rIns="45720" bIns="45720" rtlCol="0" anchor="ctr">
+            <a:normAutofit/>
+          </a:bodyPr>
           <a:lstStyle>
-            <a:lvl1pPr algn="r">
-              <a:defRPr sz="3200" b="0" i="0">
+            <a:lvl1pPr algn="ctr">
+              <a:defRPr sz="3600">
                 <a:solidFill>
-                  <a:schemeClr val="bg2">
-                    <a:lumMod val="50000"/>
-                  </a:schemeClr>
+                  <a:srgbClr val="777777"/>
                 </a:solidFill>
-                <a:effectLst/>
-                <a:latin typeface="+mn-lt"/>
               </a:defRPr>
             </a:lvl1pPr>
           </a:lstStyle>
@@ -4932,328 +3031,281 @@
     </p:spTree>
     <p:extLst>
       <p:ext uri="{BB962C8B-B14F-4D97-AF65-F5344CB8AC3E}">
-        <p14:creationId xmlns:p14="http://schemas.microsoft.com/office/powerpoint/2010/main" val="2630219233"/>
+        <p14:creationId xmlns:p14="http://schemas.microsoft.com/office/powerpoint/2010/main" val="2281440300"/>
       </p:ext>
     </p:extLst>
   </p:cSld>
   <p:clrMap bg1="dk1" tx1="lt1" bg2="dk2" tx2="lt2" accent1="accent1" accent2="accent2" accent3="accent3" accent4="accent4" accent5="accent5" accent6="accent6" hlink="hlink" folHlink="folHlink"/>
   <p:sldLayoutIdLst>
-    <p:sldLayoutId id="2147483661" r:id="rId1"/>
-    <p:sldLayoutId id="2147483662" r:id="rId2"/>
-    <p:sldLayoutId id="2147483663" r:id="rId3"/>
-    <p:sldLayoutId id="2147483664" r:id="rId4"/>
-    <p:sldLayoutId id="2147483665" r:id="rId5"/>
-    <p:sldLayoutId id="2147483666" r:id="rId6"/>
-    <p:sldLayoutId id="2147483667" r:id="rId7"/>
-    <p:sldLayoutId id="2147483668" r:id="rId8"/>
-    <p:sldLayoutId id="2147483669" r:id="rId9"/>
-    <p:sldLayoutId id="2147483670" r:id="rId10"/>
-    <p:sldLayoutId id="2147483671" r:id="rId11"/>
-    <p:sldLayoutId id="2147483672" r:id="rId12"/>
-    <p:sldLayoutId id="2147483673" r:id="rId13"/>
-    <p:sldLayoutId id="2147483674" r:id="rId14"/>
-    <p:sldLayoutId id="2147483675" r:id="rId15"/>
-    <p:sldLayoutId id="2147483676" r:id="rId16"/>
-    <p:sldLayoutId id="2147483677" r:id="rId17"/>
+    <p:sldLayoutId id="2147483775" r:id="rId1"/>
+    <p:sldLayoutId id="2147483776" r:id="rId2"/>
+    <p:sldLayoutId id="2147483777" r:id="rId3"/>
+    <p:sldLayoutId id="2147483778" r:id="rId4"/>
+    <p:sldLayoutId id="2147483779" r:id="rId5"/>
+    <p:sldLayoutId id="2147483780" r:id="rId6"/>
+    <p:sldLayoutId id="2147483781" r:id="rId7"/>
+    <p:sldLayoutId id="2147483782" r:id="rId8"/>
+    <p:sldLayoutId id="2147483783" r:id="rId9"/>
+    <p:sldLayoutId id="2147483784" r:id="rId10"/>
+    <p:sldLayoutId id="2147483785" r:id="rId11"/>
   </p:sldLayoutIdLst>
   <p:txStyles>
     <p:titleStyle>
-      <a:lvl1pPr algn="l" defTabSz="457200" rtl="0" eaLnBrk="1" latinLnBrk="0" hangingPunct="1">
+      <a:lvl1pPr algn="l" defTabSz="914400" rtl="0" eaLnBrk="1" latinLnBrk="0" hangingPunct="1">
+        <a:lnSpc>
+          <a:spcPct val="90000"/>
+        </a:lnSpc>
         <a:spcBef>
           <a:spcPct val="0"/>
         </a:spcBef>
         <a:buNone/>
-        <a:defRPr sz="3600" kern="1200" cap="all">
-          <a:ln w="3175" cmpd="sng">
-            <a:noFill/>
-          </a:ln>
+        <a:defRPr sz="4400" kern="1200" spc="-50" baseline="0">
           <a:solidFill>
             <a:schemeClr val="tx1"/>
           </a:solidFill>
-          <a:effectLst/>
           <a:latin typeface="+mj-lt"/>
           <a:ea typeface="+mj-ea"/>
           <a:cs typeface="+mj-cs"/>
         </a:defRPr>
       </a:lvl1pPr>
-      <a:lvl2pPr eaLnBrk="1" hangingPunct="1">
-        <a:defRPr>
-          <a:solidFill>
-            <a:schemeClr val="tx2"/>
-          </a:solidFill>
-        </a:defRPr>
-      </a:lvl2pPr>
-      <a:lvl3pPr eaLnBrk="1" hangingPunct="1">
-        <a:defRPr>
-          <a:solidFill>
-            <a:schemeClr val="tx2"/>
-          </a:solidFill>
-        </a:defRPr>
-      </a:lvl3pPr>
-      <a:lvl4pPr eaLnBrk="1" hangingPunct="1">
-        <a:defRPr>
-          <a:solidFill>
-            <a:schemeClr val="tx2"/>
-          </a:solidFill>
-        </a:defRPr>
-      </a:lvl4pPr>
-      <a:lvl5pPr eaLnBrk="1" hangingPunct="1">
-        <a:defRPr>
-          <a:solidFill>
-            <a:schemeClr val="tx2"/>
-          </a:solidFill>
-        </a:defRPr>
-      </a:lvl5pPr>
-      <a:lvl6pPr eaLnBrk="1" hangingPunct="1">
-        <a:defRPr>
-          <a:solidFill>
-            <a:schemeClr val="tx2"/>
-          </a:solidFill>
-        </a:defRPr>
-      </a:lvl6pPr>
-      <a:lvl7pPr eaLnBrk="1" hangingPunct="1">
-        <a:defRPr>
-          <a:solidFill>
-            <a:schemeClr val="tx2"/>
-          </a:solidFill>
-        </a:defRPr>
-      </a:lvl7pPr>
-      <a:lvl8pPr eaLnBrk="1" hangingPunct="1">
-        <a:defRPr>
-          <a:solidFill>
-            <a:schemeClr val="tx2"/>
-          </a:solidFill>
-        </a:defRPr>
-      </a:lvl8pPr>
-      <a:lvl9pPr eaLnBrk="1" hangingPunct="1">
-        <a:defRPr>
-          <a:solidFill>
-            <a:schemeClr val="tx2"/>
-          </a:solidFill>
-        </a:defRPr>
-      </a:lvl9pPr>
     </p:titleStyle>
     <p:bodyStyle>
-      <a:lvl1pPr marL="285750" indent="-285750" algn="l" defTabSz="457200" rtl="0" eaLnBrk="1" latinLnBrk="0" hangingPunct="1">
+      <a:lvl1pPr marL="182880" indent="-182880" algn="l" defTabSz="914400" rtl="0" eaLnBrk="1" latinLnBrk="0" hangingPunct="1">
+        <a:lnSpc>
+          <a:spcPct val="95000"/>
+        </a:lnSpc>
         <a:spcBef>
-          <a:spcPct val="20000"/>
+          <a:spcPts val="1400"/>
         </a:spcBef>
         <a:spcAft>
-          <a:spcPts val="600"/>
+          <a:spcPts val="200"/>
         </a:spcAft>
         <a:buClr>
-          <a:schemeClr val="tx1"/>
+          <a:schemeClr val="accent1"/>
         </a:buClr>
         <a:buSzPct val="80000"/>
-        <a:buFont typeface="Wingdings 3" panose="05040102010807070707" pitchFamily="18" charset="2"/>
-        <a:buChar char=""/>
-        <a:defRPr sz="2000" kern="1200" cap="none">
+        <a:buFont typeface="Arial" pitchFamily="34" charset="0"/>
+        <a:buChar char="•"/>
+        <a:defRPr sz="1800" kern="1200" spc="10" baseline="0">
           <a:solidFill>
-            <a:schemeClr val="bg2">
-              <a:lumMod val="75000"/>
-            </a:schemeClr>
+            <a:schemeClr val="tx1"/>
           </a:solidFill>
-          <a:effectLst/>
           <a:latin typeface="+mn-lt"/>
           <a:ea typeface="+mn-ea"/>
           <a:cs typeface="+mn-cs"/>
         </a:defRPr>
       </a:lvl1pPr>
-      <a:lvl2pPr marL="742950" indent="-285750" algn="l" defTabSz="457200" rtl="0" eaLnBrk="1" latinLnBrk="0" hangingPunct="1">
+      <a:lvl2pPr marL="457200" indent="-182880" algn="l" defTabSz="914400" rtl="0" eaLnBrk="1" latinLnBrk="0" hangingPunct="1">
+        <a:lnSpc>
+          <a:spcPct val="90000"/>
+        </a:lnSpc>
         <a:spcBef>
-          <a:spcPct val="20000"/>
+          <a:spcPts val="300"/>
         </a:spcBef>
         <a:spcAft>
-          <a:spcPts val="600"/>
+          <a:spcPts val="300"/>
         </a:spcAft>
         <a:buClr>
-          <a:schemeClr val="tx1"/>
+          <a:schemeClr val="accent1"/>
         </a:buClr>
-        <a:buSzPct val="80000"/>
-        <a:buFont typeface="Wingdings 3" panose="05040102010807070707" pitchFamily="18" charset="2"/>
-        <a:buChar char=""/>
-        <a:defRPr sz="1800" kern="1200" cap="none">
+        <a:buFont typeface="Wingdings 2" pitchFamily="18" charset="2"/>
+        <a:buChar char=""/>
+        <a:defRPr sz="1600" kern="1200">
           <a:solidFill>
-            <a:schemeClr val="bg2">
-              <a:lumMod val="75000"/>
+            <a:schemeClr val="tx1">
+              <a:lumMod val="85000"/>
+              <a:lumOff val="15000"/>
             </a:schemeClr>
           </a:solidFill>
-          <a:effectLst/>
           <a:latin typeface="+mn-lt"/>
           <a:ea typeface="+mn-ea"/>
           <a:cs typeface="+mn-cs"/>
         </a:defRPr>
       </a:lvl2pPr>
-      <a:lvl3pPr marL="1200150" indent="-285750" algn="l" defTabSz="457200" rtl="0" eaLnBrk="1" latinLnBrk="0" hangingPunct="1">
+      <a:lvl3pPr marL="731520" indent="-182880" algn="l" defTabSz="914400" rtl="0" eaLnBrk="1" latinLnBrk="0" hangingPunct="1">
+        <a:lnSpc>
+          <a:spcPct val="90000"/>
+        </a:lnSpc>
         <a:spcBef>
-          <a:spcPct val="20000"/>
+          <a:spcPts val="300"/>
         </a:spcBef>
         <a:spcAft>
-          <a:spcPts val="600"/>
+          <a:spcPts val="300"/>
         </a:spcAft>
         <a:buClr>
-          <a:schemeClr val="tx1"/>
+          <a:schemeClr val="accent1"/>
         </a:buClr>
-        <a:buSzPct val="80000"/>
-        <a:buFont typeface="Wingdings 3" panose="05040102010807070707" pitchFamily="18" charset="2"/>
-        <a:buChar char=""/>
-        <a:defRPr sz="1600" kern="1200" cap="none">
+        <a:buFont typeface="Wingdings 2" pitchFamily="18" charset="2"/>
+        <a:buChar char=""/>
+        <a:defRPr sz="1400" kern="1200">
           <a:solidFill>
-            <a:schemeClr val="bg2">
-              <a:lumMod val="75000"/>
+            <a:schemeClr val="tx1">
+              <a:lumMod val="85000"/>
+              <a:lumOff val="15000"/>
             </a:schemeClr>
           </a:solidFill>
-          <a:effectLst/>
           <a:latin typeface="+mn-lt"/>
           <a:ea typeface="+mn-ea"/>
           <a:cs typeface="+mn-cs"/>
         </a:defRPr>
       </a:lvl3pPr>
-      <a:lvl4pPr marL="1543050" indent="-171450" algn="l" defTabSz="457200" rtl="0" eaLnBrk="1" latinLnBrk="0" hangingPunct="1">
+      <a:lvl4pPr marL="1005840" indent="-182880" algn="l" defTabSz="914400" rtl="0" eaLnBrk="1" latinLnBrk="0" hangingPunct="1">
+        <a:lnSpc>
+          <a:spcPct val="90000"/>
+        </a:lnSpc>
         <a:spcBef>
-          <a:spcPct val="20000"/>
+          <a:spcPts val="300"/>
         </a:spcBef>
         <a:spcAft>
-          <a:spcPts val="600"/>
+          <a:spcPts val="300"/>
         </a:spcAft>
         <a:buClr>
-          <a:schemeClr val="tx1"/>
+          <a:schemeClr val="accent1"/>
         </a:buClr>
-        <a:buSzPct val="80000"/>
-        <a:buFont typeface="Wingdings 3" panose="05040102010807070707" pitchFamily="18" charset="2"/>
-        <a:buChar char=""/>
-        <a:defRPr sz="1400" kern="1200" cap="none">
+        <a:buFont typeface="Wingdings 2" pitchFamily="18" charset="2"/>
+        <a:buChar char=""/>
+        <a:defRPr sz="1400" kern="1200">
           <a:solidFill>
-            <a:schemeClr val="bg2">
-              <a:lumMod val="75000"/>
+            <a:schemeClr val="tx1">
+              <a:lumMod val="85000"/>
+              <a:lumOff val="15000"/>
             </a:schemeClr>
           </a:solidFill>
-          <a:effectLst/>
           <a:latin typeface="+mn-lt"/>
           <a:ea typeface="+mn-ea"/>
           <a:cs typeface="+mn-cs"/>
         </a:defRPr>
       </a:lvl4pPr>
-      <a:lvl5pPr marL="2000250" indent="-171450" algn="l" defTabSz="457200" rtl="0" eaLnBrk="1" latinLnBrk="0" hangingPunct="1">
+      <a:lvl5pPr marL="1280160" indent="-182880" algn="l" defTabSz="914400" rtl="0" eaLnBrk="1" latinLnBrk="0" hangingPunct="1">
+        <a:lnSpc>
+          <a:spcPct val="90000"/>
+        </a:lnSpc>
         <a:spcBef>
-          <a:spcPct val="20000"/>
+          <a:spcPts val="300"/>
         </a:spcBef>
         <a:spcAft>
-          <a:spcPts val="600"/>
+          <a:spcPts val="300"/>
         </a:spcAft>
         <a:buClr>
-          <a:schemeClr val="tx1"/>
+          <a:schemeClr val="accent1"/>
         </a:buClr>
-        <a:buSzPct val="80000"/>
-        <a:buFont typeface="Wingdings 3" panose="05040102010807070707" pitchFamily="18" charset="2"/>
-        <a:buChar char=""/>
-        <a:defRPr sz="1400" kern="1200" cap="none">
+        <a:buFont typeface="Wingdings 2" pitchFamily="18" charset="2"/>
+        <a:buChar char=""/>
+        <a:defRPr sz="1400" kern="1200">
           <a:solidFill>
-            <a:schemeClr val="bg2">
-              <a:lumMod val="75000"/>
+            <a:schemeClr val="tx1">
+              <a:lumMod val="85000"/>
+              <a:lumOff val="15000"/>
             </a:schemeClr>
           </a:solidFill>
-          <a:effectLst/>
           <a:latin typeface="+mn-lt"/>
           <a:ea typeface="+mn-ea"/>
           <a:cs typeface="+mn-cs"/>
         </a:defRPr>
       </a:lvl5pPr>
-      <a:lvl6pPr marL="2514600" indent="-228600" algn="l" defTabSz="457200" rtl="0" eaLnBrk="1" latinLnBrk="0" hangingPunct="1">
+      <a:lvl6pPr marL="1600000" indent="-228600" algn="l" defTabSz="914400" rtl="0" eaLnBrk="1" latinLnBrk="0" hangingPunct="1">
+        <a:lnSpc>
+          <a:spcPct val="90000"/>
+        </a:lnSpc>
         <a:spcBef>
-          <a:spcPct val="20000"/>
+          <a:spcPts val="300"/>
         </a:spcBef>
         <a:spcAft>
-          <a:spcPts val="600"/>
+          <a:spcPts val="300"/>
         </a:spcAft>
         <a:buClr>
-          <a:schemeClr val="tx1"/>
+          <a:schemeClr val="accent1"/>
         </a:buClr>
-        <a:buSzPct val="80000"/>
-        <a:buFont typeface="Wingdings 3" panose="05040102010807070707" pitchFamily="18" charset="2"/>
-        <a:buChar char=""/>
-        <a:defRPr sz="1400" kern="1200" cap="none">
+        <a:buFont typeface="Wingdings 2" pitchFamily="18" charset="2"/>
+        <a:buChar char=""/>
+        <a:defRPr sz="1400" kern="1200">
           <a:solidFill>
-            <a:schemeClr val="bg2">
-              <a:lumMod val="75000"/>
+            <a:schemeClr val="tx1">
+              <a:lumMod val="85000"/>
+              <a:lumOff val="15000"/>
             </a:schemeClr>
           </a:solidFill>
-          <a:effectLst/>
           <a:latin typeface="+mn-lt"/>
           <a:ea typeface="+mn-ea"/>
           <a:cs typeface="+mn-cs"/>
         </a:defRPr>
       </a:lvl6pPr>
-      <a:lvl7pPr marL="2971800" indent="-228600" algn="l" defTabSz="457200" rtl="0" eaLnBrk="1" latinLnBrk="0" hangingPunct="1">
+      <a:lvl7pPr marL="1900000" indent="-228600" algn="l" defTabSz="914400" rtl="0" eaLnBrk="1" latinLnBrk="0" hangingPunct="1">
+        <a:lnSpc>
+          <a:spcPct val="90000"/>
+        </a:lnSpc>
         <a:spcBef>
-          <a:spcPct val="20000"/>
+          <a:spcPts val="300"/>
         </a:spcBef>
         <a:spcAft>
-          <a:spcPts val="600"/>
+          <a:spcPts val="300"/>
         </a:spcAft>
         <a:buClr>
-          <a:schemeClr val="tx1"/>
+          <a:schemeClr val="accent1"/>
         </a:buClr>
-        <a:buSzPct val="80000"/>
-        <a:buFont typeface="Wingdings 3" panose="05040102010807070707" pitchFamily="18" charset="2"/>
-        <a:buChar char=""/>
-        <a:defRPr sz="1400" kern="1200" cap="none">
+        <a:buFont typeface="Wingdings 2" pitchFamily="18" charset="2"/>
+        <a:buChar char=""/>
+        <a:defRPr sz="1400" kern="1200">
           <a:solidFill>
-            <a:schemeClr val="bg2">
-              <a:lumMod val="75000"/>
+            <a:schemeClr val="tx1">
+              <a:lumMod val="85000"/>
+              <a:lumOff val="15000"/>
             </a:schemeClr>
           </a:solidFill>
-          <a:effectLst/>
           <a:latin typeface="+mn-lt"/>
           <a:ea typeface="+mn-ea"/>
           <a:cs typeface="+mn-cs"/>
         </a:defRPr>
       </a:lvl7pPr>
-      <a:lvl8pPr marL="3429000" indent="-228600" algn="l" defTabSz="457200" rtl="0" eaLnBrk="1" latinLnBrk="0" hangingPunct="1">
+      <a:lvl8pPr marL="2200000" indent="-228600" algn="l" defTabSz="914400" rtl="0" eaLnBrk="1" latinLnBrk="0" hangingPunct="1">
+        <a:lnSpc>
+          <a:spcPct val="90000"/>
+        </a:lnSpc>
         <a:spcBef>
-          <a:spcPct val="20000"/>
+          <a:spcPts val="300"/>
         </a:spcBef>
         <a:spcAft>
-          <a:spcPts val="600"/>
+          <a:spcPts val="300"/>
         </a:spcAft>
         <a:buClr>
-          <a:schemeClr val="tx1"/>
+          <a:schemeClr val="accent1"/>
         </a:buClr>
-        <a:buSzPct val="80000"/>
-        <a:buFont typeface="Wingdings 3" panose="05040102010807070707" pitchFamily="18" charset="2"/>
-        <a:buChar char=""/>
-        <a:defRPr sz="1400" kern="1200" cap="none">
+        <a:buFont typeface="Wingdings 2" pitchFamily="18" charset="2"/>
+        <a:buChar char=""/>
+        <a:defRPr sz="1400" kern="1200">
           <a:solidFill>
-            <a:schemeClr val="bg2">
-              <a:lumMod val="75000"/>
+            <a:schemeClr val="tx1">
+              <a:lumMod val="85000"/>
+              <a:lumOff val="15000"/>
             </a:schemeClr>
           </a:solidFill>
-          <a:effectLst/>
           <a:latin typeface="+mn-lt"/>
           <a:ea typeface="+mn-ea"/>
           <a:cs typeface="+mn-cs"/>
         </a:defRPr>
       </a:lvl8pPr>
-      <a:lvl9pPr marL="3886200" indent="-228600" algn="l" defTabSz="457200" rtl="0" eaLnBrk="1" latinLnBrk="0" hangingPunct="1">
+      <a:lvl9pPr marL="2500000" indent="-228600" algn="l" defTabSz="914400" rtl="0" eaLnBrk="1" latinLnBrk="0" hangingPunct="1">
+        <a:lnSpc>
+          <a:spcPct val="90000"/>
+        </a:lnSpc>
         <a:spcBef>
-          <a:spcPct val="20000"/>
+          <a:spcPts val="300"/>
         </a:spcBef>
         <a:spcAft>
-          <a:spcPts val="600"/>
+          <a:spcPts val="300"/>
         </a:spcAft>
         <a:buClr>
-          <a:schemeClr val="tx1"/>
+          <a:schemeClr val="accent1"/>
         </a:buClr>
-        <a:buSzPct val="80000"/>
-        <a:buFont typeface="Wingdings 3" panose="05040102010807070707" pitchFamily="18" charset="2"/>
-        <a:buChar char=""/>
-        <a:defRPr sz="1400" kern="1200" cap="none">
+        <a:buFont typeface="Wingdings 2" pitchFamily="18" charset="2"/>
+        <a:buChar char=""/>
+        <a:defRPr sz="1400" kern="1200">
           <a:solidFill>
-            <a:schemeClr val="bg2">
-              <a:lumMod val="75000"/>
+            <a:schemeClr val="tx1">
+              <a:lumMod val="85000"/>
+              <a:lumOff val="15000"/>
             </a:schemeClr>
           </a:solidFill>
-          <a:effectLst/>
           <a:latin typeface="+mn-lt"/>
           <a:ea typeface="+mn-ea"/>
           <a:cs typeface="+mn-cs"/>
@@ -5264,7 +3316,7 @@
       <a:defPPr>
         <a:defRPr lang="en-US"/>
       </a:defPPr>
-      <a:lvl1pPr marL="0" algn="l" defTabSz="457200" rtl="0" eaLnBrk="1" latinLnBrk="0" hangingPunct="1">
+      <a:lvl1pPr marL="0" algn="l" defTabSz="914400" rtl="0" eaLnBrk="1" latinLnBrk="0" hangingPunct="1">
         <a:defRPr sz="1800" kern="1200">
           <a:solidFill>
             <a:schemeClr val="tx1"/>
@@ -5274,7 +3326,7 @@
           <a:cs typeface="+mn-cs"/>
         </a:defRPr>
       </a:lvl1pPr>
-      <a:lvl2pPr marL="457200" algn="l" defTabSz="457200" rtl="0" eaLnBrk="1" latinLnBrk="0" hangingPunct="1">
+      <a:lvl2pPr marL="457200" algn="l" defTabSz="914400" rtl="0" eaLnBrk="1" latinLnBrk="0" hangingPunct="1">
         <a:defRPr sz="1800" kern="1200">
           <a:solidFill>
             <a:schemeClr val="tx1"/>
@@ -5284,7 +3336,7 @@
           <a:cs typeface="+mn-cs"/>
         </a:defRPr>
       </a:lvl2pPr>
-      <a:lvl3pPr marL="914400" algn="l" defTabSz="457200" rtl="0" eaLnBrk="1" latinLnBrk="0" hangingPunct="1">
+      <a:lvl3pPr marL="914400" algn="l" defTabSz="914400" rtl="0" eaLnBrk="1" latinLnBrk="0" hangingPunct="1">
         <a:defRPr sz="1800" kern="1200">
           <a:solidFill>
             <a:schemeClr val="tx1"/>
@@ -5294,7 +3346,7 @@
           <a:cs typeface="+mn-cs"/>
         </a:defRPr>
       </a:lvl3pPr>
-      <a:lvl4pPr marL="1371600" algn="l" defTabSz="457200" rtl="0" eaLnBrk="1" latinLnBrk="0" hangingPunct="1">
+      <a:lvl4pPr marL="1371600" algn="l" defTabSz="914400" rtl="0" eaLnBrk="1" latinLnBrk="0" hangingPunct="1">
         <a:defRPr sz="1800" kern="1200">
           <a:solidFill>
             <a:schemeClr val="tx1"/>
@@ -5304,7 +3356,7 @@
           <a:cs typeface="+mn-cs"/>
         </a:defRPr>
       </a:lvl4pPr>
-      <a:lvl5pPr marL="1828800" algn="l" defTabSz="457200" rtl="0" eaLnBrk="1" latinLnBrk="0" hangingPunct="1">
+      <a:lvl5pPr marL="1828800" algn="l" defTabSz="914400" rtl="0" eaLnBrk="1" latinLnBrk="0" hangingPunct="1">
         <a:defRPr sz="1800" kern="1200">
           <a:solidFill>
             <a:schemeClr val="tx1"/>
@@ -5314,7 +3366,7 @@
           <a:cs typeface="+mn-cs"/>
         </a:defRPr>
       </a:lvl5pPr>
-      <a:lvl6pPr marL="2286000" algn="l" defTabSz="457200" rtl="0" eaLnBrk="1" latinLnBrk="0" hangingPunct="1">
+      <a:lvl6pPr marL="2286000" algn="l" defTabSz="914400" rtl="0" eaLnBrk="1" latinLnBrk="0" hangingPunct="1">
         <a:defRPr sz="1800" kern="1200">
           <a:solidFill>
             <a:schemeClr val="tx1"/>
@@ -5324,7 +3376,7 @@
           <a:cs typeface="+mn-cs"/>
         </a:defRPr>
       </a:lvl6pPr>
-      <a:lvl7pPr marL="2743200" algn="l" defTabSz="457200" rtl="0" eaLnBrk="1" latinLnBrk="0" hangingPunct="1">
+      <a:lvl7pPr marL="2743200" algn="l" defTabSz="914400" rtl="0" eaLnBrk="1" latinLnBrk="0" hangingPunct="1">
         <a:defRPr sz="1800" kern="1200">
           <a:solidFill>
             <a:schemeClr val="tx1"/>
@@ -5334,7 +3386,7 @@
           <a:cs typeface="+mn-cs"/>
         </a:defRPr>
       </a:lvl7pPr>
-      <a:lvl8pPr marL="3200400" algn="l" defTabSz="457200" rtl="0" eaLnBrk="1" latinLnBrk="0" hangingPunct="1">
+      <a:lvl8pPr marL="3200400" algn="l" defTabSz="914400" rtl="0" eaLnBrk="1" latinLnBrk="0" hangingPunct="1">
         <a:defRPr sz="1800" kern="1200">
           <a:solidFill>
             <a:schemeClr val="tx1"/>
@@ -5344,7 +3396,7 @@
           <a:cs typeface="+mn-cs"/>
         </a:defRPr>
       </a:lvl8pPr>
-      <a:lvl9pPr marL="3657600" algn="l" defTabSz="457200" rtl="0" eaLnBrk="1" latinLnBrk="0" hangingPunct="1">
+      <a:lvl9pPr marL="3657600" algn="l" defTabSz="914400" rtl="0" eaLnBrk="1" latinLnBrk="0" hangingPunct="1">
         <a:defRPr sz="1800" kern="1200">
           <a:solidFill>
             <a:schemeClr val="tx1"/>
@@ -5394,7 +3446,7 @@
         </p:spPr>
         <p:txBody>
           <a:bodyPr>
-            <a:normAutofit/>
+            <a:normAutofit fontScale="90000"/>
           </a:bodyPr>
           <a:lstStyle/>
           <a:p>
@@ -5422,7 +3474,7 @@
             </a:br>
             <a:r>
               <a:rPr lang="en-IN" dirty="0" smtClean="0"/>
-              <a:t>Milestone - 1</a:t>
+              <a:t>Milestone - 2</a:t>
             </a:r>
             <a:endParaRPr lang="en-IN" dirty="0"/>
           </a:p>
@@ -5440,17 +3492,32 @@
         </p:nvSpPr>
         <p:spPr>
           <a:xfrm>
-            <a:off x="1585546" y="4305422"/>
-            <a:ext cx="3631224" cy="1655762"/>
+            <a:off x="1585545" y="4305422"/>
+            <a:ext cx="5360377" cy="1655762"/>
           </a:xfrm>
         </p:spPr>
         <p:txBody>
-          <a:bodyPr/>
+          <a:bodyPr>
+            <a:normAutofit/>
+          </a:bodyPr>
           <a:lstStyle/>
           <a:p>
             <a:r>
               <a:rPr lang="en-US" dirty="0" smtClean="0"/>
               <a:t> - By Jampana Rahul Varma</a:t>
+            </a:r>
+          </a:p>
+          <a:p>
+            <a:endParaRPr lang="en-US" dirty="0"/>
+          </a:p>
+          <a:p>
+            <a:r>
+              <a:rPr lang="en-US" dirty="0" smtClean="0"/>
+              <a:t>Instructor – Shakti </a:t>
+            </a:r>
+            <a:r>
+              <a:rPr lang="en-US" dirty="0" err="1" smtClean="0"/>
+              <a:t>gopalakrishnan</a:t>
             </a:r>
             <a:endParaRPr lang="en-IN" dirty="0"/>
           </a:p>
@@ -6540,8 +4607,8 @@
         </p:nvSpPr>
         <p:spPr>
           <a:xfrm>
-            <a:off x="615460" y="1512277"/>
-            <a:ext cx="11403623" cy="3539430"/>
+            <a:off x="685798" y="1169377"/>
+            <a:ext cx="11403623" cy="4370427"/>
           </a:xfrm>
           <a:prstGeom prst="rect">
             <a:avLst/>
@@ -6602,6 +4669,17 @@
             </a:r>
           </a:p>
           <a:p>
+            <a:pPr marL="285750" indent="-285750">
+              <a:buFont typeface="Arial" panose="020B0604020202020204" pitchFamily="34" charset="0"/>
+              <a:buChar char="•"/>
+            </a:pPr>
+            <a:r>
+              <a:rPr lang="en-US" dirty="0" smtClean="0"/>
+              <a:t>Python</a:t>
+            </a:r>
+            <a:endParaRPr lang="en-IN" dirty="0" smtClean="0"/>
+          </a:p>
+          <a:p>
             <a:endParaRPr lang="en-US" dirty="0"/>
           </a:p>
           <a:p>
@@ -6643,6 +4721,32 @@
               <a:rPr lang="en-IN" dirty="0" smtClean="0"/>
               <a:t>Chart.js v4</a:t>
             </a:r>
+          </a:p>
+          <a:p>
+            <a:pPr marL="285750" indent="-285750">
+              <a:buFont typeface="Arial" panose="020B0604020202020204" pitchFamily="34" charset="0"/>
+              <a:buChar char="•"/>
+            </a:pPr>
+            <a:r>
+              <a:rPr lang="en-US" dirty="0" err="1" smtClean="0"/>
+              <a:t>Scikit</a:t>
+            </a:r>
+            <a:r>
+              <a:rPr lang="en-US" dirty="0" smtClean="0"/>
+              <a:t>-learn</a:t>
+            </a:r>
+            <a:endParaRPr lang="en-IN" dirty="0" smtClean="0"/>
+          </a:p>
+          <a:p>
+            <a:pPr marL="285750" indent="-285750">
+              <a:buFont typeface="Arial" panose="020B0604020202020204" pitchFamily="34" charset="0"/>
+              <a:buChar char="•"/>
+            </a:pPr>
+            <a:r>
+              <a:rPr lang="en-US" dirty="0" err="1" smtClean="0"/>
+              <a:t>Tensorflow</a:t>
+            </a:r>
+            <a:endParaRPr lang="en-US" dirty="0" smtClean="0"/>
           </a:p>
         </p:txBody>
       </p:sp>
@@ -7032,7 +5136,7 @@
                                         <p:tgtEl>
                                           <p:spTgt spid="2">
                                             <p:txEl>
-                                              <p:pRg st="6" end="6"/>
+                                              <p:pRg st="5" end="5"/>
                                             </p:txEl>
                                           </p:spTgt>
                                         </p:tgtEl>
@@ -7050,7 +5154,7 @@
                                         <p:tgtEl>
                                           <p:spTgt spid="2">
                                             <p:txEl>
-                                              <p:pRg st="6" end="6"/>
+                                              <p:pRg st="5" end="5"/>
                                             </p:txEl>
                                           </p:spTgt>
                                         </p:tgtEl>
@@ -7077,7 +5181,7 @@
                                         <p:tgtEl>
                                           <p:spTgt spid="2">
                                             <p:txEl>
-                                              <p:pRg st="6" end="6"/>
+                                              <p:pRg st="5" end="5"/>
                                             </p:txEl>
                                           </p:spTgt>
                                         </p:tgtEl>
@@ -7117,7 +5221,7 @@
                                         <p:tgtEl>
                                           <p:spTgt spid="2">
                                             <p:txEl>
-                                              <p:pRg st="8" end="8"/>
+                                              <p:pRg st="7" end="7"/>
                                             </p:txEl>
                                           </p:spTgt>
                                         </p:tgtEl>
@@ -7135,7 +5239,7 @@
                                         <p:tgtEl>
                                           <p:spTgt spid="2">
                                             <p:txEl>
-                                              <p:pRg st="8" end="8"/>
+                                              <p:pRg st="7" end="7"/>
                                             </p:txEl>
                                           </p:spTgt>
                                         </p:tgtEl>
@@ -7162,7 +5266,7 @@
                                         <p:tgtEl>
                                           <p:spTgt spid="2">
                                             <p:txEl>
-                                              <p:pRg st="8" end="8"/>
+                                              <p:pRg st="7" end="7"/>
                                             </p:txEl>
                                           </p:spTgt>
                                         </p:tgtEl>
@@ -7248,6 +5352,261 @@
                                           <p:spTgt spid="2">
                                             <p:txEl>
                                               <p:pRg st="9" end="9"/>
+                                            </p:txEl>
+                                          </p:spTgt>
+                                        </p:tgtEl>
+                                        <p:attrNameLst>
+                                          <p:attrName>ppt_y</p:attrName>
+                                        </p:attrNameLst>
+                                      </p:cBhvr>
+                                      <p:tavLst>
+                                        <p:tav tm="0">
+                                          <p:val>
+                                            <p:strVal val="#ppt_y"/>
+                                          </p:val>
+                                        </p:tav>
+                                        <p:tav tm="100000">
+                                          <p:val>
+                                            <p:strVal val="#ppt_y"/>
+                                          </p:val>
+                                        </p:tav>
+                                      </p:tavLst>
+                                    </p:anim>
+                                  </p:childTnLst>
+                                </p:cTn>
+                              </p:par>
+                              <p:par>
+                                <p:cTn id="33" presetID="2" presetClass="entr" presetSubtype="8" fill="hold" nodeType="withEffect">
+                                  <p:stCondLst>
+                                    <p:cond delay="0"/>
+                                  </p:stCondLst>
+                                  <p:childTnLst>
+                                    <p:set>
+                                      <p:cBhvr>
+                                        <p:cTn id="34" dur="1" fill="hold">
+                                          <p:stCondLst>
+                                            <p:cond delay="0"/>
+                                          </p:stCondLst>
+                                        </p:cTn>
+                                        <p:tgtEl>
+                                          <p:spTgt spid="2">
+                                            <p:txEl>
+                                              <p:pRg st="10" end="10"/>
+                                            </p:txEl>
+                                          </p:spTgt>
+                                        </p:tgtEl>
+                                        <p:attrNameLst>
+                                          <p:attrName>style.visibility</p:attrName>
+                                        </p:attrNameLst>
+                                      </p:cBhvr>
+                                      <p:to>
+                                        <p:strVal val="visible"/>
+                                      </p:to>
+                                    </p:set>
+                                    <p:anim calcmode="lin" valueType="num">
+                                      <p:cBhvr additive="base">
+                                        <p:cTn id="35" dur="500" fill="hold"/>
+                                        <p:tgtEl>
+                                          <p:spTgt spid="2">
+                                            <p:txEl>
+                                              <p:pRg st="10" end="10"/>
+                                            </p:txEl>
+                                          </p:spTgt>
+                                        </p:tgtEl>
+                                        <p:attrNameLst>
+                                          <p:attrName>ppt_x</p:attrName>
+                                        </p:attrNameLst>
+                                      </p:cBhvr>
+                                      <p:tavLst>
+                                        <p:tav tm="0">
+                                          <p:val>
+                                            <p:strVal val="0-#ppt_w/2"/>
+                                          </p:val>
+                                        </p:tav>
+                                        <p:tav tm="100000">
+                                          <p:val>
+                                            <p:strVal val="#ppt_x"/>
+                                          </p:val>
+                                        </p:tav>
+                                      </p:tavLst>
+                                    </p:anim>
+                                    <p:anim calcmode="lin" valueType="num">
+                                      <p:cBhvr additive="base">
+                                        <p:cTn id="36" dur="500" fill="hold"/>
+                                        <p:tgtEl>
+                                          <p:spTgt spid="2">
+                                            <p:txEl>
+                                              <p:pRg st="10" end="10"/>
+                                            </p:txEl>
+                                          </p:spTgt>
+                                        </p:tgtEl>
+                                        <p:attrNameLst>
+                                          <p:attrName>ppt_y</p:attrName>
+                                        </p:attrNameLst>
+                                      </p:cBhvr>
+                                      <p:tavLst>
+                                        <p:tav tm="0">
+                                          <p:val>
+                                            <p:strVal val="#ppt_y"/>
+                                          </p:val>
+                                        </p:tav>
+                                        <p:tav tm="100000">
+                                          <p:val>
+                                            <p:strVal val="#ppt_y"/>
+                                          </p:val>
+                                        </p:tav>
+                                      </p:tavLst>
+                                    </p:anim>
+                                  </p:childTnLst>
+                                </p:cTn>
+                              </p:par>
+                              <p:par>
+                                <p:cTn id="37" presetID="2" presetClass="entr" presetSubtype="8" fill="hold" nodeType="withEffect">
+                                  <p:stCondLst>
+                                    <p:cond delay="0"/>
+                                  </p:stCondLst>
+                                  <p:childTnLst>
+                                    <p:set>
+                                      <p:cBhvr>
+                                        <p:cTn id="38" dur="1" fill="hold">
+                                          <p:stCondLst>
+                                            <p:cond delay="0"/>
+                                          </p:stCondLst>
+                                        </p:cTn>
+                                        <p:tgtEl>
+                                          <p:spTgt spid="2">
+                                            <p:txEl>
+                                              <p:pRg st="11" end="11"/>
+                                            </p:txEl>
+                                          </p:spTgt>
+                                        </p:tgtEl>
+                                        <p:attrNameLst>
+                                          <p:attrName>style.visibility</p:attrName>
+                                        </p:attrNameLst>
+                                      </p:cBhvr>
+                                      <p:to>
+                                        <p:strVal val="visible"/>
+                                      </p:to>
+                                    </p:set>
+                                    <p:anim calcmode="lin" valueType="num">
+                                      <p:cBhvr additive="base">
+                                        <p:cTn id="39" dur="500" fill="hold"/>
+                                        <p:tgtEl>
+                                          <p:spTgt spid="2">
+                                            <p:txEl>
+                                              <p:pRg st="11" end="11"/>
+                                            </p:txEl>
+                                          </p:spTgt>
+                                        </p:tgtEl>
+                                        <p:attrNameLst>
+                                          <p:attrName>ppt_x</p:attrName>
+                                        </p:attrNameLst>
+                                      </p:cBhvr>
+                                      <p:tavLst>
+                                        <p:tav tm="0">
+                                          <p:val>
+                                            <p:strVal val="0-#ppt_w/2"/>
+                                          </p:val>
+                                        </p:tav>
+                                        <p:tav tm="100000">
+                                          <p:val>
+                                            <p:strVal val="#ppt_x"/>
+                                          </p:val>
+                                        </p:tav>
+                                      </p:tavLst>
+                                    </p:anim>
+                                    <p:anim calcmode="lin" valueType="num">
+                                      <p:cBhvr additive="base">
+                                        <p:cTn id="40" dur="500" fill="hold"/>
+                                        <p:tgtEl>
+                                          <p:spTgt spid="2">
+                                            <p:txEl>
+                                              <p:pRg st="11" end="11"/>
+                                            </p:txEl>
+                                          </p:spTgt>
+                                        </p:tgtEl>
+                                        <p:attrNameLst>
+                                          <p:attrName>ppt_y</p:attrName>
+                                        </p:attrNameLst>
+                                      </p:cBhvr>
+                                      <p:tavLst>
+                                        <p:tav tm="0">
+                                          <p:val>
+                                            <p:strVal val="#ppt_y"/>
+                                          </p:val>
+                                        </p:tav>
+                                        <p:tav tm="100000">
+                                          <p:val>
+                                            <p:strVal val="#ppt_y"/>
+                                          </p:val>
+                                        </p:tav>
+                                      </p:tavLst>
+                                    </p:anim>
+                                  </p:childTnLst>
+                                </p:cTn>
+                              </p:par>
+                              <p:par>
+                                <p:cTn id="41" presetID="2" presetClass="entr" presetSubtype="8" fill="hold" nodeType="withEffect">
+                                  <p:stCondLst>
+                                    <p:cond delay="0"/>
+                                  </p:stCondLst>
+                                  <p:childTnLst>
+                                    <p:set>
+                                      <p:cBhvr>
+                                        <p:cTn id="42" dur="1" fill="hold">
+                                          <p:stCondLst>
+                                            <p:cond delay="0"/>
+                                          </p:stCondLst>
+                                        </p:cTn>
+                                        <p:tgtEl>
+                                          <p:spTgt spid="2">
+                                            <p:txEl>
+                                              <p:pRg st="12" end="12"/>
+                                            </p:txEl>
+                                          </p:spTgt>
+                                        </p:tgtEl>
+                                        <p:attrNameLst>
+                                          <p:attrName>style.visibility</p:attrName>
+                                        </p:attrNameLst>
+                                      </p:cBhvr>
+                                      <p:to>
+                                        <p:strVal val="visible"/>
+                                      </p:to>
+                                    </p:set>
+                                    <p:anim calcmode="lin" valueType="num">
+                                      <p:cBhvr additive="base">
+                                        <p:cTn id="43" dur="500" fill="hold"/>
+                                        <p:tgtEl>
+                                          <p:spTgt spid="2">
+                                            <p:txEl>
+                                              <p:pRg st="12" end="12"/>
+                                            </p:txEl>
+                                          </p:spTgt>
+                                        </p:tgtEl>
+                                        <p:attrNameLst>
+                                          <p:attrName>ppt_x</p:attrName>
+                                        </p:attrNameLst>
+                                      </p:cBhvr>
+                                      <p:tavLst>
+                                        <p:tav tm="0">
+                                          <p:val>
+                                            <p:strVal val="0-#ppt_w/2"/>
+                                          </p:val>
+                                        </p:tav>
+                                        <p:tav tm="100000">
+                                          <p:val>
+                                            <p:strVal val="#ppt_x"/>
+                                          </p:val>
+                                        </p:tav>
+                                      </p:tavLst>
+                                    </p:anim>
+                                    <p:anim calcmode="lin" valueType="num">
+                                      <p:cBhvr additive="base">
+                                        <p:cTn id="44" dur="500" fill="hold"/>
+                                        <p:tgtEl>
+                                          <p:spTgt spid="2">
+                                            <p:txEl>
+                                              <p:pRg st="12" end="12"/>
                                             </p:txEl>
                                           </p:spTgt>
                                         </p:tgtEl>
@@ -7327,8 +5686,8 @@
         </p:nvSpPr>
         <p:spPr>
           <a:xfrm>
-            <a:off x="492370" y="668216"/>
-            <a:ext cx="10796953" cy="5355312"/>
+            <a:off x="483577" y="1477108"/>
+            <a:ext cx="10796953" cy="4247317"/>
           </a:xfrm>
           <a:prstGeom prst="rect">
             <a:avLst/>
@@ -7430,46 +5789,17 @@
             </a:r>
           </a:p>
           <a:p>
-            <a:endParaRPr lang="en-US" dirty="0"/>
-          </a:p>
-          <a:p>
-            <a:r>
-              <a:rPr lang="en-US" b="1" dirty="0" smtClean="0"/>
-              <a:t>Bootstrap:</a:t>
-            </a:r>
-            <a:endParaRPr lang="en-US" b="1" dirty="0"/>
-          </a:p>
-          <a:p>
             <a:pPr marL="285750" indent="-285750">
               <a:buFont typeface="Arial" panose="020B0604020202020204" pitchFamily="34" charset="0"/>
               <a:buChar char="•"/>
             </a:pPr>
-            <a:r>
-              <a:rPr lang="en-US" dirty="0"/>
-              <a:t>Provides a responsive grid system, cards, buttons, and </a:t>
-            </a:r>
-            <a:r>
-              <a:rPr lang="en-US" dirty="0" err="1"/>
-              <a:t>navbar</a:t>
-            </a:r>
-            <a:r>
-              <a:rPr lang="en-US" dirty="0"/>
-              <a:t> components to quickly build a polished and mobile-friendly layout</a:t>
-            </a:r>
-            <a:r>
-              <a:rPr lang="en-US" dirty="0" smtClean="0"/>
-              <a:t>.</a:t>
-            </a:r>
-          </a:p>
-          <a:p>
             <a:endParaRPr lang="en-US" dirty="0"/>
           </a:p>
           <a:p>
             <a:r>
-              <a:rPr lang="en-US" b="1" dirty="0" smtClean="0"/>
-              <a:t>Chart.js:</a:t>
-            </a:r>
-            <a:endParaRPr lang="en-US" b="1" dirty="0"/>
+              <a:rPr lang="en-US" b="1" dirty="0"/>
+              <a:t>Bootstrap:</a:t>
+            </a:r>
           </a:p>
           <a:p>
             <a:pPr marL="285750" indent="-285750">
@@ -7478,7 +5808,15 @@
             </a:pPr>
             <a:r>
               <a:rPr lang="en-US" dirty="0"/>
-              <a:t>Renders interactive line and bar charts for historical trends and AQI predictions with smooth animations and real-time theme updates</a:t>
+              <a:t>Provides a responsive grid system, cards, buttons, and </a:t>
+            </a:r>
+            <a:r>
+              <a:rPr lang="en-US" dirty="0" err="1"/>
+              <a:t>navbar</a:t>
+            </a:r>
+            <a:r>
+              <a:rPr lang="en-US" dirty="0"/>
+              <a:t> components to quickly build a polished and mobile-friendly layout</a:t>
             </a:r>
             <a:r>
               <a:rPr lang="en-US" dirty="0" smtClean="0"/>
@@ -7854,92 +6192,6 @@
                                           <p:spTgt spid="2">
                                             <p:txEl>
                                               <p:pRg st="10" end="10"/>
-                                            </p:txEl>
-                                          </p:spTgt>
-                                        </p:tgtEl>
-                                      </p:cBhvr>
-                                    </p:animEffect>
-                                  </p:childTnLst>
-                                </p:cTn>
-                              </p:par>
-                              <p:par>
-                                <p:cTn id="29" presetID="14" presetClass="entr" presetSubtype="10" fill="hold" nodeType="withEffect">
-                                  <p:stCondLst>
-                                    <p:cond delay="0"/>
-                                  </p:stCondLst>
-                                  <p:childTnLst>
-                                    <p:set>
-                                      <p:cBhvr>
-                                        <p:cTn id="30" dur="1" fill="hold">
-                                          <p:stCondLst>
-                                            <p:cond delay="0"/>
-                                          </p:stCondLst>
-                                        </p:cTn>
-                                        <p:tgtEl>
-                                          <p:spTgt spid="2">
-                                            <p:txEl>
-                                              <p:pRg st="12" end="12"/>
-                                            </p:txEl>
-                                          </p:spTgt>
-                                        </p:tgtEl>
-                                        <p:attrNameLst>
-                                          <p:attrName>style.visibility</p:attrName>
-                                        </p:attrNameLst>
-                                      </p:cBhvr>
-                                      <p:to>
-                                        <p:strVal val="visible"/>
-                                      </p:to>
-                                    </p:set>
-                                    <p:animEffect transition="in" filter="randombar(horizontal)">
-                                      <p:cBhvr>
-                                        <p:cTn id="31" dur="500"/>
-                                        <p:tgtEl>
-                                          <p:spTgt spid="2">
-                                            <p:txEl>
-                                              <p:pRg st="12" end="12"/>
-                                            </p:txEl>
-                                          </p:spTgt>
-                                        </p:tgtEl>
-                                      </p:cBhvr>
-                                    </p:animEffect>
-                                  </p:childTnLst>
-                                </p:cTn>
-                              </p:par>
-                              <p:par>
-                                <p:cTn id="32" presetID="14" presetClass="entr" presetSubtype="10" fill="hold" nodeType="withEffect">
-                                  <p:stCondLst>
-                                    <p:cond delay="0"/>
-                                  </p:stCondLst>
-                                  <p:childTnLst>
-                                    <p:set>
-                                      <p:cBhvr>
-                                        <p:cTn id="33" dur="1" fill="hold">
-                                          <p:stCondLst>
-                                            <p:cond delay="0"/>
-                                          </p:stCondLst>
-                                        </p:cTn>
-                                        <p:tgtEl>
-                                          <p:spTgt spid="2">
-                                            <p:txEl>
-                                              <p:pRg st="13" end="13"/>
-                                            </p:txEl>
-                                          </p:spTgt>
-                                        </p:tgtEl>
-                                        <p:attrNameLst>
-                                          <p:attrName>style.visibility</p:attrName>
-                                        </p:attrNameLst>
-                                      </p:cBhvr>
-                                      <p:to>
-                                        <p:strVal val="visible"/>
-                                      </p:to>
-                                    </p:set>
-                                    <p:animEffect transition="in" filter="randombar(horizontal)">
-                                      <p:cBhvr>
-                                        <p:cTn id="34" dur="500"/>
-                                        <p:tgtEl>
-                                          <p:spTgt spid="2">
-                                            <p:txEl>
-                                              <p:pRg st="13" end="13"/>
                                             </p:txEl>
                                           </p:spTgt>
                                         </p:tgtEl>
@@ -7996,34 +6248,134 @@
           <a:chExt cx="0" cy="0"/>
         </a:xfrm>
       </p:grpSpPr>
-      <p:pic>
-        <p:nvPicPr>
-          <p:cNvPr id="2" name="Picture 1"/>
-          <p:cNvPicPr>
-            <a:picLocks noChangeAspect="1"/>
-          </p:cNvPicPr>
+      <p:sp>
+        <p:nvSpPr>
+          <p:cNvPr id="3" name="TextBox 2"/>
+          <p:cNvSpPr txBox="1"/>
           <p:nvPr/>
-        </p:nvPicPr>
-        <p:blipFill>
-          <a:blip r:embed="rId2"/>
-          <a:stretch>
-            <a:fillRect/>
-          </a:stretch>
-        </p:blipFill>
+        </p:nvSpPr>
         <p:spPr>
           <a:xfrm>
-            <a:off x="0" y="0"/>
-            <a:ext cx="12191999" cy="6857999"/>
+            <a:off x="826477" y="1450730"/>
+            <a:ext cx="9451730" cy="4247317"/>
           </a:xfrm>
           <a:prstGeom prst="rect">
             <a:avLst/>
           </a:prstGeom>
+          <a:noFill/>
         </p:spPr>
-      </p:pic>
+        <p:txBody>
+          <a:bodyPr wrap="square" rtlCol="0">
+            <a:spAutoFit/>
+          </a:bodyPr>
+          <a:lstStyle/>
+          <a:p>
+            <a:r>
+              <a:rPr lang="en-US" b="1" dirty="0" smtClean="0"/>
+              <a:t>Chart.js</a:t>
+            </a:r>
+            <a:r>
+              <a:rPr lang="en-US" b="1" dirty="0"/>
+              <a:t>:</a:t>
+            </a:r>
+          </a:p>
+          <a:p>
+            <a:pPr marL="285750" indent="-285750">
+              <a:buFont typeface="Arial" panose="020B0604020202020204" pitchFamily="34" charset="0"/>
+              <a:buChar char="•"/>
+            </a:pPr>
+            <a:r>
+              <a:rPr lang="en-US" dirty="0"/>
+              <a:t>Renders interactive line and bar charts for historical trends and AQI predictions with smooth animations and real-time theme updates.</a:t>
+            </a:r>
+          </a:p>
+          <a:p>
+            <a:endParaRPr lang="en-US" dirty="0" smtClean="0"/>
+          </a:p>
+          <a:p>
+            <a:r>
+              <a:rPr lang="en-US" b="1" dirty="0" smtClean="0"/>
+              <a:t>Python:</a:t>
+            </a:r>
+            <a:endParaRPr lang="en-US" dirty="0"/>
+          </a:p>
+          <a:p>
+            <a:pPr marL="285750" indent="-285750">
+              <a:buFont typeface="Arial" panose="020B0604020202020204" pitchFamily="34" charset="0"/>
+              <a:buChar char="•"/>
+            </a:pPr>
+            <a:r>
+              <a:rPr lang="en-US" dirty="0" smtClean="0"/>
+              <a:t>Used to train Machine Learning models and Deep Learning models to predict air </a:t>
+            </a:r>
+            <a:r>
+              <a:rPr lang="en-US" dirty="0" smtClean="0"/>
+              <a:t>quality, creating the backend for the project and connecting to the database.</a:t>
+            </a:r>
+          </a:p>
+          <a:p>
+            <a:pPr marL="285750" indent="-285750">
+              <a:buFont typeface="Arial" panose="020B0604020202020204" pitchFamily="34" charset="0"/>
+              <a:buChar char="•"/>
+            </a:pPr>
+            <a:endParaRPr lang="en-US" dirty="0" smtClean="0"/>
+          </a:p>
+          <a:p>
+            <a:r>
+              <a:rPr lang="en-US" b="1" dirty="0" err="1" smtClean="0"/>
+              <a:t>Scikit</a:t>
+            </a:r>
+            <a:r>
+              <a:rPr lang="en-US" b="1" dirty="0" smtClean="0"/>
+              <a:t>-learn:</a:t>
+            </a:r>
+          </a:p>
+          <a:p>
+            <a:endParaRPr lang="en-US" dirty="0" smtClean="0"/>
+          </a:p>
+          <a:p>
+            <a:pPr marL="285750" indent="-285750">
+              <a:buFont typeface="Arial" panose="020B0604020202020204" pitchFamily="34" charset="0"/>
+              <a:buChar char="•"/>
+            </a:pPr>
+            <a:r>
+              <a:rPr lang="en-US" dirty="0" smtClean="0"/>
+              <a:t>Used to train machine learning models.</a:t>
+            </a:r>
+          </a:p>
+          <a:p>
+            <a:endParaRPr lang="en-US" dirty="0"/>
+          </a:p>
+          <a:p>
+            <a:r>
+              <a:rPr lang="en-US" b="1" dirty="0" err="1" smtClean="0"/>
+              <a:t>Tensorflow</a:t>
+            </a:r>
+            <a:r>
+              <a:rPr lang="en-US" b="1" dirty="0" smtClean="0"/>
+              <a:t>:</a:t>
+            </a:r>
+          </a:p>
+          <a:p>
+            <a:endParaRPr lang="en-US" b="1" dirty="0"/>
+          </a:p>
+          <a:p>
+            <a:pPr marL="285750" indent="-285750">
+              <a:buFont typeface="Arial" panose="020B0604020202020204" pitchFamily="34" charset="0"/>
+              <a:buChar char="•"/>
+            </a:pPr>
+            <a:r>
+              <a:rPr lang="en-US" dirty="0" smtClean="0"/>
+              <a:t>Used to train LSTM model.</a:t>
+            </a:r>
+            <a:endParaRPr lang="en-US" dirty="0" smtClean="0"/>
+          </a:p>
+        </p:txBody>
+      </p:sp>
     </p:spTree>
     <p:extLst>
       <p:ext uri="{BB962C8B-B14F-4D97-AF65-F5344CB8AC3E}">
-        <p14:creationId xmlns:p14="http://schemas.microsoft.com/office/powerpoint/2010/main" val="71062235"/>
+        <p14:creationId xmlns:p14="http://schemas.microsoft.com/office/powerpoint/2010/main" val="449156794"/>
       </p:ext>
     </p:extLst>
   </p:cSld>
@@ -8033,7 +6385,395 @@
   <p:timing>
     <p:tnLst>
       <p:par>
-        <p:cTn id="1" dur="indefinite" restart="never" nodeType="tmRoot"/>
+        <p:cTn id="1" dur="indefinite" restart="never" nodeType="tmRoot">
+          <p:childTnLst>
+            <p:seq concurrent="1" nextAc="seek">
+              <p:cTn id="2" dur="indefinite" nodeType="mainSeq">
+                <p:childTnLst>
+                  <p:par>
+                    <p:cTn id="3" fill="hold">
+                      <p:stCondLst>
+                        <p:cond delay="indefinite"/>
+                        <p:cond evt="onBegin" delay="0">
+                          <p:tn val="2"/>
+                        </p:cond>
+                      </p:stCondLst>
+                      <p:childTnLst>
+                        <p:par>
+                          <p:cTn id="4" fill="hold">
+                            <p:stCondLst>
+                              <p:cond delay="0"/>
+                            </p:stCondLst>
+                            <p:childTnLst>
+                              <p:par>
+                                <p:cTn id="5" presetID="14" presetClass="entr" presetSubtype="10" fill="hold" nodeType="withEffect">
+                                  <p:stCondLst>
+                                    <p:cond delay="0"/>
+                                  </p:stCondLst>
+                                  <p:childTnLst>
+                                    <p:set>
+                                      <p:cBhvr>
+                                        <p:cTn id="6" dur="1" fill="hold">
+                                          <p:stCondLst>
+                                            <p:cond delay="0"/>
+                                          </p:stCondLst>
+                                        </p:cTn>
+                                        <p:tgtEl>
+                                          <p:spTgt spid="3">
+                                            <p:txEl>
+                                              <p:pRg st="0" end="0"/>
+                                            </p:txEl>
+                                          </p:spTgt>
+                                        </p:tgtEl>
+                                        <p:attrNameLst>
+                                          <p:attrName>style.visibility</p:attrName>
+                                        </p:attrNameLst>
+                                      </p:cBhvr>
+                                      <p:to>
+                                        <p:strVal val="visible"/>
+                                      </p:to>
+                                    </p:set>
+                                    <p:animEffect transition="in" filter="randombar(horizontal)">
+                                      <p:cBhvr>
+                                        <p:cTn id="7" dur="500"/>
+                                        <p:tgtEl>
+                                          <p:spTgt spid="3">
+                                            <p:txEl>
+                                              <p:pRg st="0" end="0"/>
+                                            </p:txEl>
+                                          </p:spTgt>
+                                        </p:tgtEl>
+                                      </p:cBhvr>
+                                    </p:animEffect>
+                                  </p:childTnLst>
+                                </p:cTn>
+                              </p:par>
+                              <p:par>
+                                <p:cTn id="8" presetID="14" presetClass="entr" presetSubtype="10" fill="hold" nodeType="withEffect">
+                                  <p:stCondLst>
+                                    <p:cond delay="0"/>
+                                  </p:stCondLst>
+                                  <p:childTnLst>
+                                    <p:set>
+                                      <p:cBhvr>
+                                        <p:cTn id="9" dur="1" fill="hold">
+                                          <p:stCondLst>
+                                            <p:cond delay="0"/>
+                                          </p:stCondLst>
+                                        </p:cTn>
+                                        <p:tgtEl>
+                                          <p:spTgt spid="3">
+                                            <p:txEl>
+                                              <p:pRg st="1" end="1"/>
+                                            </p:txEl>
+                                          </p:spTgt>
+                                        </p:tgtEl>
+                                        <p:attrNameLst>
+                                          <p:attrName>style.visibility</p:attrName>
+                                        </p:attrNameLst>
+                                      </p:cBhvr>
+                                      <p:to>
+                                        <p:strVal val="visible"/>
+                                      </p:to>
+                                    </p:set>
+                                    <p:animEffect transition="in" filter="randombar(horizontal)">
+                                      <p:cBhvr>
+                                        <p:cTn id="10" dur="500"/>
+                                        <p:tgtEl>
+                                          <p:spTgt spid="3">
+                                            <p:txEl>
+                                              <p:pRg st="1" end="1"/>
+                                            </p:txEl>
+                                          </p:spTgt>
+                                        </p:tgtEl>
+                                      </p:cBhvr>
+                                    </p:animEffect>
+                                  </p:childTnLst>
+                                </p:cTn>
+                              </p:par>
+                              <p:par>
+                                <p:cTn id="11" presetID="14" presetClass="entr" presetSubtype="10" fill="hold" nodeType="withEffect">
+                                  <p:stCondLst>
+                                    <p:cond delay="0"/>
+                                  </p:stCondLst>
+                                  <p:childTnLst>
+                                    <p:set>
+                                      <p:cBhvr>
+                                        <p:cTn id="12" dur="1" fill="hold">
+                                          <p:stCondLst>
+                                            <p:cond delay="0"/>
+                                          </p:stCondLst>
+                                        </p:cTn>
+                                        <p:tgtEl>
+                                          <p:spTgt spid="3">
+                                            <p:txEl>
+                                              <p:pRg st="3" end="3"/>
+                                            </p:txEl>
+                                          </p:spTgt>
+                                        </p:tgtEl>
+                                        <p:attrNameLst>
+                                          <p:attrName>style.visibility</p:attrName>
+                                        </p:attrNameLst>
+                                      </p:cBhvr>
+                                      <p:to>
+                                        <p:strVal val="visible"/>
+                                      </p:to>
+                                    </p:set>
+                                    <p:animEffect transition="in" filter="randombar(horizontal)">
+                                      <p:cBhvr>
+                                        <p:cTn id="13" dur="500"/>
+                                        <p:tgtEl>
+                                          <p:spTgt spid="3">
+                                            <p:txEl>
+                                              <p:pRg st="3" end="3"/>
+                                            </p:txEl>
+                                          </p:spTgt>
+                                        </p:tgtEl>
+                                      </p:cBhvr>
+                                    </p:animEffect>
+                                  </p:childTnLst>
+                                </p:cTn>
+                              </p:par>
+                              <p:par>
+                                <p:cTn id="14" presetID="14" presetClass="entr" presetSubtype="10" fill="hold" nodeType="withEffect">
+                                  <p:stCondLst>
+                                    <p:cond delay="0"/>
+                                  </p:stCondLst>
+                                  <p:childTnLst>
+                                    <p:set>
+                                      <p:cBhvr>
+                                        <p:cTn id="15" dur="1" fill="hold">
+                                          <p:stCondLst>
+                                            <p:cond delay="0"/>
+                                          </p:stCondLst>
+                                        </p:cTn>
+                                        <p:tgtEl>
+                                          <p:spTgt spid="3">
+                                            <p:txEl>
+                                              <p:pRg st="4" end="4"/>
+                                            </p:txEl>
+                                          </p:spTgt>
+                                        </p:tgtEl>
+                                        <p:attrNameLst>
+                                          <p:attrName>style.visibility</p:attrName>
+                                        </p:attrNameLst>
+                                      </p:cBhvr>
+                                      <p:to>
+                                        <p:strVal val="visible"/>
+                                      </p:to>
+                                    </p:set>
+                                    <p:animEffect transition="in" filter="randombar(horizontal)">
+                                      <p:cBhvr>
+                                        <p:cTn id="16" dur="500"/>
+                                        <p:tgtEl>
+                                          <p:spTgt spid="3">
+                                            <p:txEl>
+                                              <p:pRg st="4" end="4"/>
+                                            </p:txEl>
+                                          </p:spTgt>
+                                        </p:tgtEl>
+                                      </p:cBhvr>
+                                    </p:animEffect>
+                                  </p:childTnLst>
+                                </p:cTn>
+                              </p:par>
+                              <p:par>
+                                <p:cTn id="17" presetID="14" presetClass="entr" presetSubtype="10" fill="hold" nodeType="withEffect">
+                                  <p:stCondLst>
+                                    <p:cond delay="0"/>
+                                  </p:stCondLst>
+                                  <p:childTnLst>
+                                    <p:set>
+                                      <p:cBhvr>
+                                        <p:cTn id="18" dur="1" fill="hold">
+                                          <p:stCondLst>
+                                            <p:cond delay="0"/>
+                                          </p:stCondLst>
+                                        </p:cTn>
+                                        <p:tgtEl>
+                                          <p:spTgt spid="3">
+                                            <p:txEl>
+                                              <p:pRg st="6" end="6"/>
+                                            </p:txEl>
+                                          </p:spTgt>
+                                        </p:tgtEl>
+                                        <p:attrNameLst>
+                                          <p:attrName>style.visibility</p:attrName>
+                                        </p:attrNameLst>
+                                      </p:cBhvr>
+                                      <p:to>
+                                        <p:strVal val="visible"/>
+                                      </p:to>
+                                    </p:set>
+                                    <p:animEffect transition="in" filter="randombar(horizontal)">
+                                      <p:cBhvr>
+                                        <p:cTn id="19" dur="500"/>
+                                        <p:tgtEl>
+                                          <p:spTgt spid="3">
+                                            <p:txEl>
+                                              <p:pRg st="6" end="6"/>
+                                            </p:txEl>
+                                          </p:spTgt>
+                                        </p:tgtEl>
+                                      </p:cBhvr>
+                                    </p:animEffect>
+                                  </p:childTnLst>
+                                </p:cTn>
+                              </p:par>
+                              <p:par>
+                                <p:cTn id="20" presetID="14" presetClass="entr" presetSubtype="10" fill="hold" nodeType="withEffect">
+                                  <p:stCondLst>
+                                    <p:cond delay="0"/>
+                                  </p:stCondLst>
+                                  <p:childTnLst>
+                                    <p:set>
+                                      <p:cBhvr>
+                                        <p:cTn id="21" dur="1" fill="hold">
+                                          <p:stCondLst>
+                                            <p:cond delay="0"/>
+                                          </p:stCondLst>
+                                        </p:cTn>
+                                        <p:tgtEl>
+                                          <p:spTgt spid="3">
+                                            <p:txEl>
+                                              <p:pRg st="8" end="8"/>
+                                            </p:txEl>
+                                          </p:spTgt>
+                                        </p:tgtEl>
+                                        <p:attrNameLst>
+                                          <p:attrName>style.visibility</p:attrName>
+                                        </p:attrNameLst>
+                                      </p:cBhvr>
+                                      <p:to>
+                                        <p:strVal val="visible"/>
+                                      </p:to>
+                                    </p:set>
+                                    <p:animEffect transition="in" filter="randombar(horizontal)">
+                                      <p:cBhvr>
+                                        <p:cTn id="22" dur="500"/>
+                                        <p:tgtEl>
+                                          <p:spTgt spid="3">
+                                            <p:txEl>
+                                              <p:pRg st="8" end="8"/>
+                                            </p:txEl>
+                                          </p:spTgt>
+                                        </p:tgtEl>
+                                      </p:cBhvr>
+                                    </p:animEffect>
+                                  </p:childTnLst>
+                                </p:cTn>
+                              </p:par>
+                              <p:par>
+                                <p:cTn id="23" presetID="14" presetClass="entr" presetSubtype="10" fill="hold" nodeType="withEffect">
+                                  <p:stCondLst>
+                                    <p:cond delay="0"/>
+                                  </p:stCondLst>
+                                  <p:childTnLst>
+                                    <p:set>
+                                      <p:cBhvr>
+                                        <p:cTn id="24" dur="1" fill="hold">
+                                          <p:stCondLst>
+                                            <p:cond delay="0"/>
+                                          </p:stCondLst>
+                                        </p:cTn>
+                                        <p:tgtEl>
+                                          <p:spTgt spid="3">
+                                            <p:txEl>
+                                              <p:pRg st="10" end="10"/>
+                                            </p:txEl>
+                                          </p:spTgt>
+                                        </p:tgtEl>
+                                        <p:attrNameLst>
+                                          <p:attrName>style.visibility</p:attrName>
+                                        </p:attrNameLst>
+                                      </p:cBhvr>
+                                      <p:to>
+                                        <p:strVal val="visible"/>
+                                      </p:to>
+                                    </p:set>
+                                    <p:animEffect transition="in" filter="randombar(horizontal)">
+                                      <p:cBhvr>
+                                        <p:cTn id="25" dur="500"/>
+                                        <p:tgtEl>
+                                          <p:spTgt spid="3">
+                                            <p:txEl>
+                                              <p:pRg st="10" end="10"/>
+                                            </p:txEl>
+                                          </p:spTgt>
+                                        </p:tgtEl>
+                                      </p:cBhvr>
+                                    </p:animEffect>
+                                  </p:childTnLst>
+                                </p:cTn>
+                              </p:par>
+                              <p:par>
+                                <p:cTn id="26" presetID="14" presetClass="entr" presetSubtype="10" fill="hold" nodeType="withEffect">
+                                  <p:stCondLst>
+                                    <p:cond delay="0"/>
+                                  </p:stCondLst>
+                                  <p:childTnLst>
+                                    <p:set>
+                                      <p:cBhvr>
+                                        <p:cTn id="27" dur="1" fill="hold">
+                                          <p:stCondLst>
+                                            <p:cond delay="0"/>
+                                          </p:stCondLst>
+                                        </p:cTn>
+                                        <p:tgtEl>
+                                          <p:spTgt spid="3">
+                                            <p:txEl>
+                                              <p:pRg st="12" end="12"/>
+                                            </p:txEl>
+                                          </p:spTgt>
+                                        </p:tgtEl>
+                                        <p:attrNameLst>
+                                          <p:attrName>style.visibility</p:attrName>
+                                        </p:attrNameLst>
+                                      </p:cBhvr>
+                                      <p:to>
+                                        <p:strVal val="visible"/>
+                                      </p:to>
+                                    </p:set>
+                                    <p:animEffect transition="in" filter="randombar(horizontal)">
+                                      <p:cBhvr>
+                                        <p:cTn id="28" dur="500"/>
+                                        <p:tgtEl>
+                                          <p:spTgt spid="3">
+                                            <p:txEl>
+                                              <p:pRg st="12" end="12"/>
+                                            </p:txEl>
+                                          </p:spTgt>
+                                        </p:tgtEl>
+                                      </p:cBhvr>
+                                    </p:animEffect>
+                                  </p:childTnLst>
+                                </p:cTn>
+                              </p:par>
+                            </p:childTnLst>
+                          </p:cTn>
+                        </p:par>
+                      </p:childTnLst>
+                    </p:cTn>
+                  </p:par>
+                </p:childTnLst>
+              </p:cTn>
+              <p:prevCondLst>
+                <p:cond evt="onPrev" delay="0">
+                  <p:tgtEl>
+                    <p:sldTgt/>
+                  </p:tgtEl>
+                </p:cond>
+              </p:prevCondLst>
+              <p:nextCondLst>
+                <p:cond evt="onNext" delay="0">
+                  <p:tgtEl>
+                    <p:sldTgt/>
+                  </p:tgtEl>
+                </p:cond>
+              </p:nextCondLst>
+            </p:seq>
+          </p:childTnLst>
+        </p:cTn>
       </p:par>
     </p:tnLst>
   </p:timing>
@@ -8041,67 +6781,6 @@
 </file>
 
 <file path=ppt/slides/slide7.xml><?xml version="1.0" encoding="utf-8"?>
-<p:sld xmlns:a="http://schemas.openxmlformats.org/drawingml/2006/main" xmlns:r="http://schemas.openxmlformats.org/officeDocument/2006/relationships" xmlns:p="http://schemas.openxmlformats.org/presentationml/2006/main">
-  <p:cSld>
-    <p:spTree>
-      <p:nvGrpSpPr>
-        <p:cNvPr id="1" name=""/>
-        <p:cNvGrpSpPr/>
-        <p:nvPr/>
-      </p:nvGrpSpPr>
-      <p:grpSpPr>
-        <a:xfrm>
-          <a:off x="0" y="0"/>
-          <a:ext cx="0" cy="0"/>
-          <a:chOff x="0" y="0"/>
-          <a:chExt cx="0" cy="0"/>
-        </a:xfrm>
-      </p:grpSpPr>
-      <p:pic>
-        <p:nvPicPr>
-          <p:cNvPr id="2" name="Picture 1"/>
-          <p:cNvPicPr>
-            <a:picLocks noChangeAspect="1"/>
-          </p:cNvPicPr>
-          <p:nvPr/>
-        </p:nvPicPr>
-        <p:blipFill>
-          <a:blip r:embed="rId2"/>
-          <a:stretch>
-            <a:fillRect/>
-          </a:stretch>
-        </p:blipFill>
-        <p:spPr>
-          <a:xfrm>
-            <a:off x="0" y="0"/>
-            <a:ext cx="12192000" cy="6858000"/>
-          </a:xfrm>
-          <a:prstGeom prst="rect">
-            <a:avLst/>
-          </a:prstGeom>
-        </p:spPr>
-      </p:pic>
-    </p:spTree>
-    <p:extLst>
-      <p:ext uri="{BB962C8B-B14F-4D97-AF65-F5344CB8AC3E}">
-        <p14:creationId xmlns:p14="http://schemas.microsoft.com/office/powerpoint/2010/main" val="1381796849"/>
-      </p:ext>
-    </p:extLst>
-  </p:cSld>
-  <p:clrMapOvr>
-    <a:masterClrMapping/>
-  </p:clrMapOvr>
-  <p:timing>
-    <p:tnLst>
-      <p:par>
-        <p:cTn id="1" dur="indefinite" restart="never" nodeType="tmRoot"/>
-      </p:par>
-    </p:tnLst>
-  </p:timing>
-</p:sld>
-</file>
-
-<file path=ppt/slides/slide8.xml><?xml version="1.0" encoding="utf-8"?>
 <p:sld xmlns:a="http://schemas.openxmlformats.org/drawingml/2006/main" xmlns:r="http://schemas.openxmlformats.org/officeDocument/2006/relationships" xmlns:p="http://schemas.openxmlformats.org/presentationml/2006/main">
   <p:cSld>
     <p:spTree>
@@ -8126,8 +6805,8 @@
         </p:nvSpPr>
         <p:spPr>
           <a:xfrm>
-            <a:off x="474786" y="1072661"/>
-            <a:ext cx="11139854" cy="4401205"/>
+            <a:off x="738556" y="1661745"/>
+            <a:ext cx="11139854" cy="2739211"/>
           </a:xfrm>
           <a:prstGeom prst="rect">
             <a:avLst/>
@@ -8148,7 +6827,7 @@
                   </a:schemeClr>
                 </a:solidFill>
               </a:rPr>
-              <a:t>Objectives for Milestone 2:</a:t>
+              <a:t>Objectives for Milestone 3:</a:t>
             </a:r>
             <a:endParaRPr lang="en-IN" dirty="0" smtClean="0">
               <a:solidFill>
@@ -8162,43 +6841,26 @@
             <a:endParaRPr lang="en-IN" dirty="0"/>
           </a:p>
           <a:p>
-            <a:r>
-              <a:rPr lang="en-IN" dirty="0"/>
-              <a:t>Implement Machine Learning Model</a:t>
-            </a:r>
-          </a:p>
-          <a:p>
-            <a:endParaRPr lang="en-IN" dirty="0"/>
-          </a:p>
-          <a:p>
-            <a:r>
-              <a:rPr lang="en-IN" dirty="0" smtClean="0"/>
-              <a:t>Train </a:t>
-            </a:r>
-            <a:r>
-              <a:rPr lang="en-IN" dirty="0"/>
-              <a:t>models using historical Delhi AQI dataset:</a:t>
-            </a:r>
-          </a:p>
-          <a:p>
-            <a:endParaRPr lang="en-IN" dirty="0"/>
-          </a:p>
-          <a:p>
             <a:pPr marL="285750" indent="-285750">
               <a:buFont typeface="Arial" panose="020B0604020202020204" pitchFamily="34" charset="0"/>
               <a:buChar char="•"/>
             </a:pPr>
             <a:r>
               <a:rPr lang="en-IN" dirty="0"/>
-              <a:t>Linear Regression</a:t>
-            </a:r>
+              <a:t>Implement </a:t>
+            </a:r>
+            <a:r>
+              <a:rPr lang="en-IN" dirty="0" smtClean="0"/>
+              <a:t>Backend using Python and connect it to frontend</a:t>
+            </a:r>
+            <a:endParaRPr lang="en-IN" dirty="0"/>
           </a:p>
           <a:p>
             <a:pPr marL="285750" indent="-285750">
               <a:buFont typeface="Arial" panose="020B0604020202020204" pitchFamily="34" charset="0"/>
               <a:buChar char="•"/>
             </a:pPr>
-            <a:endParaRPr lang="en-IN" dirty="0"/>
+            <a:endParaRPr lang="en-US" dirty="0"/>
           </a:p>
           <a:p>
             <a:pPr marL="285750" indent="-285750">
@@ -8206,8 +6868,8 @@
               <a:buChar char="•"/>
             </a:pPr>
             <a:r>
-              <a:rPr lang="en-IN" dirty="0"/>
-              <a:t>Random Forest</a:t>
+              <a:rPr lang="en-US" dirty="0" smtClean="0"/>
+              <a:t>Improve UI responsiveness</a:t>
             </a:r>
           </a:p>
           <a:p>
@@ -8215,7 +6877,7 @@
               <a:buFont typeface="Arial" panose="020B0604020202020204" pitchFamily="34" charset="0"/>
               <a:buChar char="•"/>
             </a:pPr>
-            <a:endParaRPr lang="en-IN" dirty="0"/>
+            <a:endParaRPr lang="en-US" dirty="0"/>
           </a:p>
           <a:p>
             <a:pPr marL="285750" indent="-285750">
@@ -8223,17 +6885,24 @@
               <a:buChar char="•"/>
             </a:pPr>
             <a:r>
-              <a:rPr lang="en-IN" dirty="0" err="1"/>
-              <a:t>XGBoost</a:t>
-            </a:r>
-            <a:endParaRPr lang="en-IN" dirty="0"/>
+              <a:rPr lang="en-US" dirty="0" smtClean="0"/>
+              <a:t>Integrate a </a:t>
+            </a:r>
+            <a:r>
+              <a:rPr lang="en-US" dirty="0" err="1" smtClean="0"/>
+              <a:t>chatbot</a:t>
+            </a:r>
+            <a:r>
+              <a:rPr lang="en-US" dirty="0" smtClean="0"/>
+              <a:t> in UI</a:t>
+            </a:r>
           </a:p>
           <a:p>
             <a:pPr marL="285750" indent="-285750">
               <a:buFont typeface="Arial" panose="020B0604020202020204" pitchFamily="34" charset="0"/>
               <a:buChar char="•"/>
             </a:pPr>
-            <a:endParaRPr lang="en-IN" dirty="0"/>
+            <a:endParaRPr lang="en-US" dirty="0"/>
           </a:p>
           <a:p>
             <a:pPr marL="285750" indent="-285750">
@@ -8241,18 +6910,10 @@
               <a:buChar char="•"/>
             </a:pPr>
             <a:r>
-              <a:rPr lang="en-IN" dirty="0"/>
-              <a:t>LSTM</a:t>
-            </a:r>
-          </a:p>
-          <a:p>
+              <a:rPr lang="en-US" dirty="0" smtClean="0"/>
+              <a:t>Integrate a weather agent</a:t>
+            </a:r>
             <a:endParaRPr lang="en-IN" dirty="0"/>
-          </a:p>
-          <a:p>
-            <a:r>
-              <a:rPr lang="en-IN" dirty="0"/>
-              <a:t>Improve prediction accuracy for 1-year and 5-year forecasts.</a:t>
-            </a:r>
           </a:p>
         </p:txBody>
       </p:sp>
@@ -8771,297 +7432,6 @@
                                   </p:childTnLst>
                                 </p:cTn>
                               </p:par>
-                              <p:par>
-                                <p:cTn id="30" presetID="53" presetClass="entr" presetSubtype="16" fill="hold" nodeType="withEffect">
-                                  <p:stCondLst>
-                                    <p:cond delay="0"/>
-                                  </p:stCondLst>
-                                  <p:childTnLst>
-                                    <p:set>
-                                      <p:cBhvr>
-                                        <p:cTn id="31" dur="1" fill="hold">
-                                          <p:stCondLst>
-                                            <p:cond delay="0"/>
-                                          </p:stCondLst>
-                                        </p:cTn>
-                                        <p:tgtEl>
-                                          <p:spTgt spid="2">
-                                            <p:txEl>
-                                              <p:pRg st="10" end="10"/>
-                                            </p:txEl>
-                                          </p:spTgt>
-                                        </p:tgtEl>
-                                        <p:attrNameLst>
-                                          <p:attrName>style.visibility</p:attrName>
-                                        </p:attrNameLst>
-                                      </p:cBhvr>
-                                      <p:to>
-                                        <p:strVal val="visible"/>
-                                      </p:to>
-                                    </p:set>
-                                    <p:anim calcmode="lin" valueType="num">
-                                      <p:cBhvr>
-                                        <p:cTn id="32" dur="500" fill="hold"/>
-                                        <p:tgtEl>
-                                          <p:spTgt spid="2">
-                                            <p:txEl>
-                                              <p:pRg st="10" end="10"/>
-                                            </p:txEl>
-                                          </p:spTgt>
-                                        </p:tgtEl>
-                                        <p:attrNameLst>
-                                          <p:attrName>ppt_w</p:attrName>
-                                        </p:attrNameLst>
-                                      </p:cBhvr>
-                                      <p:tavLst>
-                                        <p:tav tm="0">
-                                          <p:val>
-                                            <p:fltVal val="0"/>
-                                          </p:val>
-                                        </p:tav>
-                                        <p:tav tm="100000">
-                                          <p:val>
-                                            <p:strVal val="#ppt_w"/>
-                                          </p:val>
-                                        </p:tav>
-                                      </p:tavLst>
-                                    </p:anim>
-                                    <p:anim calcmode="lin" valueType="num">
-                                      <p:cBhvr>
-                                        <p:cTn id="33" dur="500" fill="hold"/>
-                                        <p:tgtEl>
-                                          <p:spTgt spid="2">
-                                            <p:txEl>
-                                              <p:pRg st="10" end="10"/>
-                                            </p:txEl>
-                                          </p:spTgt>
-                                        </p:tgtEl>
-                                        <p:attrNameLst>
-                                          <p:attrName>ppt_h</p:attrName>
-                                        </p:attrNameLst>
-                                      </p:cBhvr>
-                                      <p:tavLst>
-                                        <p:tav tm="0">
-                                          <p:val>
-                                            <p:fltVal val="0"/>
-                                          </p:val>
-                                        </p:tav>
-                                        <p:tav tm="100000">
-                                          <p:val>
-                                            <p:strVal val="#ppt_h"/>
-                                          </p:val>
-                                        </p:tav>
-                                      </p:tavLst>
-                                    </p:anim>
-                                    <p:animEffect transition="in" filter="fade">
-                                      <p:cBhvr>
-                                        <p:cTn id="34" dur="500"/>
-                                        <p:tgtEl>
-                                          <p:spTgt spid="2">
-                                            <p:txEl>
-                                              <p:pRg st="10" end="10"/>
-                                            </p:txEl>
-                                          </p:spTgt>
-                                        </p:tgtEl>
-                                      </p:cBhvr>
-                                    </p:animEffect>
-                                  </p:childTnLst>
-                                </p:cTn>
-                              </p:par>
-                              <p:par>
-                                <p:cTn id="35" presetID="53" presetClass="entr" presetSubtype="16" fill="hold" nodeType="withEffect">
-                                  <p:stCondLst>
-                                    <p:cond delay="0"/>
-                                  </p:stCondLst>
-                                  <p:childTnLst>
-                                    <p:set>
-                                      <p:cBhvr>
-                                        <p:cTn id="36" dur="1" fill="hold">
-                                          <p:stCondLst>
-                                            <p:cond delay="0"/>
-                                          </p:stCondLst>
-                                        </p:cTn>
-                                        <p:tgtEl>
-                                          <p:spTgt spid="2">
-                                            <p:txEl>
-                                              <p:pRg st="12" end="12"/>
-                                            </p:txEl>
-                                          </p:spTgt>
-                                        </p:tgtEl>
-                                        <p:attrNameLst>
-                                          <p:attrName>style.visibility</p:attrName>
-                                        </p:attrNameLst>
-                                      </p:cBhvr>
-                                      <p:to>
-                                        <p:strVal val="visible"/>
-                                      </p:to>
-                                    </p:set>
-                                    <p:anim calcmode="lin" valueType="num">
-                                      <p:cBhvr>
-                                        <p:cTn id="37" dur="500" fill="hold"/>
-                                        <p:tgtEl>
-                                          <p:spTgt spid="2">
-                                            <p:txEl>
-                                              <p:pRg st="12" end="12"/>
-                                            </p:txEl>
-                                          </p:spTgt>
-                                        </p:tgtEl>
-                                        <p:attrNameLst>
-                                          <p:attrName>ppt_w</p:attrName>
-                                        </p:attrNameLst>
-                                      </p:cBhvr>
-                                      <p:tavLst>
-                                        <p:tav tm="0">
-                                          <p:val>
-                                            <p:fltVal val="0"/>
-                                          </p:val>
-                                        </p:tav>
-                                        <p:tav tm="100000">
-                                          <p:val>
-                                            <p:strVal val="#ppt_w"/>
-                                          </p:val>
-                                        </p:tav>
-                                      </p:tavLst>
-                                    </p:anim>
-                                    <p:anim calcmode="lin" valueType="num">
-                                      <p:cBhvr>
-                                        <p:cTn id="38" dur="500" fill="hold"/>
-                                        <p:tgtEl>
-                                          <p:spTgt spid="2">
-                                            <p:txEl>
-                                              <p:pRg st="12" end="12"/>
-                                            </p:txEl>
-                                          </p:spTgt>
-                                        </p:tgtEl>
-                                        <p:attrNameLst>
-                                          <p:attrName>ppt_h</p:attrName>
-                                        </p:attrNameLst>
-                                      </p:cBhvr>
-                                      <p:tavLst>
-                                        <p:tav tm="0">
-                                          <p:val>
-                                            <p:fltVal val="0"/>
-                                          </p:val>
-                                        </p:tav>
-                                        <p:tav tm="100000">
-                                          <p:val>
-                                            <p:strVal val="#ppt_h"/>
-                                          </p:val>
-                                        </p:tav>
-                                      </p:tavLst>
-                                    </p:anim>
-                                    <p:animEffect transition="in" filter="fade">
-                                      <p:cBhvr>
-                                        <p:cTn id="39" dur="500"/>
-                                        <p:tgtEl>
-                                          <p:spTgt spid="2">
-                                            <p:txEl>
-                                              <p:pRg st="12" end="12"/>
-                                            </p:txEl>
-                                          </p:spTgt>
-                                        </p:tgtEl>
-                                      </p:cBhvr>
-                                    </p:animEffect>
-                                  </p:childTnLst>
-                                </p:cTn>
-                              </p:par>
-                              <p:par>
-                                <p:cTn id="40" presetID="53" presetClass="entr" presetSubtype="16" fill="hold" nodeType="withEffect">
-                                  <p:stCondLst>
-                                    <p:cond delay="0"/>
-                                  </p:stCondLst>
-                                  <p:childTnLst>
-                                    <p:set>
-                                      <p:cBhvr>
-                                        <p:cTn id="41" dur="1" fill="hold">
-                                          <p:stCondLst>
-                                            <p:cond delay="0"/>
-                                          </p:stCondLst>
-                                        </p:cTn>
-                                        <p:tgtEl>
-                                          <p:spTgt spid="2">
-                                            <p:txEl>
-                                              <p:pRg st="14" end="14"/>
-                                            </p:txEl>
-                                          </p:spTgt>
-                                        </p:tgtEl>
-                                        <p:attrNameLst>
-                                          <p:attrName>style.visibility</p:attrName>
-                                        </p:attrNameLst>
-                                      </p:cBhvr>
-                                      <p:to>
-                                        <p:strVal val="visible"/>
-                                      </p:to>
-                                    </p:set>
-                                    <p:anim calcmode="lin" valueType="num">
-                                      <p:cBhvr>
-                                        <p:cTn id="42" dur="500" fill="hold"/>
-                                        <p:tgtEl>
-                                          <p:spTgt spid="2">
-                                            <p:txEl>
-                                              <p:pRg st="14" end="14"/>
-                                            </p:txEl>
-                                          </p:spTgt>
-                                        </p:tgtEl>
-                                        <p:attrNameLst>
-                                          <p:attrName>ppt_w</p:attrName>
-                                        </p:attrNameLst>
-                                      </p:cBhvr>
-                                      <p:tavLst>
-                                        <p:tav tm="0">
-                                          <p:val>
-                                            <p:fltVal val="0"/>
-                                          </p:val>
-                                        </p:tav>
-                                        <p:tav tm="100000">
-                                          <p:val>
-                                            <p:strVal val="#ppt_w"/>
-                                          </p:val>
-                                        </p:tav>
-                                      </p:tavLst>
-                                    </p:anim>
-                                    <p:anim calcmode="lin" valueType="num">
-                                      <p:cBhvr>
-                                        <p:cTn id="43" dur="500" fill="hold"/>
-                                        <p:tgtEl>
-                                          <p:spTgt spid="2">
-                                            <p:txEl>
-                                              <p:pRg st="14" end="14"/>
-                                            </p:txEl>
-                                          </p:spTgt>
-                                        </p:tgtEl>
-                                        <p:attrNameLst>
-                                          <p:attrName>ppt_h</p:attrName>
-                                        </p:attrNameLst>
-                                      </p:cBhvr>
-                                      <p:tavLst>
-                                        <p:tav tm="0">
-                                          <p:val>
-                                            <p:fltVal val="0"/>
-                                          </p:val>
-                                        </p:tav>
-                                        <p:tav tm="100000">
-                                          <p:val>
-                                            <p:strVal val="#ppt_h"/>
-                                          </p:val>
-                                        </p:tav>
-                                      </p:tavLst>
-                                    </p:anim>
-                                    <p:animEffect transition="in" filter="fade">
-                                      <p:cBhvr>
-                                        <p:cTn id="44" dur="500"/>
-                                        <p:tgtEl>
-                                          <p:spTgt spid="2">
-                                            <p:txEl>
-                                              <p:pRg st="14" end="14"/>
-                                            </p:txEl>
-                                          </p:spTgt>
-                                        </p:tgtEl>
-                                      </p:cBhvr>
-                                    </p:animEffect>
-                                  </p:childTnLst>
-                                </p:cTn>
-                              </p:par>
                             </p:childTnLst>
                           </p:cTn>
                         </p:par>
@@ -9093,7 +7463,7 @@
 </p:sld>
 </file>
 
-<file path=ppt/slides/slide9.xml><?xml version="1.0" encoding="utf-8"?>
+<file path=ppt/slides/slide8.xml><?xml version="1.0" encoding="utf-8"?>
 <p:sld xmlns:a="http://schemas.openxmlformats.org/drawingml/2006/main" xmlns:r="http://schemas.openxmlformats.org/officeDocument/2006/relationships" xmlns:p="http://schemas.openxmlformats.org/presentationml/2006/main">
   <p:cSld>
     <p:spTree>
@@ -9118,7 +7488,7 @@
         </p:nvSpPr>
         <p:spPr>
           <a:xfrm>
-            <a:off x="2672861" y="2461846"/>
+            <a:off x="2637692" y="1907931"/>
             <a:ext cx="7728438" cy="1569660"/>
           </a:xfrm>
           <a:prstGeom prst="rect">
@@ -9164,9 +7534,9 @@
 </file>
 
 <file path=ppt/theme/theme1.xml><?xml version="1.0" encoding="utf-8"?>
-<a:theme xmlns:a="http://schemas.openxmlformats.org/drawingml/2006/main" name="Slice">
+<a:theme xmlns:a="http://schemas.openxmlformats.org/drawingml/2006/main" name="View">
   <a:themeElements>
-    <a:clrScheme name="Slice">
+    <a:clrScheme name="View">
       <a:dk1>
         <a:sysClr val="windowText" lastClr="000000"/>
       </a:dk1>
@@ -9174,45 +7544,45 @@
         <a:sysClr val="window" lastClr="FFFFFF"/>
       </a:lt1>
       <a:dk2>
-        <a:srgbClr val="146194"/>
+        <a:srgbClr val="564B3C"/>
       </a:dk2>
       <a:lt2>
-        <a:srgbClr val="76DBF4"/>
+        <a:srgbClr val="ECEDD1"/>
       </a:lt2>
       <a:accent1>
-        <a:srgbClr val="052F61"/>
+        <a:srgbClr val="93A299"/>
       </a:accent1>
       <a:accent2>
-        <a:srgbClr val="A50E82"/>
+        <a:srgbClr val="CB4B30"/>
       </a:accent2>
       <a:accent3>
-        <a:srgbClr val="14967C"/>
+        <a:srgbClr val="B5AE53"/>
       </a:accent3>
       <a:accent4>
-        <a:srgbClr val="6A9E1F"/>
+        <a:srgbClr val="6F6A7A"/>
       </a:accent4>
       <a:accent5>
-        <a:srgbClr val="E87D37"/>
+        <a:srgbClr val="E8B54D"/>
       </a:accent5>
       <a:accent6>
-        <a:srgbClr val="C62324"/>
+        <a:srgbClr val="8A7952"/>
       </a:accent6>
       <a:hlink>
-        <a:srgbClr val="0D2E46"/>
+        <a:srgbClr val="9F9F0B"/>
       </a:hlink>
       <a:folHlink>
-        <a:srgbClr val="356A95"/>
+        <a:srgbClr val="B2B2B2"/>
       </a:folHlink>
     </a:clrScheme>
-    <a:fontScheme name="Slice">
+    <a:fontScheme name="View">
       <a:majorFont>
-        <a:latin typeface="Century Gothic" panose="020B0502020202020204"/>
+        <a:latin typeface="Century Schoolbook" panose="02040604050505020304"/>
         <a:ea typeface=""/>
         <a:cs typeface=""/>
-        <a:font script="Jpan" typeface="メイリオ"/>
-        <a:font script="Hang" typeface="HY중고딕"/>
-        <a:font script="Hans" typeface="幼圆"/>
-        <a:font script="Hant" typeface="微軟正黑體"/>
+        <a:font script="Jpan" typeface="ＭＳ ゴシック"/>
+        <a:font script="Hang" typeface="맑은 고딕"/>
+        <a:font script="Hans" typeface="宋体"/>
+        <a:font script="Hant" typeface="新細明體"/>
         <a:font script="Arab" typeface="Tahoma"/>
         <a:font script="Hebr" typeface="Gisha"/>
         <a:font script="Thai" typeface="DilleniaUPC"/>
@@ -9241,13 +7611,13 @@
         <a:font script="Geor" typeface="Sylfaen"/>
       </a:majorFont>
       <a:minorFont>
-        <a:latin typeface="Century Gothic" panose="020B0502020202020204"/>
+        <a:latin typeface="Century Schoolbook" panose="02040604050505020304"/>
         <a:ea typeface=""/>
         <a:cs typeface=""/>
-        <a:font script="Jpan" typeface="メイリオ"/>
-        <a:font script="Hang" typeface="HY중고딕"/>
-        <a:font script="Hans" typeface="幼圆"/>
-        <a:font script="Hant" typeface="微軟正黑體"/>
+        <a:font script="Jpan" typeface="ＭＳ ゴシック"/>
+        <a:font script="Hang" typeface="맑은 고딕"/>
+        <a:font script="Hans" typeface="宋体"/>
+        <a:font script="Hant" typeface="新細明體"/>
         <a:font script="Arab" typeface="Tahoma"/>
         <a:font script="Hebr" typeface="Gisha"/>
         <a:font script="Thai" typeface="DilleniaUPC"/>
@@ -9271,77 +7641,49 @@
         <a:font script="Laoo" typeface="DokChampa"/>
         <a:font script="Sinh" typeface="Iskoola Pota"/>
         <a:font script="Mong" typeface="Mongolian Baiti"/>
-        <a:font script="Viet" typeface="Tahoma"/>
+        <a:font script="Viet" typeface="Verdana"/>
         <a:font script="Uigh" typeface="Microsoft Uighur"/>
         <a:font script="Geor" typeface="Sylfaen"/>
       </a:minorFont>
     </a:fontScheme>
-    <a:fmtScheme name="Slice">
+    <a:fmtScheme name="View">
       <a:fillStyleLst>
         <a:solidFill>
           <a:schemeClr val="phClr"/>
         </a:solidFill>
-        <a:gradFill rotWithShape="1">
-          <a:gsLst>
-            <a:gs pos="0">
-              <a:schemeClr val="phClr">
-                <a:tint val="62000"/>
-                <a:hueMod val="94000"/>
-                <a:satMod val="140000"/>
-                <a:lumMod val="110000"/>
-              </a:schemeClr>
-            </a:gs>
-            <a:gs pos="100000">
-              <a:schemeClr val="phClr">
-                <a:tint val="84000"/>
-                <a:satMod val="160000"/>
-              </a:schemeClr>
-            </a:gs>
-          </a:gsLst>
-          <a:lin ang="5400000" scaled="0"/>
-        </a:gradFill>
-        <a:gradFill rotWithShape="1">
-          <a:gsLst>
-            <a:gs pos="0">
-              <a:schemeClr val="phClr">
-                <a:tint val="98000"/>
-                <a:hueMod val="94000"/>
-                <a:satMod val="130000"/>
-                <a:lumMod val="128000"/>
-              </a:schemeClr>
-            </a:gs>
-            <a:gs pos="100000">
-              <a:schemeClr val="phClr">
-                <a:shade val="94000"/>
-                <a:lumMod val="88000"/>
-              </a:schemeClr>
-            </a:gs>
-          </a:gsLst>
-          <a:lin ang="5400000" scaled="0"/>
-        </a:gradFill>
+        <a:solidFill>
+          <a:schemeClr val="phClr">
+            <a:tint val="60000"/>
+            <a:satMod val="120000"/>
+          </a:schemeClr>
+        </a:solidFill>
+        <a:solidFill>
+          <a:schemeClr val="phClr">
+            <a:shade val="75000"/>
+            <a:satMod val="130000"/>
+          </a:schemeClr>
+        </a:solidFill>
       </a:fillStyleLst>
       <a:lnStyleLst>
-        <a:ln w="9525" cap="rnd" cmpd="sng" algn="ctr">
+        <a:ln w="9525" cap="flat" cmpd="sng" algn="ctr">
           <a:solidFill>
-            <a:schemeClr val="phClr">
-              <a:tint val="76000"/>
-              <a:alpha val="60000"/>
-              <a:hueMod val="94000"/>
-            </a:schemeClr>
+            <a:schemeClr val="phClr"/>
           </a:solidFill>
           <a:prstDash val="solid"/>
         </a:ln>
-        <a:ln w="15875" cap="rnd" cmpd="sng" algn="ctr">
+        <a:ln w="13970" cap="flat" cmpd="sng" algn="ctr">
           <a:solidFill>
-            <a:schemeClr val="phClr">
-              <a:hueMod val="94000"/>
-            </a:schemeClr>
+            <a:schemeClr val="phClr"/>
           </a:solidFill>
           <a:prstDash val="solid"/>
         </a:ln>
-        <a:ln w="28575" cap="rnd" cmpd="sng" algn="ctr">
+        <a:ln w="17145" cap="flat" cmpd="sng" algn="ctr">
           <a:solidFill>
-            <a:schemeClr val="phClr"/>
+            <a:schemeClr val="phClr">
+              <a:shade val="95000"/>
+              <a:alpha val="95000"/>
+              <a:satMod val="150000"/>
+            </a:schemeClr>
           </a:solidFill>
           <a:prstDash val="solid"/>
         </a:ln>
@@ -9352,18 +7694,9 @@
         </a:effectStyle>
         <a:effectStyle>
           <a:effectLst>
-            <a:innerShdw blurRad="25400" dist="12700" dir="13500000">
+            <a:outerShdw blurRad="50800" dist="15240" dir="5400000" algn="tl" rotWithShape="0">
               <a:srgbClr val="000000">
-                <a:alpha val="45000"/>
-              </a:srgbClr>
-            </a:innerShdw>
-          </a:effectLst>
-        </a:effectStyle>
-        <a:effectStyle>
-          <a:effectLst>
-            <a:outerShdw blurRad="50800" dist="38100" dir="5400000" rotWithShape="0">
-              <a:srgbClr val="000000">
-                <a:alpha val="46000"/>
+                <a:alpha val="75000"/>
               </a:srgbClr>
             </a:outerShdw>
           </a:effectLst>
@@ -9371,10 +7704,40 @@
             <a:camera prst="orthographicFront">
               <a:rot lat="0" lon="0" rev="0"/>
             </a:camera>
-            <a:lightRig rig="threePt" dir="t"/>
+            <a:lightRig rig="brightRoom" dir="tl"/>
           </a:scene3d>
-          <a:sp3d prstMaterial="plastic">
-            <a:bevelT w="25400" h="25400"/>
+          <a:sp3d contourW="9525" prstMaterial="flat">
+            <a:bevelT w="0" h="0" prst="coolSlant"/>
+            <a:contourClr>
+              <a:schemeClr val="phClr">
+                <a:shade val="35000"/>
+                <a:satMod val="130000"/>
+              </a:schemeClr>
+            </a:contourClr>
+          </a:sp3d>
+        </a:effectStyle>
+        <a:effectStyle>
+          <a:effectLst>
+            <a:outerShdw blurRad="76200" dist="25400" dir="5400000" algn="tl" rotWithShape="0">
+              <a:srgbClr val="000000">
+                <a:alpha val="55000"/>
+              </a:srgbClr>
+            </a:outerShdw>
+          </a:effectLst>
+          <a:scene3d>
+            <a:camera prst="orthographicFront">
+              <a:rot lat="0" lon="0" rev="0"/>
+            </a:camera>
+            <a:lightRig rig="brightRoom" dir="tl"/>
+          </a:scene3d>
+          <a:sp3d contourW="19050" prstMaterial="flat">
+            <a:bevelT w="0" h="0" prst="coolSlant"/>
+            <a:contourClr>
+              <a:schemeClr val="phClr">
+                <a:shade val="35000"/>
+                <a:satMod val="140000"/>
+              </a:schemeClr>
+            </a:contourClr>
           </a:sp3d>
         </a:effectStyle>
       </a:effectStyleLst>
@@ -9382,46 +7745,32 @@
         <a:solidFill>
           <a:schemeClr val="phClr"/>
         </a:solidFill>
+        <a:solidFill>
+          <a:schemeClr val="phClr">
+            <a:tint val="95000"/>
+            <a:satMod val="170000"/>
+          </a:schemeClr>
+        </a:solidFill>
         <a:gradFill rotWithShape="1">
           <a:gsLst>
-            <a:gs pos="10000">
+            <a:gs pos="0">
               <a:schemeClr val="phClr">
-                <a:tint val="97000"/>
-                <a:hueMod val="92000"/>
-                <a:satMod val="169000"/>
-                <a:lumMod val="164000"/>
+                <a:tint val="94000"/>
+                <a:shade val="98000"/>
+                <a:satMod val="130000"/>
+                <a:lumMod val="102000"/>
               </a:schemeClr>
             </a:gs>
             <a:gs pos="100000">
               <a:schemeClr val="phClr">
-                <a:shade val="96000"/>
-                <a:satMod val="120000"/>
-                <a:lumMod val="90000"/>
-              </a:schemeClr>
-            </a:gs>
-          </a:gsLst>
-          <a:lin ang="6120000" scaled="1"/>
-        </a:gradFill>
-        <a:gradFill rotWithShape="1">
-          <a:gsLst>
-            <a:gs pos="0">
-              <a:schemeClr val="phClr">
-                <a:tint val="97000"/>
-                <a:hueMod val="92000"/>
-                <a:satMod val="169000"/>
-                <a:lumMod val="164000"/>
-              </a:schemeClr>
-            </a:gs>
-            <a:gs pos="100000">
-              <a:schemeClr val="phClr">
-                <a:shade val="96000"/>
-                <a:satMod val="120000"/>
-                <a:lumMod val="90000"/>
+                <a:tint val="98000"/>
+                <a:shade val="78000"/>
+                <a:satMod val="140000"/>
               </a:schemeClr>
             </a:gs>
           </a:gsLst>
           <a:path path="circle">
-            <a:fillToRect b="100000"/>
+            <a:fillToRect l="100000" t="100000" r="100000" b="100000"/>
           </a:path>
         </a:gradFill>
       </a:bgFillStyleLst>
@@ -9431,7 +7780,7 @@
   <a:extraClrSchemeLst/>
   <a:extLst>
     <a:ext uri="{05A4C25C-085E-4340-85A3-A5531E510DB2}">
-      <thm15:themeFamily xmlns:thm15="http://schemas.microsoft.com/office/thememl/2012/main" name="Slice" id="{0507925B-6AC9-4358-8E18-C330545D08F8}" vid="{13FEC7C6-62A9-40C4-99D2-581AACACAA2F}"/>
+      <thm15:themeFamily xmlns:thm15="http://schemas.microsoft.com/office/thememl/2012/main" name="View" id="{BA0EB5A6-F2D4-4F82-977B-64ADEE4A2A69}" vid="{3866257B-E5CE-4C43-9210-F2DE76BE10B5}"/>
     </a:ext>
   </a:extLst>
 </a:theme>

--- a/Project Presentation.pptx
+++ b/Project Presentation.pptx
@@ -11,8 +11,11 @@
     <p:sldId id="258" r:id="rId5"/>
     <p:sldId id="266" r:id="rId6"/>
     <p:sldId id="268" r:id="rId7"/>
-    <p:sldId id="265" r:id="rId8"/>
-    <p:sldId id="267" r:id="rId9"/>
+    <p:sldId id="270" r:id="rId8"/>
+    <p:sldId id="271" r:id="rId9"/>
+    <p:sldId id="269" r:id="rId10"/>
+    <p:sldId id="265" r:id="rId11"/>
+    <p:sldId id="267" r:id="rId12"/>
   </p:sldIdLst>
   <p:sldSz cx="12192000" cy="6858000"/>
   <p:notesSz cx="6858000" cy="9144000"/>
@@ -3543,6 +3546,759 @@
 </p:sld>
 </file>
 
+<file path=ppt/slides/slide10.xml><?xml version="1.0" encoding="utf-8"?>
+<p:sld xmlns:a="http://schemas.openxmlformats.org/drawingml/2006/main" xmlns:r="http://schemas.openxmlformats.org/officeDocument/2006/relationships" xmlns:p="http://schemas.openxmlformats.org/presentationml/2006/main">
+  <p:cSld>
+    <p:spTree>
+      <p:nvGrpSpPr>
+        <p:cNvPr id="1" name=""/>
+        <p:cNvGrpSpPr/>
+        <p:nvPr/>
+      </p:nvGrpSpPr>
+      <p:grpSpPr>
+        <a:xfrm>
+          <a:off x="0" y="0"/>
+          <a:ext cx="0" cy="0"/>
+          <a:chOff x="0" y="0"/>
+          <a:chExt cx="0" cy="0"/>
+        </a:xfrm>
+      </p:grpSpPr>
+      <p:sp>
+        <p:nvSpPr>
+          <p:cNvPr id="2" name="TextBox 1"/>
+          <p:cNvSpPr txBox="1"/>
+          <p:nvPr/>
+        </p:nvSpPr>
+        <p:spPr>
+          <a:xfrm>
+            <a:off x="738556" y="1661745"/>
+            <a:ext cx="11139854" cy="2739211"/>
+          </a:xfrm>
+          <a:prstGeom prst="rect">
+            <a:avLst/>
+          </a:prstGeom>
+          <a:noFill/>
+        </p:spPr>
+        <p:txBody>
+          <a:bodyPr wrap="square" rtlCol="0">
+            <a:spAutoFit/>
+          </a:bodyPr>
+          <a:lstStyle/>
+          <a:p>
+            <a:r>
+              <a:rPr lang="en-IN" sz="2800" dirty="0" smtClean="0">
+                <a:solidFill>
+                  <a:schemeClr val="bg2">
+                    <a:lumMod val="75000"/>
+                  </a:schemeClr>
+                </a:solidFill>
+              </a:rPr>
+              <a:t>Objectives for Milestone 3:</a:t>
+            </a:r>
+            <a:endParaRPr lang="en-IN" dirty="0" smtClean="0">
+              <a:solidFill>
+                <a:schemeClr val="bg2">
+                  <a:lumMod val="75000"/>
+                </a:schemeClr>
+              </a:solidFill>
+            </a:endParaRPr>
+          </a:p>
+          <a:p>
+            <a:endParaRPr lang="en-IN" dirty="0"/>
+          </a:p>
+          <a:p>
+            <a:pPr marL="285750" indent="-285750">
+              <a:buFont typeface="Arial" panose="020B0604020202020204" pitchFamily="34" charset="0"/>
+              <a:buChar char="•"/>
+            </a:pPr>
+            <a:r>
+              <a:rPr lang="en-IN" dirty="0"/>
+              <a:t>Implement </a:t>
+            </a:r>
+            <a:r>
+              <a:rPr lang="en-IN" dirty="0" smtClean="0"/>
+              <a:t>Backend using Python and connect it to frontend</a:t>
+            </a:r>
+            <a:endParaRPr lang="en-IN" dirty="0"/>
+          </a:p>
+          <a:p>
+            <a:pPr marL="285750" indent="-285750">
+              <a:buFont typeface="Arial" panose="020B0604020202020204" pitchFamily="34" charset="0"/>
+              <a:buChar char="•"/>
+            </a:pPr>
+            <a:endParaRPr lang="en-US" dirty="0"/>
+          </a:p>
+          <a:p>
+            <a:pPr marL="285750" indent="-285750">
+              <a:buFont typeface="Arial" panose="020B0604020202020204" pitchFamily="34" charset="0"/>
+              <a:buChar char="•"/>
+            </a:pPr>
+            <a:r>
+              <a:rPr lang="en-US" dirty="0" smtClean="0"/>
+              <a:t>Improve UI responsiveness</a:t>
+            </a:r>
+          </a:p>
+          <a:p>
+            <a:pPr marL="285750" indent="-285750">
+              <a:buFont typeface="Arial" panose="020B0604020202020204" pitchFamily="34" charset="0"/>
+              <a:buChar char="•"/>
+            </a:pPr>
+            <a:endParaRPr lang="en-US" dirty="0"/>
+          </a:p>
+          <a:p>
+            <a:pPr marL="285750" indent="-285750">
+              <a:buFont typeface="Arial" panose="020B0604020202020204" pitchFamily="34" charset="0"/>
+              <a:buChar char="•"/>
+            </a:pPr>
+            <a:r>
+              <a:rPr lang="en-US" dirty="0" smtClean="0"/>
+              <a:t>Integrate a </a:t>
+            </a:r>
+            <a:r>
+              <a:rPr lang="en-US" dirty="0" err="1" smtClean="0"/>
+              <a:t>chatbot</a:t>
+            </a:r>
+            <a:r>
+              <a:rPr lang="en-US" dirty="0" smtClean="0"/>
+              <a:t> in UI</a:t>
+            </a:r>
+          </a:p>
+          <a:p>
+            <a:pPr marL="285750" indent="-285750">
+              <a:buFont typeface="Arial" panose="020B0604020202020204" pitchFamily="34" charset="0"/>
+              <a:buChar char="•"/>
+            </a:pPr>
+            <a:endParaRPr lang="en-US" dirty="0"/>
+          </a:p>
+          <a:p>
+            <a:pPr marL="285750" indent="-285750">
+              <a:buFont typeface="Arial" panose="020B0604020202020204" pitchFamily="34" charset="0"/>
+              <a:buChar char="•"/>
+            </a:pPr>
+            <a:r>
+              <a:rPr lang="en-US" dirty="0" smtClean="0"/>
+              <a:t>Integrate a weather agent</a:t>
+            </a:r>
+            <a:endParaRPr lang="en-IN" dirty="0"/>
+          </a:p>
+        </p:txBody>
+      </p:sp>
+    </p:spTree>
+    <p:extLst>
+      <p:ext uri="{BB962C8B-B14F-4D97-AF65-F5344CB8AC3E}">
+        <p14:creationId xmlns:p14="http://schemas.microsoft.com/office/powerpoint/2010/main" val="215316"/>
+      </p:ext>
+    </p:extLst>
+  </p:cSld>
+  <p:clrMapOvr>
+    <a:masterClrMapping/>
+  </p:clrMapOvr>
+  <p:timing>
+    <p:tnLst>
+      <p:par>
+        <p:cTn id="1" dur="indefinite" restart="never" nodeType="tmRoot">
+          <p:childTnLst>
+            <p:seq concurrent="1" nextAc="seek">
+              <p:cTn id="2" dur="indefinite" nodeType="mainSeq">
+                <p:childTnLst>
+                  <p:par>
+                    <p:cTn id="3" fill="hold">
+                      <p:stCondLst>
+                        <p:cond delay="indefinite"/>
+                      </p:stCondLst>
+                      <p:childTnLst>
+                        <p:par>
+                          <p:cTn id="4" fill="hold">
+                            <p:stCondLst>
+                              <p:cond delay="0"/>
+                            </p:stCondLst>
+                            <p:childTnLst>
+                              <p:par>
+                                <p:cTn id="5" presetID="53" presetClass="entr" presetSubtype="16" fill="hold" nodeType="clickEffect">
+                                  <p:stCondLst>
+                                    <p:cond delay="0"/>
+                                  </p:stCondLst>
+                                  <p:childTnLst>
+                                    <p:set>
+                                      <p:cBhvr>
+                                        <p:cTn id="6" dur="1" fill="hold">
+                                          <p:stCondLst>
+                                            <p:cond delay="0"/>
+                                          </p:stCondLst>
+                                        </p:cTn>
+                                        <p:tgtEl>
+                                          <p:spTgt spid="2">
+                                            <p:txEl>
+                                              <p:pRg st="0" end="0"/>
+                                            </p:txEl>
+                                          </p:spTgt>
+                                        </p:tgtEl>
+                                        <p:attrNameLst>
+                                          <p:attrName>style.visibility</p:attrName>
+                                        </p:attrNameLst>
+                                      </p:cBhvr>
+                                      <p:to>
+                                        <p:strVal val="visible"/>
+                                      </p:to>
+                                    </p:set>
+                                    <p:anim calcmode="lin" valueType="num">
+                                      <p:cBhvr>
+                                        <p:cTn id="7" dur="500" fill="hold"/>
+                                        <p:tgtEl>
+                                          <p:spTgt spid="2">
+                                            <p:txEl>
+                                              <p:pRg st="0" end="0"/>
+                                            </p:txEl>
+                                          </p:spTgt>
+                                        </p:tgtEl>
+                                        <p:attrNameLst>
+                                          <p:attrName>ppt_w</p:attrName>
+                                        </p:attrNameLst>
+                                      </p:cBhvr>
+                                      <p:tavLst>
+                                        <p:tav tm="0">
+                                          <p:val>
+                                            <p:fltVal val="0"/>
+                                          </p:val>
+                                        </p:tav>
+                                        <p:tav tm="100000">
+                                          <p:val>
+                                            <p:strVal val="#ppt_w"/>
+                                          </p:val>
+                                        </p:tav>
+                                      </p:tavLst>
+                                    </p:anim>
+                                    <p:anim calcmode="lin" valueType="num">
+                                      <p:cBhvr>
+                                        <p:cTn id="8" dur="500" fill="hold"/>
+                                        <p:tgtEl>
+                                          <p:spTgt spid="2">
+                                            <p:txEl>
+                                              <p:pRg st="0" end="0"/>
+                                            </p:txEl>
+                                          </p:spTgt>
+                                        </p:tgtEl>
+                                        <p:attrNameLst>
+                                          <p:attrName>ppt_h</p:attrName>
+                                        </p:attrNameLst>
+                                      </p:cBhvr>
+                                      <p:tavLst>
+                                        <p:tav tm="0">
+                                          <p:val>
+                                            <p:fltVal val="0"/>
+                                          </p:val>
+                                        </p:tav>
+                                        <p:tav tm="100000">
+                                          <p:val>
+                                            <p:strVal val="#ppt_h"/>
+                                          </p:val>
+                                        </p:tav>
+                                      </p:tavLst>
+                                    </p:anim>
+                                    <p:animEffect transition="in" filter="fade">
+                                      <p:cBhvr>
+                                        <p:cTn id="9" dur="500"/>
+                                        <p:tgtEl>
+                                          <p:spTgt spid="2">
+                                            <p:txEl>
+                                              <p:pRg st="0" end="0"/>
+                                            </p:txEl>
+                                          </p:spTgt>
+                                        </p:tgtEl>
+                                      </p:cBhvr>
+                                    </p:animEffect>
+                                  </p:childTnLst>
+                                </p:cTn>
+                              </p:par>
+                              <p:par>
+                                <p:cTn id="10" presetID="53" presetClass="entr" presetSubtype="16" fill="hold" nodeType="withEffect">
+                                  <p:stCondLst>
+                                    <p:cond delay="0"/>
+                                  </p:stCondLst>
+                                  <p:childTnLst>
+                                    <p:set>
+                                      <p:cBhvr>
+                                        <p:cTn id="11" dur="1" fill="hold">
+                                          <p:stCondLst>
+                                            <p:cond delay="0"/>
+                                          </p:stCondLst>
+                                        </p:cTn>
+                                        <p:tgtEl>
+                                          <p:spTgt spid="2">
+                                            <p:txEl>
+                                              <p:pRg st="2" end="2"/>
+                                            </p:txEl>
+                                          </p:spTgt>
+                                        </p:tgtEl>
+                                        <p:attrNameLst>
+                                          <p:attrName>style.visibility</p:attrName>
+                                        </p:attrNameLst>
+                                      </p:cBhvr>
+                                      <p:to>
+                                        <p:strVal val="visible"/>
+                                      </p:to>
+                                    </p:set>
+                                    <p:anim calcmode="lin" valueType="num">
+                                      <p:cBhvr>
+                                        <p:cTn id="12" dur="500" fill="hold"/>
+                                        <p:tgtEl>
+                                          <p:spTgt spid="2">
+                                            <p:txEl>
+                                              <p:pRg st="2" end="2"/>
+                                            </p:txEl>
+                                          </p:spTgt>
+                                        </p:tgtEl>
+                                        <p:attrNameLst>
+                                          <p:attrName>ppt_w</p:attrName>
+                                        </p:attrNameLst>
+                                      </p:cBhvr>
+                                      <p:tavLst>
+                                        <p:tav tm="0">
+                                          <p:val>
+                                            <p:fltVal val="0"/>
+                                          </p:val>
+                                        </p:tav>
+                                        <p:tav tm="100000">
+                                          <p:val>
+                                            <p:strVal val="#ppt_w"/>
+                                          </p:val>
+                                        </p:tav>
+                                      </p:tavLst>
+                                    </p:anim>
+                                    <p:anim calcmode="lin" valueType="num">
+                                      <p:cBhvr>
+                                        <p:cTn id="13" dur="500" fill="hold"/>
+                                        <p:tgtEl>
+                                          <p:spTgt spid="2">
+                                            <p:txEl>
+                                              <p:pRg st="2" end="2"/>
+                                            </p:txEl>
+                                          </p:spTgt>
+                                        </p:tgtEl>
+                                        <p:attrNameLst>
+                                          <p:attrName>ppt_h</p:attrName>
+                                        </p:attrNameLst>
+                                      </p:cBhvr>
+                                      <p:tavLst>
+                                        <p:tav tm="0">
+                                          <p:val>
+                                            <p:fltVal val="0"/>
+                                          </p:val>
+                                        </p:tav>
+                                        <p:tav tm="100000">
+                                          <p:val>
+                                            <p:strVal val="#ppt_h"/>
+                                          </p:val>
+                                        </p:tav>
+                                      </p:tavLst>
+                                    </p:anim>
+                                    <p:animEffect transition="in" filter="fade">
+                                      <p:cBhvr>
+                                        <p:cTn id="14" dur="500"/>
+                                        <p:tgtEl>
+                                          <p:spTgt spid="2">
+                                            <p:txEl>
+                                              <p:pRg st="2" end="2"/>
+                                            </p:txEl>
+                                          </p:spTgt>
+                                        </p:tgtEl>
+                                      </p:cBhvr>
+                                    </p:animEffect>
+                                  </p:childTnLst>
+                                </p:cTn>
+                              </p:par>
+                              <p:par>
+                                <p:cTn id="15" presetID="53" presetClass="entr" presetSubtype="16" fill="hold" nodeType="withEffect">
+                                  <p:stCondLst>
+                                    <p:cond delay="0"/>
+                                  </p:stCondLst>
+                                  <p:childTnLst>
+                                    <p:set>
+                                      <p:cBhvr>
+                                        <p:cTn id="16" dur="1" fill="hold">
+                                          <p:stCondLst>
+                                            <p:cond delay="0"/>
+                                          </p:stCondLst>
+                                        </p:cTn>
+                                        <p:tgtEl>
+                                          <p:spTgt spid="2">
+                                            <p:txEl>
+                                              <p:pRg st="4" end="4"/>
+                                            </p:txEl>
+                                          </p:spTgt>
+                                        </p:tgtEl>
+                                        <p:attrNameLst>
+                                          <p:attrName>style.visibility</p:attrName>
+                                        </p:attrNameLst>
+                                      </p:cBhvr>
+                                      <p:to>
+                                        <p:strVal val="visible"/>
+                                      </p:to>
+                                    </p:set>
+                                    <p:anim calcmode="lin" valueType="num">
+                                      <p:cBhvr>
+                                        <p:cTn id="17" dur="500" fill="hold"/>
+                                        <p:tgtEl>
+                                          <p:spTgt spid="2">
+                                            <p:txEl>
+                                              <p:pRg st="4" end="4"/>
+                                            </p:txEl>
+                                          </p:spTgt>
+                                        </p:tgtEl>
+                                        <p:attrNameLst>
+                                          <p:attrName>ppt_w</p:attrName>
+                                        </p:attrNameLst>
+                                      </p:cBhvr>
+                                      <p:tavLst>
+                                        <p:tav tm="0">
+                                          <p:val>
+                                            <p:fltVal val="0"/>
+                                          </p:val>
+                                        </p:tav>
+                                        <p:tav tm="100000">
+                                          <p:val>
+                                            <p:strVal val="#ppt_w"/>
+                                          </p:val>
+                                        </p:tav>
+                                      </p:tavLst>
+                                    </p:anim>
+                                    <p:anim calcmode="lin" valueType="num">
+                                      <p:cBhvr>
+                                        <p:cTn id="18" dur="500" fill="hold"/>
+                                        <p:tgtEl>
+                                          <p:spTgt spid="2">
+                                            <p:txEl>
+                                              <p:pRg st="4" end="4"/>
+                                            </p:txEl>
+                                          </p:spTgt>
+                                        </p:tgtEl>
+                                        <p:attrNameLst>
+                                          <p:attrName>ppt_h</p:attrName>
+                                        </p:attrNameLst>
+                                      </p:cBhvr>
+                                      <p:tavLst>
+                                        <p:tav tm="0">
+                                          <p:val>
+                                            <p:fltVal val="0"/>
+                                          </p:val>
+                                        </p:tav>
+                                        <p:tav tm="100000">
+                                          <p:val>
+                                            <p:strVal val="#ppt_h"/>
+                                          </p:val>
+                                        </p:tav>
+                                      </p:tavLst>
+                                    </p:anim>
+                                    <p:animEffect transition="in" filter="fade">
+                                      <p:cBhvr>
+                                        <p:cTn id="19" dur="500"/>
+                                        <p:tgtEl>
+                                          <p:spTgt spid="2">
+                                            <p:txEl>
+                                              <p:pRg st="4" end="4"/>
+                                            </p:txEl>
+                                          </p:spTgt>
+                                        </p:tgtEl>
+                                      </p:cBhvr>
+                                    </p:animEffect>
+                                  </p:childTnLst>
+                                </p:cTn>
+                              </p:par>
+                              <p:par>
+                                <p:cTn id="20" presetID="53" presetClass="entr" presetSubtype="16" fill="hold" nodeType="withEffect">
+                                  <p:stCondLst>
+                                    <p:cond delay="0"/>
+                                  </p:stCondLst>
+                                  <p:childTnLst>
+                                    <p:set>
+                                      <p:cBhvr>
+                                        <p:cTn id="21" dur="1" fill="hold">
+                                          <p:stCondLst>
+                                            <p:cond delay="0"/>
+                                          </p:stCondLst>
+                                        </p:cTn>
+                                        <p:tgtEl>
+                                          <p:spTgt spid="2">
+                                            <p:txEl>
+                                              <p:pRg st="6" end="6"/>
+                                            </p:txEl>
+                                          </p:spTgt>
+                                        </p:tgtEl>
+                                        <p:attrNameLst>
+                                          <p:attrName>style.visibility</p:attrName>
+                                        </p:attrNameLst>
+                                      </p:cBhvr>
+                                      <p:to>
+                                        <p:strVal val="visible"/>
+                                      </p:to>
+                                    </p:set>
+                                    <p:anim calcmode="lin" valueType="num">
+                                      <p:cBhvr>
+                                        <p:cTn id="22" dur="500" fill="hold"/>
+                                        <p:tgtEl>
+                                          <p:spTgt spid="2">
+                                            <p:txEl>
+                                              <p:pRg st="6" end="6"/>
+                                            </p:txEl>
+                                          </p:spTgt>
+                                        </p:tgtEl>
+                                        <p:attrNameLst>
+                                          <p:attrName>ppt_w</p:attrName>
+                                        </p:attrNameLst>
+                                      </p:cBhvr>
+                                      <p:tavLst>
+                                        <p:tav tm="0">
+                                          <p:val>
+                                            <p:fltVal val="0"/>
+                                          </p:val>
+                                        </p:tav>
+                                        <p:tav tm="100000">
+                                          <p:val>
+                                            <p:strVal val="#ppt_w"/>
+                                          </p:val>
+                                        </p:tav>
+                                      </p:tavLst>
+                                    </p:anim>
+                                    <p:anim calcmode="lin" valueType="num">
+                                      <p:cBhvr>
+                                        <p:cTn id="23" dur="500" fill="hold"/>
+                                        <p:tgtEl>
+                                          <p:spTgt spid="2">
+                                            <p:txEl>
+                                              <p:pRg st="6" end="6"/>
+                                            </p:txEl>
+                                          </p:spTgt>
+                                        </p:tgtEl>
+                                        <p:attrNameLst>
+                                          <p:attrName>ppt_h</p:attrName>
+                                        </p:attrNameLst>
+                                      </p:cBhvr>
+                                      <p:tavLst>
+                                        <p:tav tm="0">
+                                          <p:val>
+                                            <p:fltVal val="0"/>
+                                          </p:val>
+                                        </p:tav>
+                                        <p:tav tm="100000">
+                                          <p:val>
+                                            <p:strVal val="#ppt_h"/>
+                                          </p:val>
+                                        </p:tav>
+                                      </p:tavLst>
+                                    </p:anim>
+                                    <p:animEffect transition="in" filter="fade">
+                                      <p:cBhvr>
+                                        <p:cTn id="24" dur="500"/>
+                                        <p:tgtEl>
+                                          <p:spTgt spid="2">
+                                            <p:txEl>
+                                              <p:pRg st="6" end="6"/>
+                                            </p:txEl>
+                                          </p:spTgt>
+                                        </p:tgtEl>
+                                      </p:cBhvr>
+                                    </p:animEffect>
+                                  </p:childTnLst>
+                                </p:cTn>
+                              </p:par>
+                              <p:par>
+                                <p:cTn id="25" presetID="53" presetClass="entr" presetSubtype="16" fill="hold" nodeType="withEffect">
+                                  <p:stCondLst>
+                                    <p:cond delay="0"/>
+                                  </p:stCondLst>
+                                  <p:childTnLst>
+                                    <p:set>
+                                      <p:cBhvr>
+                                        <p:cTn id="26" dur="1" fill="hold">
+                                          <p:stCondLst>
+                                            <p:cond delay="0"/>
+                                          </p:stCondLst>
+                                        </p:cTn>
+                                        <p:tgtEl>
+                                          <p:spTgt spid="2">
+                                            <p:txEl>
+                                              <p:pRg st="8" end="8"/>
+                                            </p:txEl>
+                                          </p:spTgt>
+                                        </p:tgtEl>
+                                        <p:attrNameLst>
+                                          <p:attrName>style.visibility</p:attrName>
+                                        </p:attrNameLst>
+                                      </p:cBhvr>
+                                      <p:to>
+                                        <p:strVal val="visible"/>
+                                      </p:to>
+                                    </p:set>
+                                    <p:anim calcmode="lin" valueType="num">
+                                      <p:cBhvr>
+                                        <p:cTn id="27" dur="500" fill="hold"/>
+                                        <p:tgtEl>
+                                          <p:spTgt spid="2">
+                                            <p:txEl>
+                                              <p:pRg st="8" end="8"/>
+                                            </p:txEl>
+                                          </p:spTgt>
+                                        </p:tgtEl>
+                                        <p:attrNameLst>
+                                          <p:attrName>ppt_w</p:attrName>
+                                        </p:attrNameLst>
+                                      </p:cBhvr>
+                                      <p:tavLst>
+                                        <p:tav tm="0">
+                                          <p:val>
+                                            <p:fltVal val="0"/>
+                                          </p:val>
+                                        </p:tav>
+                                        <p:tav tm="100000">
+                                          <p:val>
+                                            <p:strVal val="#ppt_w"/>
+                                          </p:val>
+                                        </p:tav>
+                                      </p:tavLst>
+                                    </p:anim>
+                                    <p:anim calcmode="lin" valueType="num">
+                                      <p:cBhvr>
+                                        <p:cTn id="28" dur="500" fill="hold"/>
+                                        <p:tgtEl>
+                                          <p:spTgt spid="2">
+                                            <p:txEl>
+                                              <p:pRg st="8" end="8"/>
+                                            </p:txEl>
+                                          </p:spTgt>
+                                        </p:tgtEl>
+                                        <p:attrNameLst>
+                                          <p:attrName>ppt_h</p:attrName>
+                                        </p:attrNameLst>
+                                      </p:cBhvr>
+                                      <p:tavLst>
+                                        <p:tav tm="0">
+                                          <p:val>
+                                            <p:fltVal val="0"/>
+                                          </p:val>
+                                        </p:tav>
+                                        <p:tav tm="100000">
+                                          <p:val>
+                                            <p:strVal val="#ppt_h"/>
+                                          </p:val>
+                                        </p:tav>
+                                      </p:tavLst>
+                                    </p:anim>
+                                    <p:animEffect transition="in" filter="fade">
+                                      <p:cBhvr>
+                                        <p:cTn id="29" dur="500"/>
+                                        <p:tgtEl>
+                                          <p:spTgt spid="2">
+                                            <p:txEl>
+                                              <p:pRg st="8" end="8"/>
+                                            </p:txEl>
+                                          </p:spTgt>
+                                        </p:tgtEl>
+                                      </p:cBhvr>
+                                    </p:animEffect>
+                                  </p:childTnLst>
+                                </p:cTn>
+                              </p:par>
+                            </p:childTnLst>
+                          </p:cTn>
+                        </p:par>
+                      </p:childTnLst>
+                    </p:cTn>
+                  </p:par>
+                </p:childTnLst>
+              </p:cTn>
+              <p:prevCondLst>
+                <p:cond evt="onPrev" delay="0">
+                  <p:tgtEl>
+                    <p:sldTgt/>
+                  </p:tgtEl>
+                </p:cond>
+              </p:prevCondLst>
+              <p:nextCondLst>
+                <p:cond evt="onNext" delay="0">
+                  <p:tgtEl>
+                    <p:sldTgt/>
+                  </p:tgtEl>
+                </p:cond>
+              </p:nextCondLst>
+            </p:seq>
+          </p:childTnLst>
+        </p:cTn>
+      </p:par>
+    </p:tnLst>
+  </p:timing>
+</p:sld>
+</file>
+
+<file path=ppt/slides/slide11.xml><?xml version="1.0" encoding="utf-8"?>
+<p:sld xmlns:a="http://schemas.openxmlformats.org/drawingml/2006/main" xmlns:r="http://schemas.openxmlformats.org/officeDocument/2006/relationships" xmlns:p="http://schemas.openxmlformats.org/presentationml/2006/main">
+  <p:cSld>
+    <p:spTree>
+      <p:nvGrpSpPr>
+        <p:cNvPr id="1" name=""/>
+        <p:cNvGrpSpPr/>
+        <p:nvPr/>
+      </p:nvGrpSpPr>
+      <p:grpSpPr>
+        <a:xfrm>
+          <a:off x="0" y="0"/>
+          <a:ext cx="0" cy="0"/>
+          <a:chOff x="0" y="0"/>
+          <a:chExt cx="0" cy="0"/>
+        </a:xfrm>
+      </p:grpSpPr>
+      <p:sp>
+        <p:nvSpPr>
+          <p:cNvPr id="2" name="TextBox 1"/>
+          <p:cNvSpPr txBox="1"/>
+          <p:nvPr/>
+        </p:nvSpPr>
+        <p:spPr>
+          <a:xfrm>
+            <a:off x="2637692" y="1907931"/>
+            <a:ext cx="7728438" cy="1569660"/>
+          </a:xfrm>
+          <a:prstGeom prst="rect">
+            <a:avLst/>
+          </a:prstGeom>
+          <a:noFill/>
+        </p:spPr>
+        <p:txBody>
+          <a:bodyPr wrap="square" rtlCol="0">
+            <a:spAutoFit/>
+          </a:bodyPr>
+          <a:lstStyle/>
+          <a:p>
+            <a:r>
+              <a:rPr lang="en-US" sz="9600" dirty="0" smtClean="0"/>
+              <a:t>THANK YOU</a:t>
+            </a:r>
+            <a:endParaRPr lang="en-IN" sz="9600" dirty="0"/>
+          </a:p>
+        </p:txBody>
+      </p:sp>
+    </p:spTree>
+    <p:extLst>
+      <p:ext uri="{BB962C8B-B14F-4D97-AF65-F5344CB8AC3E}">
+        <p14:creationId xmlns:p14="http://schemas.microsoft.com/office/powerpoint/2010/main" val="2833710442"/>
+      </p:ext>
+    </p:extLst>
+  </p:cSld>
+  <p:clrMapOvr>
+    <a:masterClrMapping/>
+  </p:clrMapOvr>
+  <p:transition spd="slow">
+    <p:wipe/>
+  </p:transition>
+  <p:timing>
+    <p:tnLst>
+      <p:par>
+        <p:cTn id="1" dur="indefinite" restart="never" nodeType="tmRoot"/>
+      </p:par>
+    </p:tnLst>
+  </p:timing>
+</p:sld>
+</file>
+
 <file path=ppt/slides/slide2.xml><?xml version="1.0" encoding="utf-8"?>
 <p:sld xmlns:a="http://schemas.openxmlformats.org/drawingml/2006/main" xmlns:r="http://schemas.openxmlformats.org/officeDocument/2006/relationships" xmlns:p="http://schemas.openxmlformats.org/presentationml/2006/main">
   <p:cSld>
@@ -6306,12 +7062,17 @@
             </a:pPr>
             <a:r>
               <a:rPr lang="en-US" dirty="0" smtClean="0"/>
-              <a:t>Used to train Machine Learning models and Deep Learning models to predict air </a:t>
-            </a:r>
-            <a:r>
-              <a:rPr lang="en-US" dirty="0" smtClean="0"/>
-              <a:t>quality, creating the backend for the project and connecting to the database.</a:t>
-            </a:r>
+              <a:t>Used to train Machine Learning models and Deep Learning models to predict </a:t>
+            </a:r>
+            <a:r>
+              <a:rPr lang="en-US" smtClean="0"/>
+              <a:t>air </a:t>
+            </a:r>
+            <a:r>
+              <a:rPr lang="en-US" smtClean="0"/>
+              <a:t>quality.</a:t>
+            </a:r>
+            <a:endParaRPr lang="en-US" dirty="0" smtClean="0"/>
           </a:p>
           <a:p>
             <a:pPr marL="285750" indent="-285750">
@@ -6368,7 +7129,6 @@
               <a:rPr lang="en-US" dirty="0" smtClean="0"/>
               <a:t>Used to train LSTM model.</a:t>
             </a:r>
-            <a:endParaRPr lang="en-US" dirty="0" smtClean="0"/>
           </a:p>
         </p:txBody>
       </p:sp>
@@ -6797,673 +7557,110 @@
           <a:chExt cx="0" cy="0"/>
         </a:xfrm>
       </p:grpSpPr>
-      <p:sp>
-        <p:nvSpPr>
-          <p:cNvPr id="2" name="TextBox 1"/>
-          <p:cNvSpPr txBox="1"/>
+      <p:pic>
+        <p:nvPicPr>
+          <p:cNvPr id="2" name="Picture 1"/>
+          <p:cNvPicPr>
+            <a:picLocks noChangeAspect="1"/>
+          </p:cNvPicPr>
           <p:nvPr/>
-        </p:nvSpPr>
+        </p:nvPicPr>
+        <p:blipFill>
+          <a:blip r:embed="rId2">
+            <a:extLst>
+              <a:ext uri="{28A0092B-C50C-407E-A947-70E740481C1C}">
+                <a14:useLocalDpi xmlns:a14="http://schemas.microsoft.com/office/drawing/2010/main" val="0"/>
+              </a:ext>
+            </a:extLst>
+          </a:blip>
+          <a:stretch>
+            <a:fillRect/>
+          </a:stretch>
+        </p:blipFill>
         <p:spPr>
           <a:xfrm>
-            <a:off x="738556" y="1661745"/>
-            <a:ext cx="11139854" cy="2739211"/>
+            <a:off x="0" y="0"/>
+            <a:ext cx="12192000" cy="6858000"/>
           </a:xfrm>
           <a:prstGeom prst="rect">
             <a:avLst/>
           </a:prstGeom>
-          <a:noFill/>
         </p:spPr>
-        <p:txBody>
-          <a:bodyPr wrap="square" rtlCol="0">
-            <a:spAutoFit/>
-          </a:bodyPr>
-          <a:lstStyle/>
-          <a:p>
-            <a:r>
-              <a:rPr lang="en-IN" sz="2800" dirty="0" smtClean="0">
-                <a:solidFill>
-                  <a:schemeClr val="bg2">
-                    <a:lumMod val="75000"/>
-                  </a:schemeClr>
-                </a:solidFill>
-              </a:rPr>
-              <a:t>Objectives for Milestone 3:</a:t>
-            </a:r>
-            <a:endParaRPr lang="en-IN" dirty="0" smtClean="0">
-              <a:solidFill>
-                <a:schemeClr val="bg2">
-                  <a:lumMod val="75000"/>
-                </a:schemeClr>
-              </a:solidFill>
-            </a:endParaRPr>
-          </a:p>
-          <a:p>
-            <a:endParaRPr lang="en-IN" dirty="0"/>
-          </a:p>
-          <a:p>
-            <a:pPr marL="285750" indent="-285750">
-              <a:buFont typeface="Arial" panose="020B0604020202020204" pitchFamily="34" charset="0"/>
-              <a:buChar char="•"/>
-            </a:pPr>
-            <a:r>
-              <a:rPr lang="en-IN" dirty="0"/>
-              <a:t>Implement </a:t>
-            </a:r>
-            <a:r>
-              <a:rPr lang="en-IN" dirty="0" smtClean="0"/>
-              <a:t>Backend using Python and connect it to frontend</a:t>
-            </a:r>
-            <a:endParaRPr lang="en-IN" dirty="0"/>
-          </a:p>
-          <a:p>
-            <a:pPr marL="285750" indent="-285750">
-              <a:buFont typeface="Arial" panose="020B0604020202020204" pitchFamily="34" charset="0"/>
-              <a:buChar char="•"/>
-            </a:pPr>
-            <a:endParaRPr lang="en-US" dirty="0"/>
-          </a:p>
-          <a:p>
-            <a:pPr marL="285750" indent="-285750">
-              <a:buFont typeface="Arial" panose="020B0604020202020204" pitchFamily="34" charset="0"/>
-              <a:buChar char="•"/>
-            </a:pPr>
-            <a:r>
-              <a:rPr lang="en-US" dirty="0" smtClean="0"/>
-              <a:t>Improve UI responsiveness</a:t>
-            </a:r>
-          </a:p>
-          <a:p>
-            <a:pPr marL="285750" indent="-285750">
-              <a:buFont typeface="Arial" panose="020B0604020202020204" pitchFamily="34" charset="0"/>
-              <a:buChar char="•"/>
-            </a:pPr>
-            <a:endParaRPr lang="en-US" dirty="0"/>
-          </a:p>
-          <a:p>
-            <a:pPr marL="285750" indent="-285750">
-              <a:buFont typeface="Arial" panose="020B0604020202020204" pitchFamily="34" charset="0"/>
-              <a:buChar char="•"/>
-            </a:pPr>
-            <a:r>
-              <a:rPr lang="en-US" dirty="0" smtClean="0"/>
-              <a:t>Integrate a </a:t>
-            </a:r>
-            <a:r>
-              <a:rPr lang="en-US" dirty="0" err="1" smtClean="0"/>
-              <a:t>chatbot</a:t>
-            </a:r>
-            <a:r>
-              <a:rPr lang="en-US" dirty="0" smtClean="0"/>
-              <a:t> in UI</a:t>
-            </a:r>
-          </a:p>
-          <a:p>
-            <a:pPr marL="285750" indent="-285750">
-              <a:buFont typeface="Arial" panose="020B0604020202020204" pitchFamily="34" charset="0"/>
-              <a:buChar char="•"/>
-            </a:pPr>
-            <a:endParaRPr lang="en-US" dirty="0"/>
-          </a:p>
-          <a:p>
-            <a:pPr marL="285750" indent="-285750">
-              <a:buFont typeface="Arial" panose="020B0604020202020204" pitchFamily="34" charset="0"/>
-              <a:buChar char="•"/>
-            </a:pPr>
-            <a:r>
-              <a:rPr lang="en-US" dirty="0" smtClean="0"/>
-              <a:t>Integrate a weather agent</a:t>
-            </a:r>
-            <a:endParaRPr lang="en-IN" dirty="0"/>
-          </a:p>
-        </p:txBody>
-      </p:sp>
+      </p:pic>
     </p:spTree>
     <p:extLst>
       <p:ext uri="{BB962C8B-B14F-4D97-AF65-F5344CB8AC3E}">
-        <p14:creationId xmlns:p14="http://schemas.microsoft.com/office/powerpoint/2010/main" val="215316"/>
+        <p14:creationId xmlns:p14="http://schemas.microsoft.com/office/powerpoint/2010/main" val="1421526065"/>
       </p:ext>
     </p:extLst>
   </p:cSld>
   <p:clrMapOvr>
     <a:masterClrMapping/>
   </p:clrMapOvr>
-  <p:timing>
-    <p:tnLst>
-      <p:par>
-        <p:cTn id="1" dur="indefinite" restart="never" nodeType="tmRoot">
-          <p:childTnLst>
-            <p:seq concurrent="1" nextAc="seek">
-              <p:cTn id="2" dur="indefinite" nodeType="mainSeq">
-                <p:childTnLst>
-                  <p:par>
-                    <p:cTn id="3" fill="hold">
-                      <p:stCondLst>
-                        <p:cond delay="indefinite"/>
-                      </p:stCondLst>
-                      <p:childTnLst>
-                        <p:par>
-                          <p:cTn id="4" fill="hold">
-                            <p:stCondLst>
-                              <p:cond delay="0"/>
-                            </p:stCondLst>
-                            <p:childTnLst>
-                              <p:par>
-                                <p:cTn id="5" presetID="53" presetClass="entr" presetSubtype="16" fill="hold" nodeType="clickEffect">
-                                  <p:stCondLst>
-                                    <p:cond delay="0"/>
-                                  </p:stCondLst>
-                                  <p:childTnLst>
-                                    <p:set>
-                                      <p:cBhvr>
-                                        <p:cTn id="6" dur="1" fill="hold">
-                                          <p:stCondLst>
-                                            <p:cond delay="0"/>
-                                          </p:stCondLst>
-                                        </p:cTn>
-                                        <p:tgtEl>
-                                          <p:spTgt spid="2">
-                                            <p:txEl>
-                                              <p:pRg st="0" end="0"/>
-                                            </p:txEl>
-                                          </p:spTgt>
-                                        </p:tgtEl>
-                                        <p:attrNameLst>
-                                          <p:attrName>style.visibility</p:attrName>
-                                        </p:attrNameLst>
-                                      </p:cBhvr>
-                                      <p:to>
-                                        <p:strVal val="visible"/>
-                                      </p:to>
-                                    </p:set>
-                                    <p:anim calcmode="lin" valueType="num">
-                                      <p:cBhvr>
-                                        <p:cTn id="7" dur="500" fill="hold"/>
-                                        <p:tgtEl>
-                                          <p:spTgt spid="2">
-                                            <p:txEl>
-                                              <p:pRg st="0" end="0"/>
-                                            </p:txEl>
-                                          </p:spTgt>
-                                        </p:tgtEl>
-                                        <p:attrNameLst>
-                                          <p:attrName>ppt_w</p:attrName>
-                                        </p:attrNameLst>
-                                      </p:cBhvr>
-                                      <p:tavLst>
-                                        <p:tav tm="0">
-                                          <p:val>
-                                            <p:fltVal val="0"/>
-                                          </p:val>
-                                        </p:tav>
-                                        <p:tav tm="100000">
-                                          <p:val>
-                                            <p:strVal val="#ppt_w"/>
-                                          </p:val>
-                                        </p:tav>
-                                      </p:tavLst>
-                                    </p:anim>
-                                    <p:anim calcmode="lin" valueType="num">
-                                      <p:cBhvr>
-                                        <p:cTn id="8" dur="500" fill="hold"/>
-                                        <p:tgtEl>
-                                          <p:spTgt spid="2">
-                                            <p:txEl>
-                                              <p:pRg st="0" end="0"/>
-                                            </p:txEl>
-                                          </p:spTgt>
-                                        </p:tgtEl>
-                                        <p:attrNameLst>
-                                          <p:attrName>ppt_h</p:attrName>
-                                        </p:attrNameLst>
-                                      </p:cBhvr>
-                                      <p:tavLst>
-                                        <p:tav tm="0">
-                                          <p:val>
-                                            <p:fltVal val="0"/>
-                                          </p:val>
-                                        </p:tav>
-                                        <p:tav tm="100000">
-                                          <p:val>
-                                            <p:strVal val="#ppt_h"/>
-                                          </p:val>
-                                        </p:tav>
-                                      </p:tavLst>
-                                    </p:anim>
-                                    <p:animEffect transition="in" filter="fade">
-                                      <p:cBhvr>
-                                        <p:cTn id="9" dur="500"/>
-                                        <p:tgtEl>
-                                          <p:spTgt spid="2">
-                                            <p:txEl>
-                                              <p:pRg st="0" end="0"/>
-                                            </p:txEl>
-                                          </p:spTgt>
-                                        </p:tgtEl>
-                                      </p:cBhvr>
-                                    </p:animEffect>
-                                  </p:childTnLst>
-                                </p:cTn>
-                              </p:par>
-                              <p:par>
-                                <p:cTn id="10" presetID="53" presetClass="entr" presetSubtype="16" fill="hold" nodeType="withEffect">
-                                  <p:stCondLst>
-                                    <p:cond delay="0"/>
-                                  </p:stCondLst>
-                                  <p:childTnLst>
-                                    <p:set>
-                                      <p:cBhvr>
-                                        <p:cTn id="11" dur="1" fill="hold">
-                                          <p:stCondLst>
-                                            <p:cond delay="0"/>
-                                          </p:stCondLst>
-                                        </p:cTn>
-                                        <p:tgtEl>
-                                          <p:spTgt spid="2">
-                                            <p:txEl>
-                                              <p:pRg st="2" end="2"/>
-                                            </p:txEl>
-                                          </p:spTgt>
-                                        </p:tgtEl>
-                                        <p:attrNameLst>
-                                          <p:attrName>style.visibility</p:attrName>
-                                        </p:attrNameLst>
-                                      </p:cBhvr>
-                                      <p:to>
-                                        <p:strVal val="visible"/>
-                                      </p:to>
-                                    </p:set>
-                                    <p:anim calcmode="lin" valueType="num">
-                                      <p:cBhvr>
-                                        <p:cTn id="12" dur="500" fill="hold"/>
-                                        <p:tgtEl>
-                                          <p:spTgt spid="2">
-                                            <p:txEl>
-                                              <p:pRg st="2" end="2"/>
-                                            </p:txEl>
-                                          </p:spTgt>
-                                        </p:tgtEl>
-                                        <p:attrNameLst>
-                                          <p:attrName>ppt_w</p:attrName>
-                                        </p:attrNameLst>
-                                      </p:cBhvr>
-                                      <p:tavLst>
-                                        <p:tav tm="0">
-                                          <p:val>
-                                            <p:fltVal val="0"/>
-                                          </p:val>
-                                        </p:tav>
-                                        <p:tav tm="100000">
-                                          <p:val>
-                                            <p:strVal val="#ppt_w"/>
-                                          </p:val>
-                                        </p:tav>
-                                      </p:tavLst>
-                                    </p:anim>
-                                    <p:anim calcmode="lin" valueType="num">
-                                      <p:cBhvr>
-                                        <p:cTn id="13" dur="500" fill="hold"/>
-                                        <p:tgtEl>
-                                          <p:spTgt spid="2">
-                                            <p:txEl>
-                                              <p:pRg st="2" end="2"/>
-                                            </p:txEl>
-                                          </p:spTgt>
-                                        </p:tgtEl>
-                                        <p:attrNameLst>
-                                          <p:attrName>ppt_h</p:attrName>
-                                        </p:attrNameLst>
-                                      </p:cBhvr>
-                                      <p:tavLst>
-                                        <p:tav tm="0">
-                                          <p:val>
-                                            <p:fltVal val="0"/>
-                                          </p:val>
-                                        </p:tav>
-                                        <p:tav tm="100000">
-                                          <p:val>
-                                            <p:strVal val="#ppt_h"/>
-                                          </p:val>
-                                        </p:tav>
-                                      </p:tavLst>
-                                    </p:anim>
-                                    <p:animEffect transition="in" filter="fade">
-                                      <p:cBhvr>
-                                        <p:cTn id="14" dur="500"/>
-                                        <p:tgtEl>
-                                          <p:spTgt spid="2">
-                                            <p:txEl>
-                                              <p:pRg st="2" end="2"/>
-                                            </p:txEl>
-                                          </p:spTgt>
-                                        </p:tgtEl>
-                                      </p:cBhvr>
-                                    </p:animEffect>
-                                  </p:childTnLst>
-                                </p:cTn>
-                              </p:par>
-                              <p:par>
-                                <p:cTn id="15" presetID="53" presetClass="entr" presetSubtype="16" fill="hold" nodeType="withEffect">
-                                  <p:stCondLst>
-                                    <p:cond delay="0"/>
-                                  </p:stCondLst>
-                                  <p:childTnLst>
-                                    <p:set>
-                                      <p:cBhvr>
-                                        <p:cTn id="16" dur="1" fill="hold">
-                                          <p:stCondLst>
-                                            <p:cond delay="0"/>
-                                          </p:stCondLst>
-                                        </p:cTn>
-                                        <p:tgtEl>
-                                          <p:spTgt spid="2">
-                                            <p:txEl>
-                                              <p:pRg st="4" end="4"/>
-                                            </p:txEl>
-                                          </p:spTgt>
-                                        </p:tgtEl>
-                                        <p:attrNameLst>
-                                          <p:attrName>style.visibility</p:attrName>
-                                        </p:attrNameLst>
-                                      </p:cBhvr>
-                                      <p:to>
-                                        <p:strVal val="visible"/>
-                                      </p:to>
-                                    </p:set>
-                                    <p:anim calcmode="lin" valueType="num">
-                                      <p:cBhvr>
-                                        <p:cTn id="17" dur="500" fill="hold"/>
-                                        <p:tgtEl>
-                                          <p:spTgt spid="2">
-                                            <p:txEl>
-                                              <p:pRg st="4" end="4"/>
-                                            </p:txEl>
-                                          </p:spTgt>
-                                        </p:tgtEl>
-                                        <p:attrNameLst>
-                                          <p:attrName>ppt_w</p:attrName>
-                                        </p:attrNameLst>
-                                      </p:cBhvr>
-                                      <p:tavLst>
-                                        <p:tav tm="0">
-                                          <p:val>
-                                            <p:fltVal val="0"/>
-                                          </p:val>
-                                        </p:tav>
-                                        <p:tav tm="100000">
-                                          <p:val>
-                                            <p:strVal val="#ppt_w"/>
-                                          </p:val>
-                                        </p:tav>
-                                      </p:tavLst>
-                                    </p:anim>
-                                    <p:anim calcmode="lin" valueType="num">
-                                      <p:cBhvr>
-                                        <p:cTn id="18" dur="500" fill="hold"/>
-                                        <p:tgtEl>
-                                          <p:spTgt spid="2">
-                                            <p:txEl>
-                                              <p:pRg st="4" end="4"/>
-                                            </p:txEl>
-                                          </p:spTgt>
-                                        </p:tgtEl>
-                                        <p:attrNameLst>
-                                          <p:attrName>ppt_h</p:attrName>
-                                        </p:attrNameLst>
-                                      </p:cBhvr>
-                                      <p:tavLst>
-                                        <p:tav tm="0">
-                                          <p:val>
-                                            <p:fltVal val="0"/>
-                                          </p:val>
-                                        </p:tav>
-                                        <p:tav tm="100000">
-                                          <p:val>
-                                            <p:strVal val="#ppt_h"/>
-                                          </p:val>
-                                        </p:tav>
-                                      </p:tavLst>
-                                    </p:anim>
-                                    <p:animEffect transition="in" filter="fade">
-                                      <p:cBhvr>
-                                        <p:cTn id="19" dur="500"/>
-                                        <p:tgtEl>
-                                          <p:spTgt spid="2">
-                                            <p:txEl>
-                                              <p:pRg st="4" end="4"/>
-                                            </p:txEl>
-                                          </p:spTgt>
-                                        </p:tgtEl>
-                                      </p:cBhvr>
-                                    </p:animEffect>
-                                  </p:childTnLst>
-                                </p:cTn>
-                              </p:par>
-                              <p:par>
-                                <p:cTn id="20" presetID="53" presetClass="entr" presetSubtype="16" fill="hold" nodeType="withEffect">
-                                  <p:stCondLst>
-                                    <p:cond delay="0"/>
-                                  </p:stCondLst>
-                                  <p:childTnLst>
-                                    <p:set>
-                                      <p:cBhvr>
-                                        <p:cTn id="21" dur="1" fill="hold">
-                                          <p:stCondLst>
-                                            <p:cond delay="0"/>
-                                          </p:stCondLst>
-                                        </p:cTn>
-                                        <p:tgtEl>
-                                          <p:spTgt spid="2">
-                                            <p:txEl>
-                                              <p:pRg st="6" end="6"/>
-                                            </p:txEl>
-                                          </p:spTgt>
-                                        </p:tgtEl>
-                                        <p:attrNameLst>
-                                          <p:attrName>style.visibility</p:attrName>
-                                        </p:attrNameLst>
-                                      </p:cBhvr>
-                                      <p:to>
-                                        <p:strVal val="visible"/>
-                                      </p:to>
-                                    </p:set>
-                                    <p:anim calcmode="lin" valueType="num">
-                                      <p:cBhvr>
-                                        <p:cTn id="22" dur="500" fill="hold"/>
-                                        <p:tgtEl>
-                                          <p:spTgt spid="2">
-                                            <p:txEl>
-                                              <p:pRg st="6" end="6"/>
-                                            </p:txEl>
-                                          </p:spTgt>
-                                        </p:tgtEl>
-                                        <p:attrNameLst>
-                                          <p:attrName>ppt_w</p:attrName>
-                                        </p:attrNameLst>
-                                      </p:cBhvr>
-                                      <p:tavLst>
-                                        <p:tav tm="0">
-                                          <p:val>
-                                            <p:fltVal val="0"/>
-                                          </p:val>
-                                        </p:tav>
-                                        <p:tav tm="100000">
-                                          <p:val>
-                                            <p:strVal val="#ppt_w"/>
-                                          </p:val>
-                                        </p:tav>
-                                      </p:tavLst>
-                                    </p:anim>
-                                    <p:anim calcmode="lin" valueType="num">
-                                      <p:cBhvr>
-                                        <p:cTn id="23" dur="500" fill="hold"/>
-                                        <p:tgtEl>
-                                          <p:spTgt spid="2">
-                                            <p:txEl>
-                                              <p:pRg st="6" end="6"/>
-                                            </p:txEl>
-                                          </p:spTgt>
-                                        </p:tgtEl>
-                                        <p:attrNameLst>
-                                          <p:attrName>ppt_h</p:attrName>
-                                        </p:attrNameLst>
-                                      </p:cBhvr>
-                                      <p:tavLst>
-                                        <p:tav tm="0">
-                                          <p:val>
-                                            <p:fltVal val="0"/>
-                                          </p:val>
-                                        </p:tav>
-                                        <p:tav tm="100000">
-                                          <p:val>
-                                            <p:strVal val="#ppt_h"/>
-                                          </p:val>
-                                        </p:tav>
-                                      </p:tavLst>
-                                    </p:anim>
-                                    <p:animEffect transition="in" filter="fade">
-                                      <p:cBhvr>
-                                        <p:cTn id="24" dur="500"/>
-                                        <p:tgtEl>
-                                          <p:spTgt spid="2">
-                                            <p:txEl>
-                                              <p:pRg st="6" end="6"/>
-                                            </p:txEl>
-                                          </p:spTgt>
-                                        </p:tgtEl>
-                                      </p:cBhvr>
-                                    </p:animEffect>
-                                  </p:childTnLst>
-                                </p:cTn>
-                              </p:par>
-                              <p:par>
-                                <p:cTn id="25" presetID="53" presetClass="entr" presetSubtype="16" fill="hold" nodeType="withEffect">
-                                  <p:stCondLst>
-                                    <p:cond delay="0"/>
-                                  </p:stCondLst>
-                                  <p:childTnLst>
-                                    <p:set>
-                                      <p:cBhvr>
-                                        <p:cTn id="26" dur="1" fill="hold">
-                                          <p:stCondLst>
-                                            <p:cond delay="0"/>
-                                          </p:stCondLst>
-                                        </p:cTn>
-                                        <p:tgtEl>
-                                          <p:spTgt spid="2">
-                                            <p:txEl>
-                                              <p:pRg st="8" end="8"/>
-                                            </p:txEl>
-                                          </p:spTgt>
-                                        </p:tgtEl>
-                                        <p:attrNameLst>
-                                          <p:attrName>style.visibility</p:attrName>
-                                        </p:attrNameLst>
-                                      </p:cBhvr>
-                                      <p:to>
-                                        <p:strVal val="visible"/>
-                                      </p:to>
-                                    </p:set>
-                                    <p:anim calcmode="lin" valueType="num">
-                                      <p:cBhvr>
-                                        <p:cTn id="27" dur="500" fill="hold"/>
-                                        <p:tgtEl>
-                                          <p:spTgt spid="2">
-                                            <p:txEl>
-                                              <p:pRg st="8" end="8"/>
-                                            </p:txEl>
-                                          </p:spTgt>
-                                        </p:tgtEl>
-                                        <p:attrNameLst>
-                                          <p:attrName>ppt_w</p:attrName>
-                                        </p:attrNameLst>
-                                      </p:cBhvr>
-                                      <p:tavLst>
-                                        <p:tav tm="0">
-                                          <p:val>
-                                            <p:fltVal val="0"/>
-                                          </p:val>
-                                        </p:tav>
-                                        <p:tav tm="100000">
-                                          <p:val>
-                                            <p:strVal val="#ppt_w"/>
-                                          </p:val>
-                                        </p:tav>
-                                      </p:tavLst>
-                                    </p:anim>
-                                    <p:anim calcmode="lin" valueType="num">
-                                      <p:cBhvr>
-                                        <p:cTn id="28" dur="500" fill="hold"/>
-                                        <p:tgtEl>
-                                          <p:spTgt spid="2">
-                                            <p:txEl>
-                                              <p:pRg st="8" end="8"/>
-                                            </p:txEl>
-                                          </p:spTgt>
-                                        </p:tgtEl>
-                                        <p:attrNameLst>
-                                          <p:attrName>ppt_h</p:attrName>
-                                        </p:attrNameLst>
-                                      </p:cBhvr>
-                                      <p:tavLst>
-                                        <p:tav tm="0">
-                                          <p:val>
-                                            <p:fltVal val="0"/>
-                                          </p:val>
-                                        </p:tav>
-                                        <p:tav tm="100000">
-                                          <p:val>
-                                            <p:strVal val="#ppt_h"/>
-                                          </p:val>
-                                        </p:tav>
-                                      </p:tavLst>
-                                    </p:anim>
-                                    <p:animEffect transition="in" filter="fade">
-                                      <p:cBhvr>
-                                        <p:cTn id="29" dur="500"/>
-                                        <p:tgtEl>
-                                          <p:spTgt spid="2">
-                                            <p:txEl>
-                                              <p:pRg st="8" end="8"/>
-                                            </p:txEl>
-                                          </p:spTgt>
-                                        </p:tgtEl>
-                                      </p:cBhvr>
-                                    </p:animEffect>
-                                  </p:childTnLst>
-                                </p:cTn>
-                              </p:par>
-                            </p:childTnLst>
-                          </p:cTn>
-                        </p:par>
-                      </p:childTnLst>
-                    </p:cTn>
-                  </p:par>
-                </p:childTnLst>
-              </p:cTn>
-              <p:prevCondLst>
-                <p:cond evt="onPrev" delay="0">
-                  <p:tgtEl>
-                    <p:sldTgt/>
-                  </p:tgtEl>
-                </p:cond>
-              </p:prevCondLst>
-              <p:nextCondLst>
-                <p:cond evt="onNext" delay="0">
-                  <p:tgtEl>
-                    <p:sldTgt/>
-                  </p:tgtEl>
-                </p:cond>
-              </p:nextCondLst>
-            </p:seq>
-          </p:childTnLst>
-        </p:cTn>
-      </p:par>
-    </p:tnLst>
-  </p:timing>
 </p:sld>
 </file>
 
 <file path=ppt/slides/slide8.xml><?xml version="1.0" encoding="utf-8"?>
+<p:sld xmlns:a="http://schemas.openxmlformats.org/drawingml/2006/main" xmlns:r="http://schemas.openxmlformats.org/officeDocument/2006/relationships" xmlns:p="http://schemas.openxmlformats.org/presentationml/2006/main">
+  <p:cSld>
+    <p:spTree>
+      <p:nvGrpSpPr>
+        <p:cNvPr id="1" name=""/>
+        <p:cNvGrpSpPr/>
+        <p:nvPr/>
+      </p:nvGrpSpPr>
+      <p:grpSpPr>
+        <a:xfrm>
+          <a:off x="0" y="0"/>
+          <a:ext cx="0" cy="0"/>
+          <a:chOff x="0" y="0"/>
+          <a:chExt cx="0" cy="0"/>
+        </a:xfrm>
+      </p:grpSpPr>
+      <p:pic>
+        <p:nvPicPr>
+          <p:cNvPr id="2" name="Picture 1"/>
+          <p:cNvPicPr>
+            <a:picLocks noChangeAspect="1"/>
+          </p:cNvPicPr>
+          <p:nvPr/>
+        </p:nvPicPr>
+        <p:blipFill>
+          <a:blip r:embed="rId2">
+            <a:extLst>
+              <a:ext uri="{28A0092B-C50C-407E-A947-70E740481C1C}">
+                <a14:useLocalDpi xmlns:a14="http://schemas.microsoft.com/office/drawing/2010/main" val="0"/>
+              </a:ext>
+            </a:extLst>
+          </a:blip>
+          <a:stretch>
+            <a:fillRect/>
+          </a:stretch>
+        </p:blipFill>
+        <p:spPr>
+          <a:xfrm>
+            <a:off x="0" y="0"/>
+            <a:ext cx="12192000" cy="6858000"/>
+          </a:xfrm>
+          <a:prstGeom prst="rect">
+            <a:avLst/>
+          </a:prstGeom>
+        </p:spPr>
+      </p:pic>
+    </p:spTree>
+    <p:extLst>
+      <p:ext uri="{BB962C8B-B14F-4D97-AF65-F5344CB8AC3E}">
+        <p14:creationId xmlns:p14="http://schemas.microsoft.com/office/powerpoint/2010/main" val="62763831"/>
+      </p:ext>
+    </p:extLst>
+  </p:cSld>
+  <p:clrMapOvr>
+    <a:masterClrMapping/>
+  </p:clrMapOvr>
+</p:sld>
+</file>
+
+<file path=ppt/slides/slide9.xml><?xml version="1.0" encoding="utf-8"?>
 <p:sld xmlns:a="http://schemas.openxmlformats.org/drawingml/2006/main" xmlns:r="http://schemas.openxmlformats.org/officeDocument/2006/relationships" xmlns:p="http://schemas.openxmlformats.org/presentationml/2006/main">
   <p:cSld>
     <p:spTree>
@@ -7488,8 +7685,8 @@
         </p:nvSpPr>
         <p:spPr>
           <a:xfrm>
-            <a:off x="2637692" y="1907931"/>
-            <a:ext cx="7728438" cy="1569660"/>
+            <a:off x="958362" y="1723292"/>
+            <a:ext cx="8598877" cy="3416320"/>
           </a:xfrm>
           <a:prstGeom prst="rect">
             <a:avLst/>
@@ -7503,33 +7700,73 @@
           <a:lstStyle/>
           <a:p>
             <a:r>
-              <a:rPr lang="en-US" sz="9600" dirty="0" smtClean="0"/>
-              <a:t>THANK YOU</a:t>
-            </a:r>
-            <a:endParaRPr lang="en-IN" sz="9600" dirty="0"/>
+              <a:rPr lang="en-IN" sz="2400" dirty="0"/>
+              <a:t>===== MODEL ACCURACIES (R² Score) =====</a:t>
+            </a:r>
+          </a:p>
+          <a:p>
+            <a:r>
+              <a:rPr lang="en-IN" sz="2400" dirty="0"/>
+              <a:t>Linear Regression: 0.1511</a:t>
+            </a:r>
+          </a:p>
+          <a:p>
+            <a:r>
+              <a:rPr lang="en-IN" sz="2400" dirty="0"/>
+              <a:t>Random Forest: 0.9970</a:t>
+            </a:r>
+          </a:p>
+          <a:p>
+            <a:r>
+              <a:rPr lang="en-IN" sz="2400" dirty="0"/>
+              <a:t>Gradient Boosting: 0.9887</a:t>
+            </a:r>
+          </a:p>
+          <a:p>
+            <a:r>
+              <a:rPr lang="en-IN" sz="2400" dirty="0" err="1"/>
+              <a:t>XGBoost</a:t>
+            </a:r>
+            <a:r>
+              <a:rPr lang="en-IN" sz="2400" dirty="0"/>
+              <a:t>: 0.9838</a:t>
+            </a:r>
+          </a:p>
+          <a:p>
+            <a:endParaRPr lang="en-IN" sz="2400" dirty="0"/>
+          </a:p>
+          <a:p>
+            <a:r>
+              <a:rPr lang="en-IN" sz="2400" dirty="0"/>
+              <a:t>Best Model: Random Forest with Accuracy (R²): 0.9970</a:t>
+            </a:r>
+          </a:p>
+          <a:p>
+            <a:endParaRPr lang="en-IN" sz="2400" dirty="0"/>
+          </a:p>
+          <a:p>
+            <a:r>
+              <a:rPr lang="en-IN" sz="2400" dirty="0"/>
+              <a:t>Model saved as: </a:t>
+            </a:r>
+            <a:r>
+              <a:rPr lang="en-IN" sz="2400" dirty="0" err="1"/>
+              <a:t>best_aqi_model.pkl</a:t>
+            </a:r>
+            <a:endParaRPr lang="en-IN" sz="2400" dirty="0"/>
           </a:p>
         </p:txBody>
       </p:sp>
     </p:spTree>
     <p:extLst>
       <p:ext uri="{BB962C8B-B14F-4D97-AF65-F5344CB8AC3E}">
-        <p14:creationId xmlns:p14="http://schemas.microsoft.com/office/powerpoint/2010/main" val="2833710442"/>
+        <p14:creationId xmlns:p14="http://schemas.microsoft.com/office/powerpoint/2010/main" val="2345843093"/>
       </p:ext>
     </p:extLst>
   </p:cSld>
   <p:clrMapOvr>
     <a:masterClrMapping/>
   </p:clrMapOvr>
-  <p:transition spd="slow">
-    <p:wipe/>
-  </p:transition>
-  <p:timing>
-    <p:tnLst>
-      <p:par>
-        <p:cTn id="1" dur="indefinite" restart="never" nodeType="tmRoot"/>
-      </p:par>
-    </p:tnLst>
-  </p:timing>
 </p:sld>
 </file>
 
